--- a/ASGMNT3/JHET_Innovations-Assignment3-SRS-Presentation (1).pptx
+++ b/ASGMNT3/JHET_Innovations-Assignment3-SRS-Presentation (1).pptx
@@ -14,13 +14,13 @@
     <p:sldId id="258" r:id="rId5"/>
     <p:sldId id="265" r:id="rId6"/>
     <p:sldId id="266" r:id="rId7"/>
-    <p:sldId id="260" r:id="rId8"/>
-    <p:sldId id="267" r:id="rId9"/>
-    <p:sldId id="270" r:id="rId10"/>
-    <p:sldId id="259" r:id="rId11"/>
-    <p:sldId id="269" r:id="rId12"/>
-    <p:sldId id="262" r:id="rId13"/>
-    <p:sldId id="263" r:id="rId14"/>
+    <p:sldId id="263" r:id="rId8"/>
+    <p:sldId id="260" r:id="rId9"/>
+    <p:sldId id="267" r:id="rId10"/>
+    <p:sldId id="270" r:id="rId11"/>
+    <p:sldId id="259" r:id="rId12"/>
+    <p:sldId id="269" r:id="rId13"/>
+    <p:sldId id="271" r:id="rId14"/>
   </p:sldIdLst>
   <p:sldSz cx="12192000" cy="6858000"/>
   <p:notesSz cx="6858000" cy="9144000"/>
@@ -671,6 +671,117 @@
         <p:cNvPr id="1" name="">
           <a:extLst>
             <a:ext uri="{FF2B5EF4-FFF2-40B4-BE49-F238E27FC236}">
+              <a16:creationId xmlns:a16="http://schemas.microsoft.com/office/drawing/2014/main" id="{FD95A081-FA64-7246-854E-1B4C869D7E40}"/>
+            </a:ext>
+          </a:extLst>
+        </p:cNvPr>
+        <p:cNvGrpSpPr/>
+        <p:nvPr/>
+      </p:nvGrpSpPr>
+      <p:grpSpPr>
+        <a:xfrm>
+          <a:off x="0" y="0"/>
+          <a:ext cx="0" cy="0"/>
+          <a:chOff x="0" y="0"/>
+          <a:chExt cx="0" cy="0"/>
+        </a:xfrm>
+      </p:grpSpPr>
+      <p:sp>
+        <p:nvSpPr>
+          <p:cNvPr id="2" name="Slide Image Placeholder 1">
+            <a:extLst>
+              <a:ext uri="{FF2B5EF4-FFF2-40B4-BE49-F238E27FC236}">
+                <a16:creationId xmlns:a16="http://schemas.microsoft.com/office/drawing/2014/main" id="{44907DCC-5965-2414-89A4-10CF6106CC0D}"/>
+              </a:ext>
+            </a:extLst>
+          </p:cNvPr>
+          <p:cNvSpPr>
+            <a:spLocks noGrp="1" noRot="1" noChangeAspect="1"/>
+          </p:cNvSpPr>
+          <p:nvPr>
+            <p:ph type="sldImg"/>
+          </p:nvPr>
+        </p:nvSpPr>
+        <p:spPr/>
+      </p:sp>
+      <p:sp>
+        <p:nvSpPr>
+          <p:cNvPr id="3" name="Notes Placeholder 2">
+            <a:extLst>
+              <a:ext uri="{FF2B5EF4-FFF2-40B4-BE49-F238E27FC236}">
+                <a16:creationId xmlns:a16="http://schemas.microsoft.com/office/drawing/2014/main" id="{C1FD3BD3-419B-5D51-AB42-60F2E9157908}"/>
+              </a:ext>
+            </a:extLst>
+          </p:cNvPr>
+          <p:cNvSpPr>
+            <a:spLocks noGrp="1"/>
+          </p:cNvSpPr>
+          <p:nvPr>
+            <p:ph type="body" idx="1"/>
+          </p:nvPr>
+        </p:nvSpPr>
+        <p:spPr/>
+        <p:txBody>
+          <a:bodyPr/>
+          <a:lstStyle/>
+          <a:p>
+            <a:r>
+              <a:rPr lang="en-US" dirty="0"/>
+              <a:t>Sketch of UI, show what we want it to look like</a:t>
+            </a:r>
+          </a:p>
+        </p:txBody>
+      </p:sp>
+      <p:sp>
+        <p:nvSpPr>
+          <p:cNvPr id="4" name="Slide Number Placeholder 3">
+            <a:extLst>
+              <a:ext uri="{FF2B5EF4-FFF2-40B4-BE49-F238E27FC236}">
+                <a16:creationId xmlns:a16="http://schemas.microsoft.com/office/drawing/2014/main" id="{74E22288-3175-40B6-81B1-2359C5D3C444}"/>
+              </a:ext>
+            </a:extLst>
+          </p:cNvPr>
+          <p:cNvSpPr>
+            <a:spLocks noGrp="1"/>
+          </p:cNvSpPr>
+          <p:nvPr>
+            <p:ph type="sldNum" sz="quarter" idx="5"/>
+          </p:nvPr>
+        </p:nvSpPr>
+        <p:spPr/>
+        <p:txBody>
+          <a:bodyPr/>
+          <a:lstStyle/>
+          <a:p>
+            <a:fld id="{269ED01E-914A-41E4-88A0-C6BC45F53370}" type="slidenum">
+              <a:rPr lang="en-US" smtClean="0"/>
+              <a:t>7</a:t>
+            </a:fld>
+            <a:endParaRPr lang="en-US"/>
+          </a:p>
+        </p:txBody>
+      </p:sp>
+    </p:spTree>
+    <p:extLst>
+      <p:ext uri="{BB962C8B-B14F-4D97-AF65-F5344CB8AC3E}">
+        <p14:creationId xmlns:p14="http://schemas.microsoft.com/office/powerpoint/2010/main" val="4254775105"/>
+      </p:ext>
+    </p:extLst>
+  </p:cSld>
+  <p:clrMapOvr>
+    <a:masterClrMapping/>
+  </p:clrMapOvr>
+</p:notes>
+</file>
+
+<file path=ppt/notesSlides/notesSlide4.xml><?xml version="1.0" encoding="utf-8"?>
+<p:notes xmlns:a="http://schemas.openxmlformats.org/drawingml/2006/main" xmlns:r="http://schemas.openxmlformats.org/officeDocument/2006/relationships" xmlns:p="http://schemas.openxmlformats.org/presentationml/2006/main">
+  <p:cSld>
+    <p:spTree>
+      <p:nvGrpSpPr>
+        <p:cNvPr id="1" name="">
+          <a:extLst>
+            <a:ext uri="{FF2B5EF4-FFF2-40B4-BE49-F238E27FC236}">
               <a16:creationId xmlns:a16="http://schemas.microsoft.com/office/drawing/2014/main" id="{1D7245B7-3D8A-8032-03F4-33B854321006}"/>
             </a:ext>
           </a:extLst>
@@ -755,7 +866,7 @@
           <a:p>
             <a:fld id="{269ED01E-914A-41E4-88A0-C6BC45F53370}" type="slidenum">
               <a:rPr lang="en-US" smtClean="0"/>
-              <a:t>7</a:t>
+              <a:t>8</a:t>
             </a:fld>
             <a:endParaRPr lang="en-US"/>
           </a:p>
@@ -774,7 +885,7 @@
 </p:notes>
 </file>
 
-<file path=ppt/notesSlides/notesSlide4.xml><?xml version="1.0" encoding="utf-8"?>
+<file path=ppt/notesSlides/notesSlide5.xml><?xml version="1.0" encoding="utf-8"?>
 <p:notes xmlns:a="http://schemas.openxmlformats.org/drawingml/2006/main" xmlns:r="http://schemas.openxmlformats.org/officeDocument/2006/relationships" xmlns:p="http://schemas.openxmlformats.org/presentationml/2006/main">
   <p:cSld>
     <p:spTree>
@@ -866,7 +977,7 @@
           <a:p>
             <a:fld id="{269ED01E-914A-41E4-88A0-C6BC45F53370}" type="slidenum">
               <a:rPr lang="en-US" smtClean="0"/>
-              <a:t>8</a:t>
+              <a:t>9</a:t>
             </a:fld>
             <a:endParaRPr lang="en-US"/>
           </a:p>
@@ -885,7 +996,7 @@
 </p:notes>
 </file>
 
-<file path=ppt/notesSlides/notesSlide5.xml><?xml version="1.0" encoding="utf-8"?>
+<file path=ppt/notesSlides/notesSlide6.xml><?xml version="1.0" encoding="utf-8"?>
 <p:notes xmlns:a="http://schemas.openxmlformats.org/drawingml/2006/main" xmlns:r="http://schemas.openxmlformats.org/officeDocument/2006/relationships" xmlns:p="http://schemas.openxmlformats.org/presentationml/2006/main">
   <p:cSld>
     <p:spTree>
@@ -977,7 +1088,7 @@
           <a:p>
             <a:fld id="{269ED01E-914A-41E4-88A0-C6BC45F53370}" type="slidenum">
               <a:rPr lang="en-US" smtClean="0"/>
-              <a:t>9</a:t>
+              <a:t>10</a:t>
             </a:fld>
             <a:endParaRPr lang="en-US"/>
           </a:p>
@@ -996,7 +1107,7 @@
 </p:notes>
 </file>
 
-<file path=ppt/notesSlides/notesSlide6.xml><?xml version="1.0" encoding="utf-8"?>
+<file path=ppt/notesSlides/notesSlide7.xml><?xml version="1.0" encoding="utf-8"?>
 <p:notes xmlns:a="http://schemas.openxmlformats.org/drawingml/2006/main" xmlns:r="http://schemas.openxmlformats.org/officeDocument/2006/relationships" xmlns:p="http://schemas.openxmlformats.org/presentationml/2006/main">
   <p:cSld>
     <p:spTree>
@@ -1064,7 +1175,7 @@
           <a:p>
             <a:fld id="{269ED01E-914A-41E4-88A0-C6BC45F53370}" type="slidenum">
               <a:rPr lang="en-US" smtClean="0"/>
-              <a:t>10</a:t>
+              <a:t>11</a:t>
             </a:fld>
             <a:endParaRPr lang="en-US"/>
           </a:p>
@@ -1083,7 +1194,7 @@
 </p:notes>
 </file>
 
-<file path=ppt/notesSlides/notesSlide7.xml><?xml version="1.0" encoding="utf-8"?>
+<file path=ppt/notesSlides/notesSlide8.xml><?xml version="1.0" encoding="utf-8"?>
 <p:notes xmlns:a="http://schemas.openxmlformats.org/drawingml/2006/main" xmlns:r="http://schemas.openxmlformats.org/officeDocument/2006/relationships" xmlns:p="http://schemas.openxmlformats.org/presentationml/2006/main">
   <p:cSld>
     <p:spTree>
@@ -1175,7 +1286,7 @@
           <a:p>
             <a:fld id="{269ED01E-914A-41E4-88A0-C6BC45F53370}" type="slidenum">
               <a:rPr lang="en-US" smtClean="0"/>
-              <a:t>11</a:t>
+              <a:t>12</a:t>
             </a:fld>
             <a:endParaRPr lang="en-US"/>
           </a:p>
@@ -1194,7 +1305,7 @@
 </p:notes>
 </file>
 
-<file path=ppt/notesSlides/notesSlide8.xml><?xml version="1.0" encoding="utf-8"?>
+<file path=ppt/notesSlides/notesSlide9.xml><?xml version="1.0" encoding="utf-8"?>
 <p:notes xmlns:a="http://schemas.openxmlformats.org/drawingml/2006/main" xmlns:r="http://schemas.openxmlformats.org/officeDocument/2006/relationships" xmlns:p="http://schemas.openxmlformats.org/presentationml/2006/main">
   <p:cSld>
     <p:spTree>
@@ -1202,7 +1313,7 @@
         <p:cNvPr id="1" name="">
           <a:extLst>
             <a:ext uri="{FF2B5EF4-FFF2-40B4-BE49-F238E27FC236}">
-              <a16:creationId xmlns:a16="http://schemas.microsoft.com/office/drawing/2014/main" id="{170B9DFE-AD27-DBF8-8948-DE74D58D6379}"/>
+              <a16:creationId xmlns:a16="http://schemas.microsoft.com/office/drawing/2014/main" id="{9F82B73B-0CE9-63C1-CF18-B8547A638A6E}"/>
             </a:ext>
           </a:extLst>
         </p:cNvPr>
@@ -1222,7 +1333,7 @@
           <p:cNvPr id="2" name="Slide Image Placeholder 1">
             <a:extLst>
               <a:ext uri="{FF2B5EF4-FFF2-40B4-BE49-F238E27FC236}">
-                <a16:creationId xmlns:a16="http://schemas.microsoft.com/office/drawing/2014/main" id="{A63EDEF0-5E24-B1FB-92A3-519807B1AC96}"/>
+                <a16:creationId xmlns:a16="http://schemas.microsoft.com/office/drawing/2014/main" id="{0C46E043-58AB-621D-53C8-BE8EEFE419E1}"/>
               </a:ext>
             </a:extLst>
           </p:cNvPr>
@@ -1240,7 +1351,7 @@
           <p:cNvPr id="3" name="Notes Placeholder 2">
             <a:extLst>
               <a:ext uri="{FF2B5EF4-FFF2-40B4-BE49-F238E27FC236}">
-                <a16:creationId xmlns:a16="http://schemas.microsoft.com/office/drawing/2014/main" id="{B0BADF8E-5A8B-14D1-ED32-F5ED550F0F5E}"/>
+                <a16:creationId xmlns:a16="http://schemas.microsoft.com/office/drawing/2014/main" id="{0B477AE7-0920-1EC3-6DDF-AE127424A4DD}"/>
               </a:ext>
             </a:extLst>
           </p:cNvPr>
@@ -1268,7 +1379,7 @@
           <p:cNvPr id="4" name="Slide Number Placeholder 3">
             <a:extLst>
               <a:ext uri="{FF2B5EF4-FFF2-40B4-BE49-F238E27FC236}">
-                <a16:creationId xmlns:a16="http://schemas.microsoft.com/office/drawing/2014/main" id="{C3C0549B-7316-6EA2-5A8E-3DF671E41D12}"/>
+                <a16:creationId xmlns:a16="http://schemas.microsoft.com/office/drawing/2014/main" id="{9777ED15-5AF9-D5ED-52E2-888F310B262F}"/>
               </a:ext>
             </a:extLst>
           </p:cNvPr>
@@ -1286,7 +1397,7 @@
           <a:p>
             <a:fld id="{269ED01E-914A-41E4-88A0-C6BC45F53370}" type="slidenum">
               <a:rPr lang="en-US" smtClean="0"/>
-              <a:t>12</a:t>
+              <a:t>13</a:t>
             </a:fld>
             <a:endParaRPr lang="en-US"/>
           </a:p>
@@ -1295,118 +1406,7 @@
     </p:spTree>
     <p:extLst>
       <p:ext uri="{BB962C8B-B14F-4D97-AF65-F5344CB8AC3E}">
-        <p14:creationId xmlns:p14="http://schemas.microsoft.com/office/powerpoint/2010/main" val="2651504165"/>
-      </p:ext>
-    </p:extLst>
-  </p:cSld>
-  <p:clrMapOvr>
-    <a:masterClrMapping/>
-  </p:clrMapOvr>
-</p:notes>
-</file>
-
-<file path=ppt/notesSlides/notesSlide9.xml><?xml version="1.0" encoding="utf-8"?>
-<p:notes xmlns:a="http://schemas.openxmlformats.org/drawingml/2006/main" xmlns:r="http://schemas.openxmlformats.org/officeDocument/2006/relationships" xmlns:p="http://schemas.openxmlformats.org/presentationml/2006/main">
-  <p:cSld>
-    <p:spTree>
-      <p:nvGrpSpPr>
-        <p:cNvPr id="1" name="">
-          <a:extLst>
-            <a:ext uri="{FF2B5EF4-FFF2-40B4-BE49-F238E27FC236}">
-              <a16:creationId xmlns:a16="http://schemas.microsoft.com/office/drawing/2014/main" id="{FD95A081-FA64-7246-854E-1B4C869D7E40}"/>
-            </a:ext>
-          </a:extLst>
-        </p:cNvPr>
-        <p:cNvGrpSpPr/>
-        <p:nvPr/>
-      </p:nvGrpSpPr>
-      <p:grpSpPr>
-        <a:xfrm>
-          <a:off x="0" y="0"/>
-          <a:ext cx="0" cy="0"/>
-          <a:chOff x="0" y="0"/>
-          <a:chExt cx="0" cy="0"/>
-        </a:xfrm>
-      </p:grpSpPr>
-      <p:sp>
-        <p:nvSpPr>
-          <p:cNvPr id="2" name="Slide Image Placeholder 1">
-            <a:extLst>
-              <a:ext uri="{FF2B5EF4-FFF2-40B4-BE49-F238E27FC236}">
-                <a16:creationId xmlns:a16="http://schemas.microsoft.com/office/drawing/2014/main" id="{44907DCC-5965-2414-89A4-10CF6106CC0D}"/>
-              </a:ext>
-            </a:extLst>
-          </p:cNvPr>
-          <p:cNvSpPr>
-            <a:spLocks noGrp="1" noRot="1" noChangeAspect="1"/>
-          </p:cNvSpPr>
-          <p:nvPr>
-            <p:ph type="sldImg"/>
-          </p:nvPr>
-        </p:nvSpPr>
-        <p:spPr/>
-      </p:sp>
-      <p:sp>
-        <p:nvSpPr>
-          <p:cNvPr id="3" name="Notes Placeholder 2">
-            <a:extLst>
-              <a:ext uri="{FF2B5EF4-FFF2-40B4-BE49-F238E27FC236}">
-                <a16:creationId xmlns:a16="http://schemas.microsoft.com/office/drawing/2014/main" id="{C1FD3BD3-419B-5D51-AB42-60F2E9157908}"/>
-              </a:ext>
-            </a:extLst>
-          </p:cNvPr>
-          <p:cNvSpPr>
-            <a:spLocks noGrp="1"/>
-          </p:cNvSpPr>
-          <p:nvPr>
-            <p:ph type="body" idx="1"/>
-          </p:nvPr>
-        </p:nvSpPr>
-        <p:spPr/>
-        <p:txBody>
-          <a:bodyPr/>
-          <a:lstStyle/>
-          <a:p>
-            <a:r>
-              <a:rPr lang="en-US" dirty="0"/>
-              <a:t>Sketch of UI, show what we want it to look like</a:t>
-            </a:r>
-          </a:p>
-        </p:txBody>
-      </p:sp>
-      <p:sp>
-        <p:nvSpPr>
-          <p:cNvPr id="4" name="Slide Number Placeholder 3">
-            <a:extLst>
-              <a:ext uri="{FF2B5EF4-FFF2-40B4-BE49-F238E27FC236}">
-                <a16:creationId xmlns:a16="http://schemas.microsoft.com/office/drawing/2014/main" id="{74E22288-3175-40B6-81B1-2359C5D3C444}"/>
-              </a:ext>
-            </a:extLst>
-          </p:cNvPr>
-          <p:cNvSpPr>
-            <a:spLocks noGrp="1"/>
-          </p:cNvSpPr>
-          <p:nvPr>
-            <p:ph type="sldNum" sz="quarter" idx="5"/>
-          </p:nvPr>
-        </p:nvSpPr>
-        <p:spPr/>
-        <p:txBody>
-          <a:bodyPr/>
-          <a:lstStyle/>
-          <a:p>
-            <a:fld id="{269ED01E-914A-41E4-88A0-C6BC45F53370}" type="slidenum">
-              <a:rPr lang="en-US" smtClean="0"/>
-              <a:t>13</a:t>
-            </a:fld>
-            <a:endParaRPr lang="en-US"/>
-          </a:p>
-        </p:txBody>
-      </p:sp>
-    </p:spTree>
-    <p:extLst>
-      <p:ext uri="{BB962C8B-B14F-4D97-AF65-F5344CB8AC3E}">
-        <p14:creationId xmlns:p14="http://schemas.microsoft.com/office/powerpoint/2010/main" val="4254775105"/>
+        <p14:creationId xmlns:p14="http://schemas.microsoft.com/office/powerpoint/2010/main" val="1225981798"/>
       </p:ext>
     </p:extLst>
   </p:cSld>
@@ -5300,6 +5300,250 @@
         <p:cNvPr id="1" name="">
           <a:extLst>
             <a:ext uri="{FF2B5EF4-FFF2-40B4-BE49-F238E27FC236}">
+              <a16:creationId xmlns:a16="http://schemas.microsoft.com/office/drawing/2014/main" id="{1A30B569-EFAB-5D0B-5805-779BF4F6045A}"/>
+            </a:ext>
+          </a:extLst>
+        </p:cNvPr>
+        <p:cNvGrpSpPr/>
+        <p:nvPr/>
+      </p:nvGrpSpPr>
+      <p:grpSpPr>
+        <a:xfrm>
+          <a:off x="0" y="0"/>
+          <a:ext cx="0" cy="0"/>
+          <a:chOff x="0" y="0"/>
+          <a:chExt cx="0" cy="0"/>
+        </a:xfrm>
+      </p:grpSpPr>
+      <p:sp>
+        <p:nvSpPr>
+          <p:cNvPr id="2" name="Title 1">
+            <a:extLst>
+              <a:ext uri="{FF2B5EF4-FFF2-40B4-BE49-F238E27FC236}">
+                <a16:creationId xmlns:a16="http://schemas.microsoft.com/office/drawing/2014/main" id="{0953CBA4-4646-FBD2-58BA-9CAEB90DA639}"/>
+              </a:ext>
+            </a:extLst>
+          </p:cNvPr>
+          <p:cNvSpPr>
+            <a:spLocks noGrp="1"/>
+          </p:cNvSpPr>
+          <p:nvPr>
+            <p:ph type="title"/>
+          </p:nvPr>
+        </p:nvSpPr>
+        <p:spPr/>
+        <p:txBody>
+          <a:bodyPr/>
+          <a:lstStyle/>
+          <a:p>
+            <a:r>
+              <a:rPr lang="en-US" dirty="0"/>
+              <a:t>Nonfunctional Requirements</a:t>
+            </a:r>
+          </a:p>
+        </p:txBody>
+      </p:sp>
+      <p:pic>
+        <p:nvPicPr>
+          <p:cNvPr id="3" name="Picture 2" descr="A logo with a light bulb and text&#10;&#10;AI-generated content may be incorrect.">
+            <a:extLst>
+              <a:ext uri="{FF2B5EF4-FFF2-40B4-BE49-F238E27FC236}">
+                <a16:creationId xmlns:a16="http://schemas.microsoft.com/office/drawing/2014/main" id="{B0EF75C4-38CF-B684-CD2E-9E607FDF86E2}"/>
+              </a:ext>
+            </a:extLst>
+          </p:cNvPr>
+          <p:cNvPicPr>
+            <a:picLocks noChangeAspect="1"/>
+          </p:cNvPicPr>
+          <p:nvPr/>
+        </p:nvPicPr>
+        <p:blipFill>
+          <a:blip r:embed="rId3">
+            <a:extLst>
+              <a:ext uri="{28A0092B-C50C-407E-A947-70E740481C1C}">
+                <a14:useLocalDpi xmlns:a14="http://schemas.microsoft.com/office/drawing/2010/main" val="0"/>
+              </a:ext>
+            </a:extLst>
+          </a:blip>
+          <a:stretch>
+            <a:fillRect/>
+          </a:stretch>
+        </p:blipFill>
+        <p:spPr>
+          <a:xfrm>
+            <a:off x="11354417" y="0"/>
+            <a:ext cx="837583" cy="837583"/>
+          </a:xfrm>
+          <a:prstGeom prst="rect">
+            <a:avLst/>
+          </a:prstGeom>
+        </p:spPr>
+      </p:pic>
+      <p:sp>
+        <p:nvSpPr>
+          <p:cNvPr id="4" name="TextBox 3">
+            <a:extLst>
+              <a:ext uri="{FF2B5EF4-FFF2-40B4-BE49-F238E27FC236}">
+                <a16:creationId xmlns:a16="http://schemas.microsoft.com/office/drawing/2014/main" id="{26533C51-4C05-291F-EC90-687738912887}"/>
+              </a:ext>
+            </a:extLst>
+          </p:cNvPr>
+          <p:cNvSpPr txBox="1"/>
+          <p:nvPr/>
+        </p:nvSpPr>
+        <p:spPr>
+          <a:xfrm>
+            <a:off x="1230923" y="2074985"/>
+            <a:ext cx="10058400" cy="5909310"/>
+          </a:xfrm>
+          <a:prstGeom prst="rect">
+            <a:avLst/>
+          </a:prstGeom>
+          <a:noFill/>
+        </p:spPr>
+        <p:txBody>
+          <a:bodyPr wrap="square" rtlCol="0">
+            <a:spAutoFit/>
+          </a:bodyPr>
+          <a:lstStyle/>
+          <a:p>
+            <a:pPr marL="285750" indent="-285750">
+              <a:lnSpc>
+                <a:spcPct val="200000"/>
+              </a:lnSpc>
+              <a:buFont typeface="Arial" panose="020B0604020202020204" pitchFamily="34" charset="0"/>
+              <a:buChar char="•"/>
+            </a:pPr>
+            <a:r>
+              <a:rPr lang="en-US" sz="2000" dirty="0"/>
+              <a:t>Performance</a:t>
+            </a:r>
+          </a:p>
+          <a:p>
+            <a:pPr marL="285750" indent="-285750">
+              <a:lnSpc>
+                <a:spcPct val="200000"/>
+              </a:lnSpc>
+              <a:buFont typeface="Arial" panose="020B0604020202020204" pitchFamily="34" charset="0"/>
+              <a:buChar char="•"/>
+            </a:pPr>
+            <a:r>
+              <a:rPr lang="en-US" sz="2000" dirty="0"/>
+              <a:t>Security</a:t>
+            </a:r>
+          </a:p>
+          <a:p>
+            <a:pPr marL="285750" indent="-285750">
+              <a:lnSpc>
+                <a:spcPct val="200000"/>
+              </a:lnSpc>
+              <a:buFont typeface="Arial" panose="020B0604020202020204" pitchFamily="34" charset="0"/>
+              <a:buChar char="•"/>
+            </a:pPr>
+            <a:r>
+              <a:rPr lang="en-US" sz="2000" dirty="0"/>
+              <a:t>Usability</a:t>
+            </a:r>
+          </a:p>
+          <a:p>
+            <a:pPr marL="285750" indent="-285750">
+              <a:lnSpc>
+                <a:spcPct val="200000"/>
+              </a:lnSpc>
+              <a:buFont typeface="Arial" panose="020B0604020202020204" pitchFamily="34" charset="0"/>
+              <a:buChar char="•"/>
+            </a:pPr>
+            <a:r>
+              <a:rPr lang="en-US" sz="2000" dirty="0"/>
+              <a:t>Compatibility</a:t>
+            </a:r>
+          </a:p>
+          <a:p>
+            <a:pPr marL="285750" indent="-285750">
+              <a:lnSpc>
+                <a:spcPct val="200000"/>
+              </a:lnSpc>
+              <a:buFont typeface="Arial" panose="020B0604020202020204" pitchFamily="34" charset="0"/>
+              <a:buChar char="•"/>
+            </a:pPr>
+            <a:r>
+              <a:rPr lang="en-US" sz="2000" dirty="0"/>
+              <a:t>Privacy</a:t>
+            </a:r>
+          </a:p>
+          <a:p>
+            <a:pPr marL="285750" indent="-285750">
+              <a:lnSpc>
+                <a:spcPct val="200000"/>
+              </a:lnSpc>
+              <a:buFont typeface="Arial" panose="020B0604020202020204" pitchFamily="34" charset="0"/>
+              <a:buChar char="•"/>
+            </a:pPr>
+            <a:r>
+              <a:rPr lang="en-US" sz="2000" dirty="0"/>
+              <a:t>Scalability</a:t>
+            </a:r>
+          </a:p>
+          <a:p>
+            <a:pPr marL="285750" indent="-285750">
+              <a:lnSpc>
+                <a:spcPct val="200000"/>
+              </a:lnSpc>
+              <a:buFont typeface="Arial" panose="020B0604020202020204" pitchFamily="34" charset="0"/>
+              <a:buChar char="•"/>
+            </a:pPr>
+            <a:endParaRPr lang="en-US" sz="2000" dirty="0"/>
+          </a:p>
+          <a:p>
+            <a:pPr marL="285750" indent="-285750">
+              <a:lnSpc>
+                <a:spcPct val="200000"/>
+              </a:lnSpc>
+              <a:buFont typeface="Arial" panose="020B0604020202020204" pitchFamily="34" charset="0"/>
+              <a:buChar char="•"/>
+            </a:pPr>
+            <a:endParaRPr lang="en-US" sz="2000" dirty="0"/>
+          </a:p>
+          <a:p>
+            <a:pPr marL="285750" indent="-285750">
+              <a:lnSpc>
+                <a:spcPct val="200000"/>
+              </a:lnSpc>
+              <a:buFont typeface="Arial" panose="020B0604020202020204" pitchFamily="34" charset="0"/>
+              <a:buChar char="•"/>
+            </a:pPr>
+            <a:endParaRPr lang="en-US" sz="2000" dirty="0"/>
+          </a:p>
+          <a:p>
+            <a:pPr marL="285750" indent="-285750">
+              <a:buFont typeface="Arial" panose="020B0604020202020204" pitchFamily="34" charset="0"/>
+              <a:buChar char="•"/>
+            </a:pPr>
+            <a:endParaRPr lang="en-US" dirty="0"/>
+          </a:p>
+        </p:txBody>
+      </p:sp>
+    </p:spTree>
+    <p:extLst>
+      <p:ext uri="{BB962C8B-B14F-4D97-AF65-F5344CB8AC3E}">
+        <p14:creationId xmlns:p14="http://schemas.microsoft.com/office/powerpoint/2010/main" val="1802189812"/>
+      </p:ext>
+    </p:extLst>
+  </p:cSld>
+  <p:clrMapOvr>
+    <a:masterClrMapping/>
+  </p:clrMapOvr>
+</p:sld>
+</file>
+
+<file path=ppt/slides/slide11.xml><?xml version="1.0" encoding="utf-8"?>
+<p:sld xmlns:a="http://schemas.openxmlformats.org/drawingml/2006/main" xmlns:r="http://schemas.openxmlformats.org/officeDocument/2006/relationships" xmlns:p="http://schemas.openxmlformats.org/presentationml/2006/main">
+  <p:cSld>
+    <p:spTree>
+      <p:nvGrpSpPr>
+        <p:cNvPr id="1" name="">
+          <a:extLst>
+            <a:ext uri="{FF2B5EF4-FFF2-40B4-BE49-F238E27FC236}">
               <a16:creationId xmlns:a16="http://schemas.microsoft.com/office/drawing/2014/main" id="{B4C98F31-40D5-F7C1-EFDB-C579570D6D8F}"/>
             </a:ext>
           </a:extLst>
@@ -5338,7 +5582,7 @@
           <a:p>
             <a:r>
               <a:rPr lang="en-US" dirty="0"/>
-              <a:t>External Interface</a:t>
+              <a:t>External Interface Requirements</a:t>
             </a:r>
           </a:p>
         </p:txBody>
@@ -5358,13 +5602,13 @@
           <p:nvPr>
             <p:extLst>
               <p:ext uri="{D42A27DB-BD31-4B8C-83A1-F6EECF244321}">
-                <p14:modId xmlns:p14="http://schemas.microsoft.com/office/powerpoint/2010/main" val="1499875323"/>
+                <p14:modId xmlns:p14="http://schemas.microsoft.com/office/powerpoint/2010/main" val="375405613"/>
               </p:ext>
             </p:extLst>
           </p:nvPr>
         </p:nvGraphicFramePr>
         <p:xfrm>
-          <a:off x="868680" y="2139256"/>
+          <a:off x="868680" y="2030199"/>
           <a:ext cx="10515600" cy="3571240"/>
         </p:xfrm>
         <a:graphic>
@@ -5416,7 +5660,44 @@
                       </a:r>
                     </a:p>
                   </a:txBody>
-                  <a:tcPr/>
+                  <a:tcPr>
+                    <a:lnL w="12700" cap="flat" cmpd="sng" algn="ctr">
+                      <a:solidFill>
+                        <a:schemeClr val="tx1"/>
+                      </a:solidFill>
+                      <a:prstDash val="solid"/>
+                      <a:round/>
+                      <a:headEnd type="none" w="med" len="med"/>
+                      <a:tailEnd type="none" w="med" len="med"/>
+                    </a:lnL>
+                    <a:lnR w="12700" cap="flat" cmpd="sng" algn="ctr">
+                      <a:solidFill>
+                        <a:schemeClr val="tx1"/>
+                      </a:solidFill>
+                      <a:prstDash val="solid"/>
+                      <a:round/>
+                      <a:headEnd type="none" w="med" len="med"/>
+                      <a:tailEnd type="none" w="med" len="med"/>
+                    </a:lnR>
+                    <a:lnT w="12700" cap="flat" cmpd="sng" algn="ctr">
+                      <a:solidFill>
+                        <a:schemeClr val="tx1"/>
+                      </a:solidFill>
+                      <a:prstDash val="solid"/>
+                      <a:round/>
+                      <a:headEnd type="none" w="med" len="med"/>
+                      <a:tailEnd type="none" w="med" len="med"/>
+                    </a:lnT>
+                    <a:lnB w="12700" cap="flat" cmpd="sng" algn="ctr">
+                      <a:solidFill>
+                        <a:schemeClr val="tx1"/>
+                      </a:solidFill>
+                      <a:prstDash val="solid"/>
+                      <a:round/>
+                      <a:headEnd type="none" w="med" len="med"/>
+                      <a:tailEnd type="none" w="med" len="med"/>
+                    </a:lnB>
+                  </a:tcPr>
                 </a:tc>
                 <a:tc>
                   <a:txBody>
@@ -5430,7 +5711,44 @@
                       </a:r>
                     </a:p>
                   </a:txBody>
-                  <a:tcPr/>
+                  <a:tcPr>
+                    <a:lnL w="12700" cap="flat" cmpd="sng" algn="ctr">
+                      <a:solidFill>
+                        <a:schemeClr val="tx1"/>
+                      </a:solidFill>
+                      <a:prstDash val="solid"/>
+                      <a:round/>
+                      <a:headEnd type="none" w="med" len="med"/>
+                      <a:tailEnd type="none" w="med" len="med"/>
+                    </a:lnL>
+                    <a:lnR w="12700" cap="flat" cmpd="sng" algn="ctr">
+                      <a:solidFill>
+                        <a:schemeClr val="tx1"/>
+                      </a:solidFill>
+                      <a:prstDash val="solid"/>
+                      <a:round/>
+                      <a:headEnd type="none" w="med" len="med"/>
+                      <a:tailEnd type="none" w="med" len="med"/>
+                    </a:lnR>
+                    <a:lnT w="12700" cap="flat" cmpd="sng" algn="ctr">
+                      <a:solidFill>
+                        <a:schemeClr val="tx1"/>
+                      </a:solidFill>
+                      <a:prstDash val="solid"/>
+                      <a:round/>
+                      <a:headEnd type="none" w="med" len="med"/>
+                      <a:tailEnd type="none" w="med" len="med"/>
+                    </a:lnT>
+                    <a:lnB w="12700" cap="flat" cmpd="sng" algn="ctr">
+                      <a:solidFill>
+                        <a:schemeClr val="tx1"/>
+                      </a:solidFill>
+                      <a:prstDash val="solid"/>
+                      <a:round/>
+                      <a:headEnd type="none" w="med" len="med"/>
+                      <a:tailEnd type="none" w="med" len="med"/>
+                    </a:lnB>
+                  </a:tcPr>
                 </a:tc>
                 <a:tc>
                   <a:txBody>
@@ -5444,7 +5762,44 @@
                       </a:r>
                     </a:p>
                   </a:txBody>
-                  <a:tcPr/>
+                  <a:tcPr>
+                    <a:lnL w="12700" cap="flat" cmpd="sng" algn="ctr">
+                      <a:solidFill>
+                        <a:schemeClr val="tx1"/>
+                      </a:solidFill>
+                      <a:prstDash val="solid"/>
+                      <a:round/>
+                      <a:headEnd type="none" w="med" len="med"/>
+                      <a:tailEnd type="none" w="med" len="med"/>
+                    </a:lnL>
+                    <a:lnR w="12700" cap="flat" cmpd="sng" algn="ctr">
+                      <a:solidFill>
+                        <a:schemeClr val="tx1"/>
+                      </a:solidFill>
+                      <a:prstDash val="solid"/>
+                      <a:round/>
+                      <a:headEnd type="none" w="med" len="med"/>
+                      <a:tailEnd type="none" w="med" len="med"/>
+                    </a:lnR>
+                    <a:lnT w="12700" cap="flat" cmpd="sng" algn="ctr">
+                      <a:solidFill>
+                        <a:schemeClr val="tx1"/>
+                      </a:solidFill>
+                      <a:prstDash val="solid"/>
+                      <a:round/>
+                      <a:headEnd type="none" w="med" len="med"/>
+                      <a:tailEnd type="none" w="med" len="med"/>
+                    </a:lnT>
+                    <a:lnB w="12700" cap="flat" cmpd="sng" algn="ctr">
+                      <a:solidFill>
+                        <a:schemeClr val="tx1"/>
+                      </a:solidFill>
+                      <a:prstDash val="solid"/>
+                      <a:round/>
+                      <a:headEnd type="none" w="med" len="med"/>
+                      <a:tailEnd type="none" w="med" len="med"/>
+                    </a:lnB>
+                  </a:tcPr>
                 </a:tc>
                 <a:tc>
                   <a:txBody>
@@ -5458,7 +5813,44 @@
                       </a:r>
                     </a:p>
                   </a:txBody>
-                  <a:tcPr/>
+                  <a:tcPr>
+                    <a:lnL w="12700" cap="flat" cmpd="sng" algn="ctr">
+                      <a:solidFill>
+                        <a:schemeClr val="tx1"/>
+                      </a:solidFill>
+                      <a:prstDash val="solid"/>
+                      <a:round/>
+                      <a:headEnd type="none" w="med" len="med"/>
+                      <a:tailEnd type="none" w="med" len="med"/>
+                    </a:lnL>
+                    <a:lnR w="12700" cap="flat" cmpd="sng" algn="ctr">
+                      <a:solidFill>
+                        <a:schemeClr val="tx1"/>
+                      </a:solidFill>
+                      <a:prstDash val="solid"/>
+                      <a:round/>
+                      <a:headEnd type="none" w="med" len="med"/>
+                      <a:tailEnd type="none" w="med" len="med"/>
+                    </a:lnR>
+                    <a:lnT w="12700" cap="flat" cmpd="sng" algn="ctr">
+                      <a:solidFill>
+                        <a:schemeClr val="tx1"/>
+                      </a:solidFill>
+                      <a:prstDash val="solid"/>
+                      <a:round/>
+                      <a:headEnd type="none" w="med" len="med"/>
+                      <a:tailEnd type="none" w="med" len="med"/>
+                    </a:lnT>
+                    <a:lnB w="12700" cap="flat" cmpd="sng" algn="ctr">
+                      <a:solidFill>
+                        <a:schemeClr val="tx1"/>
+                      </a:solidFill>
+                      <a:prstDash val="solid"/>
+                      <a:round/>
+                      <a:headEnd type="none" w="med" len="med"/>
+                      <a:tailEnd type="none" w="med" len="med"/>
+                    </a:lnB>
+                  </a:tcPr>
                 </a:tc>
                 <a:extLst>
                   <a:ext uri="{0D108BD9-81ED-4DB2-BD59-A6C34878D82A}">
@@ -5479,7 +5871,44 @@
                       </a:r>
                     </a:p>
                   </a:txBody>
-                  <a:tcPr/>
+                  <a:tcPr>
+                    <a:lnL w="12700" cap="flat" cmpd="sng" algn="ctr">
+                      <a:solidFill>
+                        <a:schemeClr val="tx1"/>
+                      </a:solidFill>
+                      <a:prstDash val="solid"/>
+                      <a:round/>
+                      <a:headEnd type="none" w="med" len="med"/>
+                      <a:tailEnd type="none" w="med" len="med"/>
+                    </a:lnL>
+                    <a:lnR w="12700" cap="flat" cmpd="sng" algn="ctr">
+                      <a:solidFill>
+                        <a:schemeClr val="tx1"/>
+                      </a:solidFill>
+                      <a:prstDash val="solid"/>
+                      <a:round/>
+                      <a:headEnd type="none" w="med" len="med"/>
+                      <a:tailEnd type="none" w="med" len="med"/>
+                    </a:lnR>
+                    <a:lnT w="12700" cap="flat" cmpd="sng" algn="ctr">
+                      <a:solidFill>
+                        <a:schemeClr val="tx1"/>
+                      </a:solidFill>
+                      <a:prstDash val="solid"/>
+                      <a:round/>
+                      <a:headEnd type="none" w="med" len="med"/>
+                      <a:tailEnd type="none" w="med" len="med"/>
+                    </a:lnT>
+                    <a:lnB w="12700" cap="flat" cmpd="sng" algn="ctr">
+                      <a:solidFill>
+                        <a:schemeClr val="tx1"/>
+                      </a:solidFill>
+                      <a:prstDash val="solid"/>
+                      <a:round/>
+                      <a:headEnd type="none" w="med" len="med"/>
+                      <a:tailEnd type="none" w="med" len="med"/>
+                    </a:lnB>
+                  </a:tcPr>
                 </a:tc>
                 <a:tc>
                   <a:txBody>
@@ -5493,7 +5922,44 @@
                       </a:r>
                     </a:p>
                   </a:txBody>
-                  <a:tcPr/>
+                  <a:tcPr>
+                    <a:lnL w="12700" cap="flat" cmpd="sng" algn="ctr">
+                      <a:solidFill>
+                        <a:schemeClr val="tx1"/>
+                      </a:solidFill>
+                      <a:prstDash val="solid"/>
+                      <a:round/>
+                      <a:headEnd type="none" w="med" len="med"/>
+                      <a:tailEnd type="none" w="med" len="med"/>
+                    </a:lnL>
+                    <a:lnR w="12700" cap="flat" cmpd="sng" algn="ctr">
+                      <a:solidFill>
+                        <a:schemeClr val="tx1"/>
+                      </a:solidFill>
+                      <a:prstDash val="solid"/>
+                      <a:round/>
+                      <a:headEnd type="none" w="med" len="med"/>
+                      <a:tailEnd type="none" w="med" len="med"/>
+                    </a:lnR>
+                    <a:lnT w="12700" cap="flat" cmpd="sng" algn="ctr">
+                      <a:solidFill>
+                        <a:schemeClr val="tx1"/>
+                      </a:solidFill>
+                      <a:prstDash val="solid"/>
+                      <a:round/>
+                      <a:headEnd type="none" w="med" len="med"/>
+                      <a:tailEnd type="none" w="med" len="med"/>
+                    </a:lnT>
+                    <a:lnB w="12700" cap="flat" cmpd="sng" algn="ctr">
+                      <a:solidFill>
+                        <a:schemeClr val="tx1"/>
+                      </a:solidFill>
+                      <a:prstDash val="solid"/>
+                      <a:round/>
+                      <a:headEnd type="none" w="med" len="med"/>
+                      <a:tailEnd type="none" w="med" len="med"/>
+                    </a:lnB>
+                  </a:tcPr>
                 </a:tc>
                 <a:tc>
                   <a:txBody>
@@ -5516,7 +5982,44 @@
                       <a:endParaRPr lang="en-US" sz="1800" dirty="0"/>
                     </a:p>
                   </a:txBody>
-                  <a:tcPr/>
+                  <a:tcPr>
+                    <a:lnL w="12700" cap="flat" cmpd="sng" algn="ctr">
+                      <a:solidFill>
+                        <a:schemeClr val="tx1"/>
+                      </a:solidFill>
+                      <a:prstDash val="solid"/>
+                      <a:round/>
+                      <a:headEnd type="none" w="med" len="med"/>
+                      <a:tailEnd type="none" w="med" len="med"/>
+                    </a:lnL>
+                    <a:lnR w="12700" cap="flat" cmpd="sng" algn="ctr">
+                      <a:solidFill>
+                        <a:schemeClr val="tx1"/>
+                      </a:solidFill>
+                      <a:prstDash val="solid"/>
+                      <a:round/>
+                      <a:headEnd type="none" w="med" len="med"/>
+                      <a:tailEnd type="none" w="med" len="med"/>
+                    </a:lnR>
+                    <a:lnT w="12700" cap="flat" cmpd="sng" algn="ctr">
+                      <a:solidFill>
+                        <a:schemeClr val="tx1"/>
+                      </a:solidFill>
+                      <a:prstDash val="solid"/>
+                      <a:round/>
+                      <a:headEnd type="none" w="med" len="med"/>
+                      <a:tailEnd type="none" w="med" len="med"/>
+                    </a:lnT>
+                    <a:lnB w="12700" cap="flat" cmpd="sng" algn="ctr">
+                      <a:solidFill>
+                        <a:schemeClr val="tx1"/>
+                      </a:solidFill>
+                      <a:prstDash val="solid"/>
+                      <a:round/>
+                      <a:headEnd type="none" w="med" len="med"/>
+                      <a:tailEnd type="none" w="med" len="med"/>
+                    </a:lnB>
+                  </a:tcPr>
                 </a:tc>
                 <a:tc>
                   <a:txBody>
@@ -5531,7 +6034,44 @@
                       <a:endParaRPr lang="en-US" dirty="0"/>
                     </a:p>
                   </a:txBody>
-                  <a:tcPr/>
+                  <a:tcPr>
+                    <a:lnL w="12700" cap="flat" cmpd="sng" algn="ctr">
+                      <a:solidFill>
+                        <a:schemeClr val="tx1"/>
+                      </a:solidFill>
+                      <a:prstDash val="solid"/>
+                      <a:round/>
+                      <a:headEnd type="none" w="med" len="med"/>
+                      <a:tailEnd type="none" w="med" len="med"/>
+                    </a:lnL>
+                    <a:lnR w="12700" cap="flat" cmpd="sng" algn="ctr">
+                      <a:solidFill>
+                        <a:schemeClr val="tx1"/>
+                      </a:solidFill>
+                      <a:prstDash val="solid"/>
+                      <a:round/>
+                      <a:headEnd type="none" w="med" len="med"/>
+                      <a:tailEnd type="none" w="med" len="med"/>
+                    </a:lnR>
+                    <a:lnT w="12700" cap="flat" cmpd="sng" algn="ctr">
+                      <a:solidFill>
+                        <a:schemeClr val="tx1"/>
+                      </a:solidFill>
+                      <a:prstDash val="solid"/>
+                      <a:round/>
+                      <a:headEnd type="none" w="med" len="med"/>
+                      <a:tailEnd type="none" w="med" len="med"/>
+                    </a:lnT>
+                    <a:lnB w="12700" cap="flat" cmpd="sng" algn="ctr">
+                      <a:solidFill>
+                        <a:schemeClr val="tx1"/>
+                      </a:solidFill>
+                      <a:prstDash val="solid"/>
+                      <a:round/>
+                      <a:headEnd type="none" w="med" len="med"/>
+                      <a:tailEnd type="none" w="med" len="med"/>
+                    </a:lnB>
+                  </a:tcPr>
                 </a:tc>
                 <a:extLst>
                   <a:ext uri="{0D108BD9-81ED-4DB2-BD59-A6C34878D82A}">
@@ -5552,7 +6092,44 @@
                       </a:r>
                     </a:p>
                   </a:txBody>
-                  <a:tcPr/>
+                  <a:tcPr>
+                    <a:lnL w="12700" cap="flat" cmpd="sng" algn="ctr">
+                      <a:solidFill>
+                        <a:schemeClr val="tx1"/>
+                      </a:solidFill>
+                      <a:prstDash val="solid"/>
+                      <a:round/>
+                      <a:headEnd type="none" w="med" len="med"/>
+                      <a:tailEnd type="none" w="med" len="med"/>
+                    </a:lnL>
+                    <a:lnR w="12700" cap="flat" cmpd="sng" algn="ctr">
+                      <a:solidFill>
+                        <a:schemeClr val="tx1"/>
+                      </a:solidFill>
+                      <a:prstDash val="solid"/>
+                      <a:round/>
+                      <a:headEnd type="none" w="med" len="med"/>
+                      <a:tailEnd type="none" w="med" len="med"/>
+                    </a:lnR>
+                    <a:lnT w="12700" cap="flat" cmpd="sng" algn="ctr">
+                      <a:solidFill>
+                        <a:schemeClr val="tx1"/>
+                      </a:solidFill>
+                      <a:prstDash val="solid"/>
+                      <a:round/>
+                      <a:headEnd type="none" w="med" len="med"/>
+                      <a:tailEnd type="none" w="med" len="med"/>
+                    </a:lnT>
+                    <a:lnB w="12700" cap="flat" cmpd="sng" algn="ctr">
+                      <a:solidFill>
+                        <a:schemeClr val="tx1"/>
+                      </a:solidFill>
+                      <a:prstDash val="solid"/>
+                      <a:round/>
+                      <a:headEnd type="none" w="med" len="med"/>
+                      <a:tailEnd type="none" w="med" len="med"/>
+                    </a:lnB>
+                  </a:tcPr>
                 </a:tc>
                 <a:tc>
                   <a:txBody>
@@ -5566,7 +6143,44 @@
                       </a:r>
                     </a:p>
                   </a:txBody>
-                  <a:tcPr/>
+                  <a:tcPr>
+                    <a:lnL w="12700" cap="flat" cmpd="sng" algn="ctr">
+                      <a:solidFill>
+                        <a:schemeClr val="tx1"/>
+                      </a:solidFill>
+                      <a:prstDash val="solid"/>
+                      <a:round/>
+                      <a:headEnd type="none" w="med" len="med"/>
+                      <a:tailEnd type="none" w="med" len="med"/>
+                    </a:lnL>
+                    <a:lnR w="12700" cap="flat" cmpd="sng" algn="ctr">
+                      <a:solidFill>
+                        <a:schemeClr val="tx1"/>
+                      </a:solidFill>
+                      <a:prstDash val="solid"/>
+                      <a:round/>
+                      <a:headEnd type="none" w="med" len="med"/>
+                      <a:tailEnd type="none" w="med" len="med"/>
+                    </a:lnR>
+                    <a:lnT w="12700" cap="flat" cmpd="sng" algn="ctr">
+                      <a:solidFill>
+                        <a:schemeClr val="tx1"/>
+                      </a:solidFill>
+                      <a:prstDash val="solid"/>
+                      <a:round/>
+                      <a:headEnd type="none" w="med" len="med"/>
+                      <a:tailEnd type="none" w="med" len="med"/>
+                    </a:lnT>
+                    <a:lnB w="12700" cap="flat" cmpd="sng" algn="ctr">
+                      <a:solidFill>
+                        <a:schemeClr val="tx1"/>
+                      </a:solidFill>
+                      <a:prstDash val="solid"/>
+                      <a:round/>
+                      <a:headEnd type="none" w="med" len="med"/>
+                      <a:tailEnd type="none" w="med" len="med"/>
+                    </a:lnB>
+                  </a:tcPr>
                 </a:tc>
                 <a:tc>
                   <a:txBody>
@@ -5580,7 +6194,44 @@
                       </a:r>
                     </a:p>
                   </a:txBody>
-                  <a:tcPr/>
+                  <a:tcPr>
+                    <a:lnL w="12700" cap="flat" cmpd="sng" algn="ctr">
+                      <a:solidFill>
+                        <a:schemeClr val="tx1"/>
+                      </a:solidFill>
+                      <a:prstDash val="solid"/>
+                      <a:round/>
+                      <a:headEnd type="none" w="med" len="med"/>
+                      <a:tailEnd type="none" w="med" len="med"/>
+                    </a:lnL>
+                    <a:lnR w="12700" cap="flat" cmpd="sng" algn="ctr">
+                      <a:solidFill>
+                        <a:schemeClr val="tx1"/>
+                      </a:solidFill>
+                      <a:prstDash val="solid"/>
+                      <a:round/>
+                      <a:headEnd type="none" w="med" len="med"/>
+                      <a:tailEnd type="none" w="med" len="med"/>
+                    </a:lnR>
+                    <a:lnT w="12700" cap="flat" cmpd="sng" algn="ctr">
+                      <a:solidFill>
+                        <a:schemeClr val="tx1"/>
+                      </a:solidFill>
+                      <a:prstDash val="solid"/>
+                      <a:round/>
+                      <a:headEnd type="none" w="med" len="med"/>
+                      <a:tailEnd type="none" w="med" len="med"/>
+                    </a:lnT>
+                    <a:lnB w="12700" cap="flat" cmpd="sng" algn="ctr">
+                      <a:solidFill>
+                        <a:schemeClr val="tx1"/>
+                      </a:solidFill>
+                      <a:prstDash val="solid"/>
+                      <a:round/>
+                      <a:headEnd type="none" w="med" len="med"/>
+                      <a:tailEnd type="none" w="med" len="med"/>
+                    </a:lnB>
+                  </a:tcPr>
                 </a:tc>
                 <a:tc>
                   <a:txBody>
@@ -5594,7 +6245,44 @@
                       </a:r>
                     </a:p>
                   </a:txBody>
-                  <a:tcPr/>
+                  <a:tcPr>
+                    <a:lnL w="12700" cap="flat" cmpd="sng" algn="ctr">
+                      <a:solidFill>
+                        <a:schemeClr val="tx1"/>
+                      </a:solidFill>
+                      <a:prstDash val="solid"/>
+                      <a:round/>
+                      <a:headEnd type="none" w="med" len="med"/>
+                      <a:tailEnd type="none" w="med" len="med"/>
+                    </a:lnL>
+                    <a:lnR w="12700" cap="flat" cmpd="sng" algn="ctr">
+                      <a:solidFill>
+                        <a:schemeClr val="tx1"/>
+                      </a:solidFill>
+                      <a:prstDash val="solid"/>
+                      <a:round/>
+                      <a:headEnd type="none" w="med" len="med"/>
+                      <a:tailEnd type="none" w="med" len="med"/>
+                    </a:lnR>
+                    <a:lnT w="12700" cap="flat" cmpd="sng" algn="ctr">
+                      <a:solidFill>
+                        <a:schemeClr val="tx1"/>
+                      </a:solidFill>
+                      <a:prstDash val="solid"/>
+                      <a:round/>
+                      <a:headEnd type="none" w="med" len="med"/>
+                      <a:tailEnd type="none" w="med" len="med"/>
+                    </a:lnT>
+                    <a:lnB w="12700" cap="flat" cmpd="sng" algn="ctr">
+                      <a:solidFill>
+                        <a:schemeClr val="tx1"/>
+                      </a:solidFill>
+                      <a:prstDash val="solid"/>
+                      <a:round/>
+                      <a:headEnd type="none" w="med" len="med"/>
+                      <a:tailEnd type="none" w="med" len="med"/>
+                    </a:lnB>
+                  </a:tcPr>
                 </a:tc>
                 <a:extLst>
                   <a:ext uri="{0D108BD9-81ED-4DB2-BD59-A6C34878D82A}">
@@ -5615,7 +6303,44 @@
                       </a:r>
                     </a:p>
                   </a:txBody>
-                  <a:tcPr/>
+                  <a:tcPr>
+                    <a:lnL w="12700" cap="flat" cmpd="sng" algn="ctr">
+                      <a:solidFill>
+                        <a:schemeClr val="tx1"/>
+                      </a:solidFill>
+                      <a:prstDash val="solid"/>
+                      <a:round/>
+                      <a:headEnd type="none" w="med" len="med"/>
+                      <a:tailEnd type="none" w="med" len="med"/>
+                    </a:lnL>
+                    <a:lnR w="12700" cap="flat" cmpd="sng" algn="ctr">
+                      <a:solidFill>
+                        <a:schemeClr val="tx1"/>
+                      </a:solidFill>
+                      <a:prstDash val="solid"/>
+                      <a:round/>
+                      <a:headEnd type="none" w="med" len="med"/>
+                      <a:tailEnd type="none" w="med" len="med"/>
+                    </a:lnR>
+                    <a:lnT w="12700" cap="flat" cmpd="sng" algn="ctr">
+                      <a:solidFill>
+                        <a:schemeClr val="tx1"/>
+                      </a:solidFill>
+                      <a:prstDash val="solid"/>
+                      <a:round/>
+                      <a:headEnd type="none" w="med" len="med"/>
+                      <a:tailEnd type="none" w="med" len="med"/>
+                    </a:lnT>
+                    <a:lnB w="12700" cap="flat" cmpd="sng" algn="ctr">
+                      <a:solidFill>
+                        <a:schemeClr val="tx1"/>
+                      </a:solidFill>
+                      <a:prstDash val="solid"/>
+                      <a:round/>
+                      <a:headEnd type="none" w="med" len="med"/>
+                      <a:tailEnd type="none" w="med" len="med"/>
+                    </a:lnB>
+                  </a:tcPr>
                 </a:tc>
                 <a:tc>
                   <a:txBody>
@@ -5629,7 +6354,44 @@
                       </a:r>
                     </a:p>
                   </a:txBody>
-                  <a:tcPr/>
+                  <a:tcPr>
+                    <a:lnL w="12700" cap="flat" cmpd="sng" algn="ctr">
+                      <a:solidFill>
+                        <a:schemeClr val="tx1"/>
+                      </a:solidFill>
+                      <a:prstDash val="solid"/>
+                      <a:round/>
+                      <a:headEnd type="none" w="med" len="med"/>
+                      <a:tailEnd type="none" w="med" len="med"/>
+                    </a:lnL>
+                    <a:lnR w="12700" cap="flat" cmpd="sng" algn="ctr">
+                      <a:solidFill>
+                        <a:schemeClr val="tx1"/>
+                      </a:solidFill>
+                      <a:prstDash val="solid"/>
+                      <a:round/>
+                      <a:headEnd type="none" w="med" len="med"/>
+                      <a:tailEnd type="none" w="med" len="med"/>
+                    </a:lnR>
+                    <a:lnT w="12700" cap="flat" cmpd="sng" algn="ctr">
+                      <a:solidFill>
+                        <a:schemeClr val="tx1"/>
+                      </a:solidFill>
+                      <a:prstDash val="solid"/>
+                      <a:round/>
+                      <a:headEnd type="none" w="med" len="med"/>
+                      <a:tailEnd type="none" w="med" len="med"/>
+                    </a:lnT>
+                    <a:lnB w="12700" cap="flat" cmpd="sng" algn="ctr">
+                      <a:solidFill>
+                        <a:schemeClr val="tx1"/>
+                      </a:solidFill>
+                      <a:prstDash val="solid"/>
+                      <a:round/>
+                      <a:headEnd type="none" w="med" len="med"/>
+                      <a:tailEnd type="none" w="med" len="med"/>
+                    </a:lnB>
+                  </a:tcPr>
                 </a:tc>
                 <a:tc>
                   <a:txBody>
@@ -5651,7 +6413,44 @@
                       </a:r>
                     </a:p>
                   </a:txBody>
-                  <a:tcPr/>
+                  <a:tcPr>
+                    <a:lnL w="12700" cap="flat" cmpd="sng" algn="ctr">
+                      <a:solidFill>
+                        <a:schemeClr val="tx1"/>
+                      </a:solidFill>
+                      <a:prstDash val="solid"/>
+                      <a:round/>
+                      <a:headEnd type="none" w="med" len="med"/>
+                      <a:tailEnd type="none" w="med" len="med"/>
+                    </a:lnL>
+                    <a:lnR w="12700" cap="flat" cmpd="sng" algn="ctr">
+                      <a:solidFill>
+                        <a:schemeClr val="tx1"/>
+                      </a:solidFill>
+                      <a:prstDash val="solid"/>
+                      <a:round/>
+                      <a:headEnd type="none" w="med" len="med"/>
+                      <a:tailEnd type="none" w="med" len="med"/>
+                    </a:lnR>
+                    <a:lnT w="12700" cap="flat" cmpd="sng" algn="ctr">
+                      <a:solidFill>
+                        <a:schemeClr val="tx1"/>
+                      </a:solidFill>
+                      <a:prstDash val="solid"/>
+                      <a:round/>
+                      <a:headEnd type="none" w="med" len="med"/>
+                      <a:tailEnd type="none" w="med" len="med"/>
+                    </a:lnT>
+                    <a:lnB w="12700" cap="flat" cmpd="sng" algn="ctr">
+                      <a:solidFill>
+                        <a:schemeClr val="tx1"/>
+                      </a:solidFill>
+                      <a:prstDash val="solid"/>
+                      <a:round/>
+                      <a:headEnd type="none" w="med" len="med"/>
+                      <a:tailEnd type="none" w="med" len="med"/>
+                    </a:lnB>
+                  </a:tcPr>
                 </a:tc>
                 <a:tc>
                   <a:txBody>
@@ -5665,7 +6464,44 @@
                       </a:r>
                     </a:p>
                   </a:txBody>
-                  <a:tcPr/>
+                  <a:tcPr>
+                    <a:lnL w="12700" cap="flat" cmpd="sng" algn="ctr">
+                      <a:solidFill>
+                        <a:schemeClr val="tx1"/>
+                      </a:solidFill>
+                      <a:prstDash val="solid"/>
+                      <a:round/>
+                      <a:headEnd type="none" w="med" len="med"/>
+                      <a:tailEnd type="none" w="med" len="med"/>
+                    </a:lnL>
+                    <a:lnR w="12700" cap="flat" cmpd="sng" algn="ctr">
+                      <a:solidFill>
+                        <a:schemeClr val="tx1"/>
+                      </a:solidFill>
+                      <a:prstDash val="solid"/>
+                      <a:round/>
+                      <a:headEnd type="none" w="med" len="med"/>
+                      <a:tailEnd type="none" w="med" len="med"/>
+                    </a:lnR>
+                    <a:lnT w="12700" cap="flat" cmpd="sng" algn="ctr">
+                      <a:solidFill>
+                        <a:schemeClr val="tx1"/>
+                      </a:solidFill>
+                      <a:prstDash val="solid"/>
+                      <a:round/>
+                      <a:headEnd type="none" w="med" len="med"/>
+                      <a:tailEnd type="none" w="med" len="med"/>
+                    </a:lnT>
+                    <a:lnB w="12700" cap="flat" cmpd="sng" algn="ctr">
+                      <a:solidFill>
+                        <a:schemeClr val="tx1"/>
+                      </a:solidFill>
+                      <a:prstDash val="solid"/>
+                      <a:round/>
+                      <a:headEnd type="none" w="med" len="med"/>
+                      <a:tailEnd type="none" w="med" len="med"/>
+                    </a:lnB>
+                  </a:tcPr>
                 </a:tc>
                 <a:extLst>
                   <a:ext uri="{0D108BD9-81ED-4DB2-BD59-A6C34878D82A}">
@@ -5686,7 +6522,44 @@
                       </a:r>
                     </a:p>
                   </a:txBody>
-                  <a:tcPr/>
+                  <a:tcPr>
+                    <a:lnL w="12700" cap="flat" cmpd="sng" algn="ctr">
+                      <a:solidFill>
+                        <a:schemeClr val="tx1"/>
+                      </a:solidFill>
+                      <a:prstDash val="solid"/>
+                      <a:round/>
+                      <a:headEnd type="none" w="med" len="med"/>
+                      <a:tailEnd type="none" w="med" len="med"/>
+                    </a:lnL>
+                    <a:lnR w="12700" cap="flat" cmpd="sng" algn="ctr">
+                      <a:solidFill>
+                        <a:schemeClr val="tx1"/>
+                      </a:solidFill>
+                      <a:prstDash val="solid"/>
+                      <a:round/>
+                      <a:headEnd type="none" w="med" len="med"/>
+                      <a:tailEnd type="none" w="med" len="med"/>
+                    </a:lnR>
+                    <a:lnT w="12700" cap="flat" cmpd="sng" algn="ctr">
+                      <a:solidFill>
+                        <a:schemeClr val="tx1"/>
+                      </a:solidFill>
+                      <a:prstDash val="solid"/>
+                      <a:round/>
+                      <a:headEnd type="none" w="med" len="med"/>
+                      <a:tailEnd type="none" w="med" len="med"/>
+                    </a:lnT>
+                    <a:lnB w="12700" cap="flat" cmpd="sng" algn="ctr">
+                      <a:solidFill>
+                        <a:schemeClr val="tx1"/>
+                      </a:solidFill>
+                      <a:prstDash val="solid"/>
+                      <a:round/>
+                      <a:headEnd type="none" w="med" len="med"/>
+                      <a:tailEnd type="none" w="med" len="med"/>
+                    </a:lnB>
+                  </a:tcPr>
                 </a:tc>
                 <a:tc>
                   <a:txBody>
@@ -5700,7 +6573,44 @@
                       </a:r>
                     </a:p>
                   </a:txBody>
-                  <a:tcPr/>
+                  <a:tcPr>
+                    <a:lnL w="12700" cap="flat" cmpd="sng" algn="ctr">
+                      <a:solidFill>
+                        <a:schemeClr val="tx1"/>
+                      </a:solidFill>
+                      <a:prstDash val="solid"/>
+                      <a:round/>
+                      <a:headEnd type="none" w="med" len="med"/>
+                      <a:tailEnd type="none" w="med" len="med"/>
+                    </a:lnL>
+                    <a:lnR w="12700" cap="flat" cmpd="sng" algn="ctr">
+                      <a:solidFill>
+                        <a:schemeClr val="tx1"/>
+                      </a:solidFill>
+                      <a:prstDash val="solid"/>
+                      <a:round/>
+                      <a:headEnd type="none" w="med" len="med"/>
+                      <a:tailEnd type="none" w="med" len="med"/>
+                    </a:lnR>
+                    <a:lnT w="12700" cap="flat" cmpd="sng" algn="ctr">
+                      <a:solidFill>
+                        <a:schemeClr val="tx1"/>
+                      </a:solidFill>
+                      <a:prstDash val="solid"/>
+                      <a:round/>
+                      <a:headEnd type="none" w="med" len="med"/>
+                      <a:tailEnd type="none" w="med" len="med"/>
+                    </a:lnT>
+                    <a:lnB w="12700" cap="flat" cmpd="sng" algn="ctr">
+                      <a:solidFill>
+                        <a:schemeClr val="tx1"/>
+                      </a:solidFill>
+                      <a:prstDash val="solid"/>
+                      <a:round/>
+                      <a:headEnd type="none" w="med" len="med"/>
+                      <a:tailEnd type="none" w="med" len="med"/>
+                    </a:lnB>
+                  </a:tcPr>
                 </a:tc>
                 <a:tc>
                   <a:txBody>
@@ -5714,7 +6624,44 @@
                       </a:r>
                     </a:p>
                   </a:txBody>
-                  <a:tcPr/>
+                  <a:tcPr>
+                    <a:lnL w="12700" cap="flat" cmpd="sng" algn="ctr">
+                      <a:solidFill>
+                        <a:schemeClr val="tx1"/>
+                      </a:solidFill>
+                      <a:prstDash val="solid"/>
+                      <a:round/>
+                      <a:headEnd type="none" w="med" len="med"/>
+                      <a:tailEnd type="none" w="med" len="med"/>
+                    </a:lnL>
+                    <a:lnR w="12700" cap="flat" cmpd="sng" algn="ctr">
+                      <a:solidFill>
+                        <a:schemeClr val="tx1"/>
+                      </a:solidFill>
+                      <a:prstDash val="solid"/>
+                      <a:round/>
+                      <a:headEnd type="none" w="med" len="med"/>
+                      <a:tailEnd type="none" w="med" len="med"/>
+                    </a:lnR>
+                    <a:lnT w="12700" cap="flat" cmpd="sng" algn="ctr">
+                      <a:solidFill>
+                        <a:schemeClr val="tx1"/>
+                      </a:solidFill>
+                      <a:prstDash val="solid"/>
+                      <a:round/>
+                      <a:headEnd type="none" w="med" len="med"/>
+                      <a:tailEnd type="none" w="med" len="med"/>
+                    </a:lnT>
+                    <a:lnB w="12700" cap="flat" cmpd="sng" algn="ctr">
+                      <a:solidFill>
+                        <a:schemeClr val="tx1"/>
+                      </a:solidFill>
+                      <a:prstDash val="solid"/>
+                      <a:round/>
+                      <a:headEnd type="none" w="med" len="med"/>
+                      <a:tailEnd type="none" w="med" len="med"/>
+                    </a:lnB>
+                  </a:tcPr>
                 </a:tc>
                 <a:tc>
                   <a:txBody>
@@ -5728,7 +6675,44 @@
                       </a:r>
                     </a:p>
                   </a:txBody>
-                  <a:tcPr/>
+                  <a:tcPr>
+                    <a:lnL w="12700" cap="flat" cmpd="sng" algn="ctr">
+                      <a:solidFill>
+                        <a:schemeClr val="tx1"/>
+                      </a:solidFill>
+                      <a:prstDash val="solid"/>
+                      <a:round/>
+                      <a:headEnd type="none" w="med" len="med"/>
+                      <a:tailEnd type="none" w="med" len="med"/>
+                    </a:lnL>
+                    <a:lnR w="12700" cap="flat" cmpd="sng" algn="ctr">
+                      <a:solidFill>
+                        <a:schemeClr val="tx1"/>
+                      </a:solidFill>
+                      <a:prstDash val="solid"/>
+                      <a:round/>
+                      <a:headEnd type="none" w="med" len="med"/>
+                      <a:tailEnd type="none" w="med" len="med"/>
+                    </a:lnR>
+                    <a:lnT w="12700" cap="flat" cmpd="sng" algn="ctr">
+                      <a:solidFill>
+                        <a:schemeClr val="tx1"/>
+                      </a:solidFill>
+                      <a:prstDash val="solid"/>
+                      <a:round/>
+                      <a:headEnd type="none" w="med" len="med"/>
+                      <a:tailEnd type="none" w="med" len="med"/>
+                    </a:lnT>
+                    <a:lnB w="12700" cap="flat" cmpd="sng" algn="ctr">
+                      <a:solidFill>
+                        <a:schemeClr val="tx1"/>
+                      </a:solidFill>
+                      <a:prstDash val="solid"/>
+                      <a:round/>
+                      <a:headEnd type="none" w="med" len="med"/>
+                      <a:tailEnd type="none" w="med" len="med"/>
+                    </a:lnB>
+                  </a:tcPr>
                 </a:tc>
                 <a:extLst>
                   <a:ext uri="{0D108BD9-81ED-4DB2-BD59-A6C34878D82A}">
@@ -5749,7 +6733,44 @@
                       </a:r>
                     </a:p>
                   </a:txBody>
-                  <a:tcPr/>
+                  <a:tcPr>
+                    <a:lnL w="12700" cap="flat" cmpd="sng" algn="ctr">
+                      <a:solidFill>
+                        <a:schemeClr val="tx1"/>
+                      </a:solidFill>
+                      <a:prstDash val="solid"/>
+                      <a:round/>
+                      <a:headEnd type="none" w="med" len="med"/>
+                      <a:tailEnd type="none" w="med" len="med"/>
+                    </a:lnL>
+                    <a:lnR w="12700" cap="flat" cmpd="sng" algn="ctr">
+                      <a:solidFill>
+                        <a:schemeClr val="tx1"/>
+                      </a:solidFill>
+                      <a:prstDash val="solid"/>
+                      <a:round/>
+                      <a:headEnd type="none" w="med" len="med"/>
+                      <a:tailEnd type="none" w="med" len="med"/>
+                    </a:lnR>
+                    <a:lnT w="12700" cap="flat" cmpd="sng" algn="ctr">
+                      <a:solidFill>
+                        <a:schemeClr val="tx1"/>
+                      </a:solidFill>
+                      <a:prstDash val="solid"/>
+                      <a:round/>
+                      <a:headEnd type="none" w="med" len="med"/>
+                      <a:tailEnd type="none" w="med" len="med"/>
+                    </a:lnT>
+                    <a:lnB w="12700" cap="flat" cmpd="sng" algn="ctr">
+                      <a:solidFill>
+                        <a:schemeClr val="tx1"/>
+                      </a:solidFill>
+                      <a:prstDash val="solid"/>
+                      <a:round/>
+                      <a:headEnd type="none" w="med" len="med"/>
+                      <a:tailEnd type="none" w="med" len="med"/>
+                    </a:lnB>
+                  </a:tcPr>
                 </a:tc>
                 <a:tc>
                   <a:txBody>
@@ -5763,7 +6784,44 @@
                       </a:r>
                     </a:p>
                   </a:txBody>
-                  <a:tcPr/>
+                  <a:tcPr>
+                    <a:lnL w="12700" cap="flat" cmpd="sng" algn="ctr">
+                      <a:solidFill>
+                        <a:schemeClr val="tx1"/>
+                      </a:solidFill>
+                      <a:prstDash val="solid"/>
+                      <a:round/>
+                      <a:headEnd type="none" w="med" len="med"/>
+                      <a:tailEnd type="none" w="med" len="med"/>
+                    </a:lnL>
+                    <a:lnR w="12700" cap="flat" cmpd="sng" algn="ctr">
+                      <a:solidFill>
+                        <a:schemeClr val="tx1"/>
+                      </a:solidFill>
+                      <a:prstDash val="solid"/>
+                      <a:round/>
+                      <a:headEnd type="none" w="med" len="med"/>
+                      <a:tailEnd type="none" w="med" len="med"/>
+                    </a:lnR>
+                    <a:lnT w="12700" cap="flat" cmpd="sng" algn="ctr">
+                      <a:solidFill>
+                        <a:schemeClr val="tx1"/>
+                      </a:solidFill>
+                      <a:prstDash val="solid"/>
+                      <a:round/>
+                      <a:headEnd type="none" w="med" len="med"/>
+                      <a:tailEnd type="none" w="med" len="med"/>
+                    </a:lnT>
+                    <a:lnB w="12700" cap="flat" cmpd="sng" algn="ctr">
+                      <a:solidFill>
+                        <a:schemeClr val="tx1"/>
+                      </a:solidFill>
+                      <a:prstDash val="solid"/>
+                      <a:round/>
+                      <a:headEnd type="none" w="med" len="med"/>
+                      <a:tailEnd type="none" w="med" len="med"/>
+                    </a:lnB>
+                  </a:tcPr>
                 </a:tc>
                 <a:tc>
                   <a:txBody>
@@ -5777,7 +6835,44 @@
                       </a:r>
                     </a:p>
                   </a:txBody>
-                  <a:tcPr/>
+                  <a:tcPr>
+                    <a:lnL w="12700" cap="flat" cmpd="sng" algn="ctr">
+                      <a:solidFill>
+                        <a:schemeClr val="tx1"/>
+                      </a:solidFill>
+                      <a:prstDash val="solid"/>
+                      <a:round/>
+                      <a:headEnd type="none" w="med" len="med"/>
+                      <a:tailEnd type="none" w="med" len="med"/>
+                    </a:lnL>
+                    <a:lnR w="12700" cap="flat" cmpd="sng" algn="ctr">
+                      <a:solidFill>
+                        <a:schemeClr val="tx1"/>
+                      </a:solidFill>
+                      <a:prstDash val="solid"/>
+                      <a:round/>
+                      <a:headEnd type="none" w="med" len="med"/>
+                      <a:tailEnd type="none" w="med" len="med"/>
+                    </a:lnR>
+                    <a:lnT w="12700" cap="flat" cmpd="sng" algn="ctr">
+                      <a:solidFill>
+                        <a:schemeClr val="tx1"/>
+                      </a:solidFill>
+                      <a:prstDash val="solid"/>
+                      <a:round/>
+                      <a:headEnd type="none" w="med" len="med"/>
+                      <a:tailEnd type="none" w="med" len="med"/>
+                    </a:lnT>
+                    <a:lnB w="12700" cap="flat" cmpd="sng" algn="ctr">
+                      <a:solidFill>
+                        <a:schemeClr val="tx1"/>
+                      </a:solidFill>
+                      <a:prstDash val="solid"/>
+                      <a:round/>
+                      <a:headEnd type="none" w="med" len="med"/>
+                      <a:tailEnd type="none" w="med" len="med"/>
+                    </a:lnB>
+                  </a:tcPr>
                 </a:tc>
                 <a:tc>
                   <a:txBody>
@@ -5791,7 +6886,44 @@
                       </a:r>
                     </a:p>
                   </a:txBody>
-                  <a:tcPr/>
+                  <a:tcPr>
+                    <a:lnL w="12700" cap="flat" cmpd="sng" algn="ctr">
+                      <a:solidFill>
+                        <a:schemeClr val="tx1"/>
+                      </a:solidFill>
+                      <a:prstDash val="solid"/>
+                      <a:round/>
+                      <a:headEnd type="none" w="med" len="med"/>
+                      <a:tailEnd type="none" w="med" len="med"/>
+                    </a:lnL>
+                    <a:lnR w="12700" cap="flat" cmpd="sng" algn="ctr">
+                      <a:solidFill>
+                        <a:schemeClr val="tx1"/>
+                      </a:solidFill>
+                      <a:prstDash val="solid"/>
+                      <a:round/>
+                      <a:headEnd type="none" w="med" len="med"/>
+                      <a:tailEnd type="none" w="med" len="med"/>
+                    </a:lnR>
+                    <a:lnT w="12700" cap="flat" cmpd="sng" algn="ctr">
+                      <a:solidFill>
+                        <a:schemeClr val="tx1"/>
+                      </a:solidFill>
+                      <a:prstDash val="solid"/>
+                      <a:round/>
+                      <a:headEnd type="none" w="med" len="med"/>
+                      <a:tailEnd type="none" w="med" len="med"/>
+                    </a:lnT>
+                    <a:lnB w="12700" cap="flat" cmpd="sng" algn="ctr">
+                      <a:solidFill>
+                        <a:schemeClr val="tx1"/>
+                      </a:solidFill>
+                      <a:prstDash val="solid"/>
+                      <a:round/>
+                      <a:headEnd type="none" w="med" len="med"/>
+                      <a:tailEnd type="none" w="med" len="med"/>
+                    </a:lnB>
+                  </a:tcPr>
                 </a:tc>
                 <a:extLst>
                   <a:ext uri="{0D108BD9-81ED-4DB2-BD59-A6C34878D82A}">
@@ -5852,7 +6984,7 @@
 </p:sld>
 </file>
 
-<file path=ppt/slides/slide11.xml><?xml version="1.0" encoding="utf-8"?>
+<file path=ppt/slides/slide12.xml><?xml version="1.0" encoding="utf-8"?>
 <p:sld xmlns:a="http://schemas.openxmlformats.org/drawingml/2006/main" xmlns:r="http://schemas.openxmlformats.org/officeDocument/2006/relationships" xmlns:p="http://schemas.openxmlformats.org/presentationml/2006/main">
   <p:cSld>
     <p:spTree>
@@ -5898,7 +7030,7 @@
           <a:p>
             <a:r>
               <a:rPr lang="en-US" dirty="0"/>
-              <a:t>External Interface</a:t>
+              <a:t>External Interface Requirements cont.</a:t>
             </a:r>
           </a:p>
         </p:txBody>
@@ -6023,7 +7155,7 @@
 </p:sld>
 </file>
 
-<file path=ppt/slides/slide12.xml><?xml version="1.0" encoding="utf-8"?>
+<file path=ppt/slides/slide13.xml><?xml version="1.0" encoding="utf-8"?>
 <p:sld xmlns:a="http://schemas.openxmlformats.org/drawingml/2006/main" xmlns:r="http://schemas.openxmlformats.org/officeDocument/2006/relationships" xmlns:p="http://schemas.openxmlformats.org/presentationml/2006/main">
   <p:cSld>
     <p:spTree>
@@ -6031,7 +7163,7 @@
         <p:cNvPr id="1" name="">
           <a:extLst>
             <a:ext uri="{FF2B5EF4-FFF2-40B4-BE49-F238E27FC236}">
-              <a16:creationId xmlns:a16="http://schemas.microsoft.com/office/drawing/2014/main" id="{701443C0-5831-67B6-D214-3A26D4C6E323}"/>
+              <a16:creationId xmlns:a16="http://schemas.microsoft.com/office/drawing/2014/main" id="{5570BD7D-01AD-33A5-FBAF-ACD5F6E2D93B}"/>
             </a:ext>
           </a:extLst>
         </p:cNvPr>
@@ -6051,7 +7183,7 @@
           <p:cNvPr id="2" name="Title 1">
             <a:extLst>
               <a:ext uri="{FF2B5EF4-FFF2-40B4-BE49-F238E27FC236}">
-                <a16:creationId xmlns:a16="http://schemas.microsoft.com/office/drawing/2014/main" id="{7CA0897B-ED9E-6382-1775-8C38E586EADA}"/>
+                <a16:creationId xmlns:a16="http://schemas.microsoft.com/office/drawing/2014/main" id="{732F1E02-AEEE-89DB-41A3-FE4A84D3738B}"/>
               </a:ext>
             </a:extLst>
           </p:cNvPr>
@@ -6076,10 +7208,10 @@
       </p:sp>
       <p:pic>
         <p:nvPicPr>
-          <p:cNvPr id="3" name="Picture 2" descr="A logo with a light bulb and text&#10;&#10;AI-generated content may be incorrect.">
+          <p:cNvPr id="4" name="Picture 3" descr="A logo with a light bulb and text&#10;&#10;AI-generated content may be incorrect.">
             <a:extLst>
               <a:ext uri="{FF2B5EF4-FFF2-40B4-BE49-F238E27FC236}">
-                <a16:creationId xmlns:a16="http://schemas.microsoft.com/office/drawing/2014/main" id="{75E0B5E4-75C9-5EE6-4F84-3BA9D2CC166F}"/>
+                <a16:creationId xmlns:a16="http://schemas.microsoft.com/office/drawing/2014/main" id="{75B40E01-B1C8-D54B-8A30-03729A099FC5}"/>
               </a:ext>
             </a:extLst>
           </p:cNvPr>
@@ -6110,110 +7242,1340 @@
           </a:prstGeom>
         </p:spPr>
       </p:pic>
+      <p:graphicFrame>
+        <p:nvGraphicFramePr>
+          <p:cNvPr id="12" name="Table 11">
+            <a:extLst>
+              <a:ext uri="{FF2B5EF4-FFF2-40B4-BE49-F238E27FC236}">
+                <a16:creationId xmlns:a16="http://schemas.microsoft.com/office/drawing/2014/main" id="{D2459479-69AC-1737-FE96-2CB2224B8C67}"/>
+              </a:ext>
+            </a:extLst>
+          </p:cNvPr>
+          <p:cNvGraphicFramePr>
+            <a:graphicFrameLocks noGrp="1"/>
+          </p:cNvGraphicFramePr>
+          <p:nvPr>
+            <p:extLst>
+              <p:ext uri="{D42A27DB-BD31-4B8C-83A1-F6EECF244321}">
+                <p14:modId xmlns:p14="http://schemas.microsoft.com/office/powerpoint/2010/main" val="3801609362"/>
+              </p:ext>
+            </p:extLst>
+          </p:nvPr>
+        </p:nvGraphicFramePr>
+        <p:xfrm>
+          <a:off x="838200" y="2026248"/>
+          <a:ext cx="10515600" cy="3845560"/>
+        </p:xfrm>
+        <a:graphic>
+          <a:graphicData uri="http://schemas.openxmlformats.org/drawingml/2006/table">
+            <a:tbl>
+              <a:tblPr firstRow="1" bandRow="1">
+                <a:tableStyleId>{5C22544A-7EE6-4342-B048-85BDC9FD1C3A}</a:tableStyleId>
+              </a:tblPr>
+              <a:tblGrid>
+                <a:gridCol w="1553967">
+                  <a:extLst>
+                    <a:ext uri="{9D8B030D-6E8A-4147-A177-3AD203B41FA5}">
+                      <a16:colId xmlns:a16="http://schemas.microsoft.com/office/drawing/2014/main" val="296755341"/>
+                    </a:ext>
+                  </a:extLst>
+                </a:gridCol>
+                <a:gridCol w="1768743">
+                  <a:extLst>
+                    <a:ext uri="{9D8B030D-6E8A-4147-A177-3AD203B41FA5}">
+                      <a16:colId xmlns:a16="http://schemas.microsoft.com/office/drawing/2014/main" val="752012600"/>
+                    </a:ext>
+                  </a:extLst>
+                </a:gridCol>
+                <a:gridCol w="5521005">
+                  <a:extLst>
+                    <a:ext uri="{9D8B030D-6E8A-4147-A177-3AD203B41FA5}">
+                      <a16:colId xmlns:a16="http://schemas.microsoft.com/office/drawing/2014/main" val="1806458636"/>
+                    </a:ext>
+                  </a:extLst>
+                </a:gridCol>
+                <a:gridCol w="1671885">
+                  <a:extLst>
+                    <a:ext uri="{9D8B030D-6E8A-4147-A177-3AD203B41FA5}">
+                      <a16:colId xmlns:a16="http://schemas.microsoft.com/office/drawing/2014/main" val="3708226101"/>
+                    </a:ext>
+                  </a:extLst>
+                </a:gridCol>
+              </a:tblGrid>
+              <a:tr h="370840">
+                <a:tc>
+                  <a:txBody>
+                    <a:bodyPr/>
+                    <a:lstStyle/>
+                    <a:p>
+                      <a:pPr algn="ctr"/>
+                      <a:r>
+                        <a:rPr lang="en-US" dirty="0"/>
+                        <a:t>Request #</a:t>
+                      </a:r>
+                    </a:p>
+                  </a:txBody>
+                  <a:tcPr>
+                    <a:lnL w="12700" cap="flat" cmpd="sng" algn="ctr">
+                      <a:solidFill>
+                        <a:schemeClr val="tx1"/>
+                      </a:solidFill>
+                      <a:prstDash val="solid"/>
+                      <a:round/>
+                      <a:headEnd type="none" w="med" len="med"/>
+                      <a:tailEnd type="none" w="med" len="med"/>
+                    </a:lnL>
+                    <a:lnR w="12700" cap="flat" cmpd="sng" algn="ctr">
+                      <a:solidFill>
+                        <a:schemeClr val="tx1"/>
+                      </a:solidFill>
+                      <a:prstDash val="solid"/>
+                      <a:round/>
+                      <a:headEnd type="none" w="med" len="med"/>
+                      <a:tailEnd type="none" w="med" len="med"/>
+                    </a:lnR>
+                    <a:lnT w="12700" cap="flat" cmpd="sng" algn="ctr">
+                      <a:solidFill>
+                        <a:schemeClr val="tx1"/>
+                      </a:solidFill>
+                      <a:prstDash val="solid"/>
+                      <a:round/>
+                      <a:headEnd type="none" w="med" len="med"/>
+                      <a:tailEnd type="none" w="med" len="med"/>
+                    </a:lnT>
+                    <a:lnB w="12700" cap="flat" cmpd="sng" algn="ctr">
+                      <a:solidFill>
+                        <a:schemeClr val="tx1"/>
+                      </a:solidFill>
+                      <a:prstDash val="solid"/>
+                      <a:round/>
+                      <a:headEnd type="none" w="med" len="med"/>
+                      <a:tailEnd type="none" w="med" len="med"/>
+                    </a:lnB>
+                  </a:tcPr>
+                </a:tc>
+                <a:tc>
+                  <a:txBody>
+                    <a:bodyPr/>
+                    <a:lstStyle/>
+                    <a:p>
+                      <a:pPr algn="ctr"/>
+                      <a:r>
+                        <a:rPr lang="en-US" dirty="0"/>
+                        <a:t>Feature</a:t>
+                      </a:r>
+                    </a:p>
+                  </a:txBody>
+                  <a:tcPr>
+                    <a:lnL w="12700" cap="flat" cmpd="sng" algn="ctr">
+                      <a:solidFill>
+                        <a:schemeClr val="tx1"/>
+                      </a:solidFill>
+                      <a:prstDash val="solid"/>
+                      <a:round/>
+                      <a:headEnd type="none" w="med" len="med"/>
+                      <a:tailEnd type="none" w="med" len="med"/>
+                    </a:lnL>
+                    <a:lnR w="12700" cap="flat" cmpd="sng" algn="ctr">
+                      <a:solidFill>
+                        <a:schemeClr val="tx1"/>
+                      </a:solidFill>
+                      <a:prstDash val="solid"/>
+                      <a:round/>
+                      <a:headEnd type="none" w="med" len="med"/>
+                      <a:tailEnd type="none" w="med" len="med"/>
+                    </a:lnR>
+                    <a:lnT w="12700" cap="flat" cmpd="sng" algn="ctr">
+                      <a:solidFill>
+                        <a:schemeClr val="tx1"/>
+                      </a:solidFill>
+                      <a:prstDash val="solid"/>
+                      <a:round/>
+                      <a:headEnd type="none" w="med" len="med"/>
+                      <a:tailEnd type="none" w="med" len="med"/>
+                    </a:lnT>
+                    <a:lnB w="12700" cap="flat" cmpd="sng" algn="ctr">
+                      <a:solidFill>
+                        <a:schemeClr val="tx1"/>
+                      </a:solidFill>
+                      <a:prstDash val="solid"/>
+                      <a:round/>
+                      <a:headEnd type="none" w="med" len="med"/>
+                      <a:tailEnd type="none" w="med" len="med"/>
+                    </a:lnB>
+                  </a:tcPr>
+                </a:tc>
+                <a:tc>
+                  <a:txBody>
+                    <a:bodyPr/>
+                    <a:lstStyle/>
+                    <a:p>
+                      <a:pPr algn="ctr"/>
+                      <a:r>
+                        <a:rPr lang="en-US" dirty="0"/>
+                        <a:t>Other Requirement Sentence</a:t>
+                      </a:r>
+                    </a:p>
+                  </a:txBody>
+                  <a:tcPr>
+                    <a:lnL w="12700" cap="flat" cmpd="sng" algn="ctr">
+                      <a:solidFill>
+                        <a:schemeClr val="tx1"/>
+                      </a:solidFill>
+                      <a:prstDash val="solid"/>
+                      <a:round/>
+                      <a:headEnd type="none" w="med" len="med"/>
+                      <a:tailEnd type="none" w="med" len="med"/>
+                    </a:lnL>
+                    <a:lnR w="12700" cap="flat" cmpd="sng" algn="ctr">
+                      <a:solidFill>
+                        <a:schemeClr val="tx1"/>
+                      </a:solidFill>
+                      <a:prstDash val="solid"/>
+                      <a:round/>
+                      <a:headEnd type="none" w="med" len="med"/>
+                      <a:tailEnd type="none" w="med" len="med"/>
+                    </a:lnR>
+                    <a:lnT w="12700" cap="flat" cmpd="sng" algn="ctr">
+                      <a:solidFill>
+                        <a:schemeClr val="tx1"/>
+                      </a:solidFill>
+                      <a:prstDash val="solid"/>
+                      <a:round/>
+                      <a:headEnd type="none" w="med" len="med"/>
+                      <a:tailEnd type="none" w="med" len="med"/>
+                    </a:lnT>
+                    <a:lnB w="12700" cap="flat" cmpd="sng" algn="ctr">
+                      <a:solidFill>
+                        <a:schemeClr val="tx1"/>
+                      </a:solidFill>
+                      <a:prstDash val="solid"/>
+                      <a:round/>
+                      <a:headEnd type="none" w="med" len="med"/>
+                      <a:tailEnd type="none" w="med" len="med"/>
+                    </a:lnB>
+                  </a:tcPr>
+                </a:tc>
+                <a:tc>
+                  <a:txBody>
+                    <a:bodyPr/>
+                    <a:lstStyle/>
+                    <a:p>
+                      <a:pPr algn="ctr"/>
+                      <a:r>
+                        <a:rPr lang="en-US" dirty="0"/>
+                        <a:t>Priority</a:t>
+                      </a:r>
+                    </a:p>
+                  </a:txBody>
+                  <a:tcPr>
+                    <a:lnL w="12700" cap="flat" cmpd="sng" algn="ctr">
+                      <a:solidFill>
+                        <a:schemeClr val="tx1"/>
+                      </a:solidFill>
+                      <a:prstDash val="solid"/>
+                      <a:round/>
+                      <a:headEnd type="none" w="med" len="med"/>
+                      <a:tailEnd type="none" w="med" len="med"/>
+                    </a:lnL>
+                    <a:lnR w="12700" cap="flat" cmpd="sng" algn="ctr">
+                      <a:solidFill>
+                        <a:schemeClr val="tx1"/>
+                      </a:solidFill>
+                      <a:prstDash val="solid"/>
+                      <a:round/>
+                      <a:headEnd type="none" w="med" len="med"/>
+                      <a:tailEnd type="none" w="med" len="med"/>
+                    </a:lnR>
+                    <a:lnT w="12700" cap="flat" cmpd="sng" algn="ctr">
+                      <a:solidFill>
+                        <a:schemeClr val="tx1"/>
+                      </a:solidFill>
+                      <a:prstDash val="solid"/>
+                      <a:round/>
+                      <a:headEnd type="none" w="med" len="med"/>
+                      <a:tailEnd type="none" w="med" len="med"/>
+                    </a:lnT>
+                    <a:lnB w="12700" cap="flat" cmpd="sng" algn="ctr">
+                      <a:solidFill>
+                        <a:schemeClr val="tx1"/>
+                      </a:solidFill>
+                      <a:prstDash val="solid"/>
+                      <a:round/>
+                      <a:headEnd type="none" w="med" len="med"/>
+                      <a:tailEnd type="none" w="med" len="med"/>
+                    </a:lnB>
+                  </a:tcPr>
+                </a:tc>
+                <a:extLst>
+                  <a:ext uri="{0D108BD9-81ED-4DB2-BD59-A6C34878D82A}">
+                    <a16:rowId xmlns:a16="http://schemas.microsoft.com/office/drawing/2014/main" val="1216703589"/>
+                  </a:ext>
+                </a:extLst>
+              </a:tr>
+              <a:tr h="370840">
+                <a:tc>
+                  <a:txBody>
+                    <a:bodyPr/>
+                    <a:lstStyle/>
+                    <a:p>
+                      <a:pPr algn="ctr"/>
+                      <a:r>
+                        <a:rPr lang="en-US" dirty="0"/>
+                        <a:t>OR#1</a:t>
+                      </a:r>
+                    </a:p>
+                  </a:txBody>
+                  <a:tcPr>
+                    <a:lnL w="12700" cap="flat" cmpd="sng" algn="ctr">
+                      <a:solidFill>
+                        <a:schemeClr val="tx1"/>
+                      </a:solidFill>
+                      <a:prstDash val="solid"/>
+                      <a:round/>
+                      <a:headEnd type="none" w="med" len="med"/>
+                      <a:tailEnd type="none" w="med" len="med"/>
+                    </a:lnL>
+                    <a:lnR w="12700" cap="flat" cmpd="sng" algn="ctr">
+                      <a:solidFill>
+                        <a:schemeClr val="tx1"/>
+                      </a:solidFill>
+                      <a:prstDash val="solid"/>
+                      <a:round/>
+                      <a:headEnd type="none" w="med" len="med"/>
+                      <a:tailEnd type="none" w="med" len="med"/>
+                    </a:lnR>
+                    <a:lnT w="12700" cap="flat" cmpd="sng" algn="ctr">
+                      <a:solidFill>
+                        <a:schemeClr val="tx1"/>
+                      </a:solidFill>
+                      <a:prstDash val="solid"/>
+                      <a:round/>
+                      <a:headEnd type="none" w="med" len="med"/>
+                      <a:tailEnd type="none" w="med" len="med"/>
+                    </a:lnT>
+                    <a:lnB w="12700" cap="flat" cmpd="sng" algn="ctr">
+                      <a:solidFill>
+                        <a:schemeClr val="tx1"/>
+                      </a:solidFill>
+                      <a:prstDash val="solid"/>
+                      <a:round/>
+                      <a:headEnd type="none" w="med" len="med"/>
+                      <a:tailEnd type="none" w="med" len="med"/>
+                    </a:lnB>
+                  </a:tcPr>
+                </a:tc>
+                <a:tc>
+                  <a:txBody>
+                    <a:bodyPr/>
+                    <a:lstStyle/>
+                    <a:p>
+                      <a:pPr algn="ctr"/>
+                      <a:r>
+                        <a:rPr lang="en-US" dirty="0"/>
+                        <a:t>Documentation</a:t>
+                      </a:r>
+                    </a:p>
+                  </a:txBody>
+                  <a:tcPr>
+                    <a:lnL w="12700" cap="flat" cmpd="sng" algn="ctr">
+                      <a:solidFill>
+                        <a:schemeClr val="tx1"/>
+                      </a:solidFill>
+                      <a:prstDash val="solid"/>
+                      <a:round/>
+                      <a:headEnd type="none" w="med" len="med"/>
+                      <a:tailEnd type="none" w="med" len="med"/>
+                    </a:lnL>
+                    <a:lnR w="12700" cap="flat" cmpd="sng" algn="ctr">
+                      <a:solidFill>
+                        <a:schemeClr val="tx1"/>
+                      </a:solidFill>
+                      <a:prstDash val="solid"/>
+                      <a:round/>
+                      <a:headEnd type="none" w="med" len="med"/>
+                      <a:tailEnd type="none" w="med" len="med"/>
+                    </a:lnR>
+                    <a:lnT w="12700" cap="flat" cmpd="sng" algn="ctr">
+                      <a:solidFill>
+                        <a:schemeClr val="tx1"/>
+                      </a:solidFill>
+                      <a:prstDash val="solid"/>
+                      <a:round/>
+                      <a:headEnd type="none" w="med" len="med"/>
+                      <a:tailEnd type="none" w="med" len="med"/>
+                    </a:lnT>
+                    <a:lnB w="12700" cap="flat" cmpd="sng" algn="ctr">
+                      <a:solidFill>
+                        <a:schemeClr val="tx1"/>
+                      </a:solidFill>
+                      <a:prstDash val="solid"/>
+                      <a:round/>
+                      <a:headEnd type="none" w="med" len="med"/>
+                      <a:tailEnd type="none" w="med" len="med"/>
+                    </a:lnB>
+                  </a:tcPr>
+                </a:tc>
+                <a:tc>
+                  <a:txBody>
+                    <a:bodyPr/>
+                    <a:lstStyle/>
+                    <a:p>
+                      <a:pPr algn="l"/>
+                      <a:r>
+                        <a:rPr lang="en-US" dirty="0"/>
+                        <a:t>The system will maintain up-to-date project documentation throughout the semester.</a:t>
+                      </a:r>
+                    </a:p>
+                  </a:txBody>
+                  <a:tcPr>
+                    <a:lnL w="12700" cap="flat" cmpd="sng" algn="ctr">
+                      <a:solidFill>
+                        <a:schemeClr val="tx1"/>
+                      </a:solidFill>
+                      <a:prstDash val="solid"/>
+                      <a:round/>
+                      <a:headEnd type="none" w="med" len="med"/>
+                      <a:tailEnd type="none" w="med" len="med"/>
+                    </a:lnL>
+                    <a:lnR w="12700" cap="flat" cmpd="sng" algn="ctr">
+                      <a:solidFill>
+                        <a:schemeClr val="tx1"/>
+                      </a:solidFill>
+                      <a:prstDash val="solid"/>
+                      <a:round/>
+                      <a:headEnd type="none" w="med" len="med"/>
+                      <a:tailEnd type="none" w="med" len="med"/>
+                    </a:lnR>
+                    <a:lnT w="12700" cap="flat" cmpd="sng" algn="ctr">
+                      <a:solidFill>
+                        <a:schemeClr val="tx1"/>
+                      </a:solidFill>
+                      <a:prstDash val="solid"/>
+                      <a:round/>
+                      <a:headEnd type="none" w="med" len="med"/>
+                      <a:tailEnd type="none" w="med" len="med"/>
+                    </a:lnT>
+                    <a:lnB w="12700" cap="flat" cmpd="sng" algn="ctr">
+                      <a:solidFill>
+                        <a:schemeClr val="tx1"/>
+                      </a:solidFill>
+                      <a:prstDash val="solid"/>
+                      <a:round/>
+                      <a:headEnd type="none" w="med" len="med"/>
+                      <a:tailEnd type="none" w="med" len="med"/>
+                    </a:lnB>
+                  </a:tcPr>
+                </a:tc>
+                <a:tc>
+                  <a:txBody>
+                    <a:bodyPr/>
+                    <a:lstStyle/>
+                    <a:p>
+                      <a:pPr algn="ctr"/>
+                      <a:r>
+                        <a:rPr lang="en-US" dirty="0"/>
+                        <a:t>High</a:t>
+                      </a:r>
+                    </a:p>
+                  </a:txBody>
+                  <a:tcPr>
+                    <a:lnL w="12700" cap="flat" cmpd="sng" algn="ctr">
+                      <a:solidFill>
+                        <a:schemeClr val="tx1"/>
+                      </a:solidFill>
+                      <a:prstDash val="solid"/>
+                      <a:round/>
+                      <a:headEnd type="none" w="med" len="med"/>
+                      <a:tailEnd type="none" w="med" len="med"/>
+                    </a:lnL>
+                    <a:lnR w="12700" cap="flat" cmpd="sng" algn="ctr">
+                      <a:solidFill>
+                        <a:schemeClr val="tx1"/>
+                      </a:solidFill>
+                      <a:prstDash val="solid"/>
+                      <a:round/>
+                      <a:headEnd type="none" w="med" len="med"/>
+                      <a:tailEnd type="none" w="med" len="med"/>
+                    </a:lnR>
+                    <a:lnT w="12700" cap="flat" cmpd="sng" algn="ctr">
+                      <a:solidFill>
+                        <a:schemeClr val="tx1"/>
+                      </a:solidFill>
+                      <a:prstDash val="solid"/>
+                      <a:round/>
+                      <a:headEnd type="none" w="med" len="med"/>
+                      <a:tailEnd type="none" w="med" len="med"/>
+                    </a:lnT>
+                    <a:lnB w="12700" cap="flat" cmpd="sng" algn="ctr">
+                      <a:solidFill>
+                        <a:schemeClr val="tx1"/>
+                      </a:solidFill>
+                      <a:prstDash val="solid"/>
+                      <a:round/>
+                      <a:headEnd type="none" w="med" len="med"/>
+                      <a:tailEnd type="none" w="med" len="med"/>
+                    </a:lnB>
+                  </a:tcPr>
+                </a:tc>
+                <a:extLst>
+                  <a:ext uri="{0D108BD9-81ED-4DB2-BD59-A6C34878D82A}">
+                    <a16:rowId xmlns:a16="http://schemas.microsoft.com/office/drawing/2014/main" val="1584175637"/>
+                  </a:ext>
+                </a:extLst>
+              </a:tr>
+              <a:tr h="370840">
+                <a:tc>
+                  <a:txBody>
+                    <a:bodyPr/>
+                    <a:lstStyle/>
+                    <a:p>
+                      <a:pPr algn="ctr"/>
+                      <a:r>
+                        <a:rPr lang="en-US" dirty="0"/>
+                        <a:t>OR#2</a:t>
+                      </a:r>
+                    </a:p>
+                  </a:txBody>
+                  <a:tcPr>
+                    <a:lnL w="12700" cap="flat" cmpd="sng" algn="ctr">
+                      <a:solidFill>
+                        <a:schemeClr val="tx1"/>
+                      </a:solidFill>
+                      <a:prstDash val="solid"/>
+                      <a:round/>
+                      <a:headEnd type="none" w="med" len="med"/>
+                      <a:tailEnd type="none" w="med" len="med"/>
+                    </a:lnL>
+                    <a:lnR w="12700" cap="flat" cmpd="sng" algn="ctr">
+                      <a:solidFill>
+                        <a:schemeClr val="tx1"/>
+                      </a:solidFill>
+                      <a:prstDash val="solid"/>
+                      <a:round/>
+                      <a:headEnd type="none" w="med" len="med"/>
+                      <a:tailEnd type="none" w="med" len="med"/>
+                    </a:lnR>
+                    <a:lnT w="12700" cap="flat" cmpd="sng" algn="ctr">
+                      <a:solidFill>
+                        <a:schemeClr val="tx1"/>
+                      </a:solidFill>
+                      <a:prstDash val="solid"/>
+                      <a:round/>
+                      <a:headEnd type="none" w="med" len="med"/>
+                      <a:tailEnd type="none" w="med" len="med"/>
+                    </a:lnT>
+                    <a:lnB w="12700" cap="flat" cmpd="sng" algn="ctr">
+                      <a:solidFill>
+                        <a:schemeClr val="tx1"/>
+                      </a:solidFill>
+                      <a:prstDash val="solid"/>
+                      <a:round/>
+                      <a:headEnd type="none" w="med" len="med"/>
+                      <a:tailEnd type="none" w="med" len="med"/>
+                    </a:lnB>
+                  </a:tcPr>
+                </a:tc>
+                <a:tc>
+                  <a:txBody>
+                    <a:bodyPr/>
+                    <a:lstStyle/>
+                    <a:p>
+                      <a:pPr algn="ctr"/>
+                      <a:r>
+                        <a:rPr lang="en-US" dirty="0"/>
+                        <a:t>COSC412</a:t>
+                      </a:r>
+                    </a:p>
+                  </a:txBody>
+                  <a:tcPr>
+                    <a:lnL w="12700" cap="flat" cmpd="sng" algn="ctr">
+                      <a:solidFill>
+                        <a:schemeClr val="tx1"/>
+                      </a:solidFill>
+                      <a:prstDash val="solid"/>
+                      <a:round/>
+                      <a:headEnd type="none" w="med" len="med"/>
+                      <a:tailEnd type="none" w="med" len="med"/>
+                    </a:lnL>
+                    <a:lnR w="12700" cap="flat" cmpd="sng" algn="ctr">
+                      <a:solidFill>
+                        <a:schemeClr val="tx1"/>
+                      </a:solidFill>
+                      <a:prstDash val="solid"/>
+                      <a:round/>
+                      <a:headEnd type="none" w="med" len="med"/>
+                      <a:tailEnd type="none" w="med" len="med"/>
+                    </a:lnR>
+                    <a:lnT w="12700" cap="flat" cmpd="sng" algn="ctr">
+                      <a:solidFill>
+                        <a:schemeClr val="tx1"/>
+                      </a:solidFill>
+                      <a:prstDash val="solid"/>
+                      <a:round/>
+                      <a:headEnd type="none" w="med" len="med"/>
+                      <a:tailEnd type="none" w="med" len="med"/>
+                    </a:lnT>
+                    <a:lnB w="12700" cap="flat" cmpd="sng" algn="ctr">
+                      <a:solidFill>
+                        <a:schemeClr val="tx1"/>
+                      </a:solidFill>
+                      <a:prstDash val="solid"/>
+                      <a:round/>
+                      <a:headEnd type="none" w="med" len="med"/>
+                      <a:tailEnd type="none" w="med" len="med"/>
+                    </a:lnB>
+                  </a:tcPr>
+                </a:tc>
+                <a:tc>
+                  <a:txBody>
+                    <a:bodyPr/>
+                    <a:lstStyle/>
+                    <a:p>
+                      <a:pPr algn="l"/>
+                      <a:r>
+                        <a:rPr lang="en-US" dirty="0"/>
+                        <a:t>The system will have all source code version-controlled using GitHub with weekly commits.</a:t>
+                      </a:r>
+                    </a:p>
+                  </a:txBody>
+                  <a:tcPr>
+                    <a:lnL w="12700" cap="flat" cmpd="sng" algn="ctr">
+                      <a:solidFill>
+                        <a:schemeClr val="tx1"/>
+                      </a:solidFill>
+                      <a:prstDash val="solid"/>
+                      <a:round/>
+                      <a:headEnd type="none" w="med" len="med"/>
+                      <a:tailEnd type="none" w="med" len="med"/>
+                    </a:lnL>
+                    <a:lnR w="12700" cap="flat" cmpd="sng" algn="ctr">
+                      <a:solidFill>
+                        <a:schemeClr val="tx1"/>
+                      </a:solidFill>
+                      <a:prstDash val="solid"/>
+                      <a:round/>
+                      <a:headEnd type="none" w="med" len="med"/>
+                      <a:tailEnd type="none" w="med" len="med"/>
+                    </a:lnR>
+                    <a:lnT w="12700" cap="flat" cmpd="sng" algn="ctr">
+                      <a:solidFill>
+                        <a:schemeClr val="tx1"/>
+                      </a:solidFill>
+                      <a:prstDash val="solid"/>
+                      <a:round/>
+                      <a:headEnd type="none" w="med" len="med"/>
+                      <a:tailEnd type="none" w="med" len="med"/>
+                    </a:lnT>
+                    <a:lnB w="12700" cap="flat" cmpd="sng" algn="ctr">
+                      <a:solidFill>
+                        <a:schemeClr val="tx1"/>
+                      </a:solidFill>
+                      <a:prstDash val="solid"/>
+                      <a:round/>
+                      <a:headEnd type="none" w="med" len="med"/>
+                      <a:tailEnd type="none" w="med" len="med"/>
+                    </a:lnB>
+                  </a:tcPr>
+                </a:tc>
+                <a:tc>
+                  <a:txBody>
+                    <a:bodyPr/>
+                    <a:lstStyle/>
+                    <a:p>
+                      <a:pPr algn="ctr"/>
+                      <a:r>
+                        <a:rPr lang="en-US" dirty="0"/>
+                        <a:t>High</a:t>
+                      </a:r>
+                    </a:p>
+                  </a:txBody>
+                  <a:tcPr>
+                    <a:lnL w="12700" cap="flat" cmpd="sng" algn="ctr">
+                      <a:solidFill>
+                        <a:schemeClr val="tx1"/>
+                      </a:solidFill>
+                      <a:prstDash val="solid"/>
+                      <a:round/>
+                      <a:headEnd type="none" w="med" len="med"/>
+                      <a:tailEnd type="none" w="med" len="med"/>
+                    </a:lnL>
+                    <a:lnR w="12700" cap="flat" cmpd="sng" algn="ctr">
+                      <a:solidFill>
+                        <a:schemeClr val="tx1"/>
+                      </a:solidFill>
+                      <a:prstDash val="solid"/>
+                      <a:round/>
+                      <a:headEnd type="none" w="med" len="med"/>
+                      <a:tailEnd type="none" w="med" len="med"/>
+                    </a:lnR>
+                    <a:lnT w="12700" cap="flat" cmpd="sng" algn="ctr">
+                      <a:solidFill>
+                        <a:schemeClr val="tx1"/>
+                      </a:solidFill>
+                      <a:prstDash val="solid"/>
+                      <a:round/>
+                      <a:headEnd type="none" w="med" len="med"/>
+                      <a:tailEnd type="none" w="med" len="med"/>
+                    </a:lnT>
+                    <a:lnB w="12700" cap="flat" cmpd="sng" algn="ctr">
+                      <a:solidFill>
+                        <a:schemeClr val="tx1"/>
+                      </a:solidFill>
+                      <a:prstDash val="solid"/>
+                      <a:round/>
+                      <a:headEnd type="none" w="med" len="med"/>
+                      <a:tailEnd type="none" w="med" len="med"/>
+                    </a:lnB>
+                  </a:tcPr>
+                </a:tc>
+                <a:extLst>
+                  <a:ext uri="{0D108BD9-81ED-4DB2-BD59-A6C34878D82A}">
+                    <a16:rowId xmlns:a16="http://schemas.microsoft.com/office/drawing/2014/main" val="1012845144"/>
+                  </a:ext>
+                </a:extLst>
+              </a:tr>
+              <a:tr h="370840">
+                <a:tc>
+                  <a:txBody>
+                    <a:bodyPr/>
+                    <a:lstStyle/>
+                    <a:p>
+                      <a:pPr algn="ctr"/>
+                      <a:r>
+                        <a:rPr lang="en-US" dirty="0"/>
+                        <a:t>OR#3</a:t>
+                      </a:r>
+                    </a:p>
+                  </a:txBody>
+                  <a:tcPr>
+                    <a:lnL w="12700" cap="flat" cmpd="sng" algn="ctr">
+                      <a:solidFill>
+                        <a:schemeClr val="tx1"/>
+                      </a:solidFill>
+                      <a:prstDash val="solid"/>
+                      <a:round/>
+                      <a:headEnd type="none" w="med" len="med"/>
+                      <a:tailEnd type="none" w="med" len="med"/>
+                    </a:lnL>
+                    <a:lnR w="12700" cap="flat" cmpd="sng" algn="ctr">
+                      <a:solidFill>
+                        <a:schemeClr val="tx1"/>
+                      </a:solidFill>
+                      <a:prstDash val="solid"/>
+                      <a:round/>
+                      <a:headEnd type="none" w="med" len="med"/>
+                      <a:tailEnd type="none" w="med" len="med"/>
+                    </a:lnR>
+                    <a:lnT w="12700" cap="flat" cmpd="sng" algn="ctr">
+                      <a:solidFill>
+                        <a:schemeClr val="tx1"/>
+                      </a:solidFill>
+                      <a:prstDash val="solid"/>
+                      <a:round/>
+                      <a:headEnd type="none" w="med" len="med"/>
+                      <a:tailEnd type="none" w="med" len="med"/>
+                    </a:lnT>
+                    <a:lnB w="12700" cap="flat" cmpd="sng" algn="ctr">
+                      <a:solidFill>
+                        <a:schemeClr val="tx1"/>
+                      </a:solidFill>
+                      <a:prstDash val="solid"/>
+                      <a:round/>
+                      <a:headEnd type="none" w="med" len="med"/>
+                      <a:tailEnd type="none" w="med" len="med"/>
+                    </a:lnB>
+                  </a:tcPr>
+                </a:tc>
+                <a:tc>
+                  <a:txBody>
+                    <a:bodyPr/>
+                    <a:lstStyle/>
+                    <a:p>
+                      <a:pPr algn="ctr"/>
+                      <a:r>
+                        <a:rPr lang="en-US" dirty="0"/>
+                        <a:t>Scalability</a:t>
+                      </a:r>
+                    </a:p>
+                  </a:txBody>
+                  <a:tcPr>
+                    <a:lnL w="12700" cap="flat" cmpd="sng" algn="ctr">
+                      <a:solidFill>
+                        <a:schemeClr val="tx1"/>
+                      </a:solidFill>
+                      <a:prstDash val="solid"/>
+                      <a:round/>
+                      <a:headEnd type="none" w="med" len="med"/>
+                      <a:tailEnd type="none" w="med" len="med"/>
+                    </a:lnL>
+                    <a:lnR w="12700" cap="flat" cmpd="sng" algn="ctr">
+                      <a:solidFill>
+                        <a:schemeClr val="tx1"/>
+                      </a:solidFill>
+                      <a:prstDash val="solid"/>
+                      <a:round/>
+                      <a:headEnd type="none" w="med" len="med"/>
+                      <a:tailEnd type="none" w="med" len="med"/>
+                    </a:lnR>
+                    <a:lnT w="12700" cap="flat" cmpd="sng" algn="ctr">
+                      <a:solidFill>
+                        <a:schemeClr val="tx1"/>
+                      </a:solidFill>
+                      <a:prstDash val="solid"/>
+                      <a:round/>
+                      <a:headEnd type="none" w="med" len="med"/>
+                      <a:tailEnd type="none" w="med" len="med"/>
+                    </a:lnT>
+                    <a:lnB w="12700" cap="flat" cmpd="sng" algn="ctr">
+                      <a:solidFill>
+                        <a:schemeClr val="tx1"/>
+                      </a:solidFill>
+                      <a:prstDash val="solid"/>
+                      <a:round/>
+                      <a:headEnd type="none" w="med" len="med"/>
+                      <a:tailEnd type="none" w="med" len="med"/>
+                    </a:lnB>
+                  </a:tcPr>
+                </a:tc>
+                <a:tc>
+                  <a:txBody>
+                    <a:bodyPr/>
+                    <a:lstStyle/>
+                    <a:p>
+                      <a:pPr algn="l"/>
+                      <a:r>
+                        <a:rPr lang="en-US" dirty="0"/>
+                        <a:t>The system must be designed to handle multiple concurrent users without performance degradation.</a:t>
+                      </a:r>
+                    </a:p>
+                  </a:txBody>
+                  <a:tcPr>
+                    <a:lnL w="12700" cap="flat" cmpd="sng" algn="ctr">
+                      <a:solidFill>
+                        <a:schemeClr val="tx1"/>
+                      </a:solidFill>
+                      <a:prstDash val="solid"/>
+                      <a:round/>
+                      <a:headEnd type="none" w="med" len="med"/>
+                      <a:tailEnd type="none" w="med" len="med"/>
+                    </a:lnL>
+                    <a:lnR w="12700" cap="flat" cmpd="sng" algn="ctr">
+                      <a:solidFill>
+                        <a:schemeClr val="tx1"/>
+                      </a:solidFill>
+                      <a:prstDash val="solid"/>
+                      <a:round/>
+                      <a:headEnd type="none" w="med" len="med"/>
+                      <a:tailEnd type="none" w="med" len="med"/>
+                    </a:lnR>
+                    <a:lnT w="12700" cap="flat" cmpd="sng" algn="ctr">
+                      <a:solidFill>
+                        <a:schemeClr val="tx1"/>
+                      </a:solidFill>
+                      <a:prstDash val="solid"/>
+                      <a:round/>
+                      <a:headEnd type="none" w="med" len="med"/>
+                      <a:tailEnd type="none" w="med" len="med"/>
+                    </a:lnT>
+                    <a:lnB w="12700" cap="flat" cmpd="sng" algn="ctr">
+                      <a:solidFill>
+                        <a:schemeClr val="tx1"/>
+                      </a:solidFill>
+                      <a:prstDash val="solid"/>
+                      <a:round/>
+                      <a:headEnd type="none" w="med" len="med"/>
+                      <a:tailEnd type="none" w="med" len="med"/>
+                    </a:lnB>
+                  </a:tcPr>
+                </a:tc>
+                <a:tc>
+                  <a:txBody>
+                    <a:bodyPr/>
+                    <a:lstStyle/>
+                    <a:p>
+                      <a:pPr algn="ctr"/>
+                      <a:r>
+                        <a:rPr lang="en-US" dirty="0"/>
+                        <a:t>Medium</a:t>
+                      </a:r>
+                    </a:p>
+                  </a:txBody>
+                  <a:tcPr>
+                    <a:lnL w="12700" cap="flat" cmpd="sng" algn="ctr">
+                      <a:solidFill>
+                        <a:schemeClr val="tx1"/>
+                      </a:solidFill>
+                      <a:prstDash val="solid"/>
+                      <a:round/>
+                      <a:headEnd type="none" w="med" len="med"/>
+                      <a:tailEnd type="none" w="med" len="med"/>
+                    </a:lnL>
+                    <a:lnR w="12700" cap="flat" cmpd="sng" algn="ctr">
+                      <a:solidFill>
+                        <a:schemeClr val="tx1"/>
+                      </a:solidFill>
+                      <a:prstDash val="solid"/>
+                      <a:round/>
+                      <a:headEnd type="none" w="med" len="med"/>
+                      <a:tailEnd type="none" w="med" len="med"/>
+                    </a:lnR>
+                    <a:lnT w="12700" cap="flat" cmpd="sng" algn="ctr">
+                      <a:solidFill>
+                        <a:schemeClr val="tx1"/>
+                      </a:solidFill>
+                      <a:prstDash val="solid"/>
+                      <a:round/>
+                      <a:headEnd type="none" w="med" len="med"/>
+                      <a:tailEnd type="none" w="med" len="med"/>
+                    </a:lnT>
+                    <a:lnB w="12700" cap="flat" cmpd="sng" algn="ctr">
+                      <a:solidFill>
+                        <a:schemeClr val="tx1"/>
+                      </a:solidFill>
+                      <a:prstDash val="solid"/>
+                      <a:round/>
+                      <a:headEnd type="none" w="med" len="med"/>
+                      <a:tailEnd type="none" w="med" len="med"/>
+                    </a:lnB>
+                  </a:tcPr>
+                </a:tc>
+                <a:extLst>
+                  <a:ext uri="{0D108BD9-81ED-4DB2-BD59-A6C34878D82A}">
+                    <a16:rowId xmlns:a16="http://schemas.microsoft.com/office/drawing/2014/main" val="3314131713"/>
+                  </a:ext>
+                </a:extLst>
+              </a:tr>
+              <a:tr h="370840">
+                <a:tc>
+                  <a:txBody>
+                    <a:bodyPr/>
+                    <a:lstStyle/>
+                    <a:p>
+                      <a:pPr algn="ctr"/>
+                      <a:r>
+                        <a:rPr lang="en-US" dirty="0"/>
+                        <a:t>OR#4</a:t>
+                      </a:r>
+                    </a:p>
+                  </a:txBody>
+                  <a:tcPr>
+                    <a:lnL w="12700" cap="flat" cmpd="sng" algn="ctr">
+                      <a:solidFill>
+                        <a:schemeClr val="tx1"/>
+                      </a:solidFill>
+                      <a:prstDash val="solid"/>
+                      <a:round/>
+                      <a:headEnd type="none" w="med" len="med"/>
+                      <a:tailEnd type="none" w="med" len="med"/>
+                    </a:lnL>
+                    <a:lnR w="12700" cap="flat" cmpd="sng" algn="ctr">
+                      <a:solidFill>
+                        <a:schemeClr val="tx1"/>
+                      </a:solidFill>
+                      <a:prstDash val="solid"/>
+                      <a:round/>
+                      <a:headEnd type="none" w="med" len="med"/>
+                      <a:tailEnd type="none" w="med" len="med"/>
+                    </a:lnR>
+                    <a:lnT w="12700" cap="flat" cmpd="sng" algn="ctr">
+                      <a:solidFill>
+                        <a:schemeClr val="tx1"/>
+                      </a:solidFill>
+                      <a:prstDash val="solid"/>
+                      <a:round/>
+                      <a:headEnd type="none" w="med" len="med"/>
+                      <a:tailEnd type="none" w="med" len="med"/>
+                    </a:lnT>
+                    <a:lnB w="12700" cap="flat" cmpd="sng" algn="ctr">
+                      <a:solidFill>
+                        <a:schemeClr val="tx1"/>
+                      </a:solidFill>
+                      <a:prstDash val="solid"/>
+                      <a:round/>
+                      <a:headEnd type="none" w="med" len="med"/>
+                      <a:tailEnd type="none" w="med" len="med"/>
+                    </a:lnB>
+                  </a:tcPr>
+                </a:tc>
+                <a:tc>
+                  <a:txBody>
+                    <a:bodyPr/>
+                    <a:lstStyle/>
+                    <a:p>
+                      <a:pPr algn="ctr"/>
+                      <a:r>
+                        <a:rPr lang="en-US" dirty="0"/>
+                        <a:t>Open Source</a:t>
+                      </a:r>
+                    </a:p>
+                  </a:txBody>
+                  <a:tcPr>
+                    <a:lnL w="12700" cap="flat" cmpd="sng" algn="ctr">
+                      <a:solidFill>
+                        <a:schemeClr val="tx1"/>
+                      </a:solidFill>
+                      <a:prstDash val="solid"/>
+                      <a:round/>
+                      <a:headEnd type="none" w="med" len="med"/>
+                      <a:tailEnd type="none" w="med" len="med"/>
+                    </a:lnL>
+                    <a:lnR w="12700" cap="flat" cmpd="sng" algn="ctr">
+                      <a:solidFill>
+                        <a:schemeClr val="tx1"/>
+                      </a:solidFill>
+                      <a:prstDash val="solid"/>
+                      <a:round/>
+                      <a:headEnd type="none" w="med" len="med"/>
+                      <a:tailEnd type="none" w="med" len="med"/>
+                    </a:lnR>
+                    <a:lnT w="12700" cap="flat" cmpd="sng" algn="ctr">
+                      <a:solidFill>
+                        <a:schemeClr val="tx1"/>
+                      </a:solidFill>
+                      <a:prstDash val="solid"/>
+                      <a:round/>
+                      <a:headEnd type="none" w="med" len="med"/>
+                      <a:tailEnd type="none" w="med" len="med"/>
+                    </a:lnT>
+                    <a:lnB w="12700" cap="flat" cmpd="sng" algn="ctr">
+                      <a:solidFill>
+                        <a:schemeClr val="tx1"/>
+                      </a:solidFill>
+                      <a:prstDash val="solid"/>
+                      <a:round/>
+                      <a:headEnd type="none" w="med" len="med"/>
+                      <a:tailEnd type="none" w="med" len="med"/>
+                    </a:lnB>
+                  </a:tcPr>
+                </a:tc>
+                <a:tc>
+                  <a:txBody>
+                    <a:bodyPr/>
+                    <a:lstStyle/>
+                    <a:p>
+                      <a:pPr algn="l"/>
+                      <a:r>
+                        <a:rPr lang="en-US" dirty="0"/>
+                        <a:t>The system will use only open-source or educational licenses for all libraries and frameworks.</a:t>
+                      </a:r>
+                    </a:p>
+                  </a:txBody>
+                  <a:tcPr>
+                    <a:lnL w="12700" cap="flat" cmpd="sng" algn="ctr">
+                      <a:solidFill>
+                        <a:schemeClr val="tx1"/>
+                      </a:solidFill>
+                      <a:prstDash val="solid"/>
+                      <a:round/>
+                      <a:headEnd type="none" w="med" len="med"/>
+                      <a:tailEnd type="none" w="med" len="med"/>
+                    </a:lnL>
+                    <a:lnR w="12700" cap="flat" cmpd="sng" algn="ctr">
+                      <a:solidFill>
+                        <a:schemeClr val="tx1"/>
+                      </a:solidFill>
+                      <a:prstDash val="solid"/>
+                      <a:round/>
+                      <a:headEnd type="none" w="med" len="med"/>
+                      <a:tailEnd type="none" w="med" len="med"/>
+                    </a:lnR>
+                    <a:lnT w="12700" cap="flat" cmpd="sng" algn="ctr">
+                      <a:solidFill>
+                        <a:schemeClr val="tx1"/>
+                      </a:solidFill>
+                      <a:prstDash val="solid"/>
+                      <a:round/>
+                      <a:headEnd type="none" w="med" len="med"/>
+                      <a:tailEnd type="none" w="med" len="med"/>
+                    </a:lnT>
+                    <a:lnB w="12700" cap="flat" cmpd="sng" algn="ctr">
+                      <a:solidFill>
+                        <a:schemeClr val="tx1"/>
+                      </a:solidFill>
+                      <a:prstDash val="solid"/>
+                      <a:round/>
+                      <a:headEnd type="none" w="med" len="med"/>
+                      <a:tailEnd type="none" w="med" len="med"/>
+                    </a:lnB>
+                  </a:tcPr>
+                </a:tc>
+                <a:tc>
+                  <a:txBody>
+                    <a:bodyPr/>
+                    <a:lstStyle/>
+                    <a:p>
+                      <a:pPr algn="ctr"/>
+                      <a:r>
+                        <a:rPr lang="en-US" dirty="0"/>
+                        <a:t>Medium</a:t>
+                      </a:r>
+                    </a:p>
+                  </a:txBody>
+                  <a:tcPr>
+                    <a:lnL w="12700" cap="flat" cmpd="sng" algn="ctr">
+                      <a:solidFill>
+                        <a:schemeClr val="tx1"/>
+                      </a:solidFill>
+                      <a:prstDash val="solid"/>
+                      <a:round/>
+                      <a:headEnd type="none" w="med" len="med"/>
+                      <a:tailEnd type="none" w="med" len="med"/>
+                    </a:lnL>
+                    <a:lnR w="12700" cap="flat" cmpd="sng" algn="ctr">
+                      <a:solidFill>
+                        <a:schemeClr val="tx1"/>
+                      </a:solidFill>
+                      <a:prstDash val="solid"/>
+                      <a:round/>
+                      <a:headEnd type="none" w="med" len="med"/>
+                      <a:tailEnd type="none" w="med" len="med"/>
+                    </a:lnR>
+                    <a:lnT w="12700" cap="flat" cmpd="sng" algn="ctr">
+                      <a:solidFill>
+                        <a:schemeClr val="tx1"/>
+                      </a:solidFill>
+                      <a:prstDash val="solid"/>
+                      <a:round/>
+                      <a:headEnd type="none" w="med" len="med"/>
+                      <a:tailEnd type="none" w="med" len="med"/>
+                    </a:lnT>
+                    <a:lnB w="12700" cap="flat" cmpd="sng" algn="ctr">
+                      <a:solidFill>
+                        <a:schemeClr val="tx1"/>
+                      </a:solidFill>
+                      <a:prstDash val="solid"/>
+                      <a:round/>
+                      <a:headEnd type="none" w="med" len="med"/>
+                      <a:tailEnd type="none" w="med" len="med"/>
+                    </a:lnB>
+                  </a:tcPr>
+                </a:tc>
+                <a:extLst>
+                  <a:ext uri="{0D108BD9-81ED-4DB2-BD59-A6C34878D82A}">
+                    <a16:rowId xmlns:a16="http://schemas.microsoft.com/office/drawing/2014/main" val="1946630327"/>
+                  </a:ext>
+                </a:extLst>
+              </a:tr>
+              <a:tr h="370840">
+                <a:tc>
+                  <a:txBody>
+                    <a:bodyPr/>
+                    <a:lstStyle/>
+                    <a:p>
+                      <a:pPr algn="ctr"/>
+                      <a:r>
+                        <a:rPr lang="en-US" dirty="0"/>
+                        <a:t>OR#5</a:t>
+                      </a:r>
+                    </a:p>
+                  </a:txBody>
+                  <a:tcPr>
+                    <a:lnL w="12700" cap="flat" cmpd="sng" algn="ctr">
+                      <a:solidFill>
+                        <a:schemeClr val="tx1"/>
+                      </a:solidFill>
+                      <a:prstDash val="solid"/>
+                      <a:round/>
+                      <a:headEnd type="none" w="med" len="med"/>
+                      <a:tailEnd type="none" w="med" len="med"/>
+                    </a:lnL>
+                    <a:lnR w="12700" cap="flat" cmpd="sng" algn="ctr">
+                      <a:solidFill>
+                        <a:schemeClr val="tx1"/>
+                      </a:solidFill>
+                      <a:prstDash val="solid"/>
+                      <a:round/>
+                      <a:headEnd type="none" w="med" len="med"/>
+                      <a:tailEnd type="none" w="med" len="med"/>
+                    </a:lnR>
+                    <a:lnT w="12700" cap="flat" cmpd="sng" algn="ctr">
+                      <a:solidFill>
+                        <a:schemeClr val="tx1"/>
+                      </a:solidFill>
+                      <a:prstDash val="solid"/>
+                      <a:round/>
+                      <a:headEnd type="none" w="med" len="med"/>
+                      <a:tailEnd type="none" w="med" len="med"/>
+                    </a:lnT>
+                    <a:lnB w="12700" cap="flat" cmpd="sng" algn="ctr">
+                      <a:solidFill>
+                        <a:schemeClr val="tx1"/>
+                      </a:solidFill>
+                      <a:prstDash val="solid"/>
+                      <a:round/>
+                      <a:headEnd type="none" w="med" len="med"/>
+                      <a:tailEnd type="none" w="med" len="med"/>
+                    </a:lnB>
+                  </a:tcPr>
+                </a:tc>
+                <a:tc>
+                  <a:txBody>
+                    <a:bodyPr/>
+                    <a:lstStyle/>
+                    <a:p>
+                      <a:pPr algn="ctr"/>
+                      <a:r>
+                        <a:rPr lang="en-US" dirty="0"/>
+                        <a:t>Post-Implementation Support</a:t>
+                      </a:r>
+                    </a:p>
+                  </a:txBody>
+                  <a:tcPr>
+                    <a:lnL w="12700" cap="flat" cmpd="sng" algn="ctr">
+                      <a:solidFill>
+                        <a:schemeClr val="tx1"/>
+                      </a:solidFill>
+                      <a:prstDash val="solid"/>
+                      <a:round/>
+                      <a:headEnd type="none" w="med" len="med"/>
+                      <a:tailEnd type="none" w="med" len="med"/>
+                    </a:lnL>
+                    <a:lnR w="12700" cap="flat" cmpd="sng" algn="ctr">
+                      <a:solidFill>
+                        <a:schemeClr val="tx1"/>
+                      </a:solidFill>
+                      <a:prstDash val="solid"/>
+                      <a:round/>
+                      <a:headEnd type="none" w="med" len="med"/>
+                      <a:tailEnd type="none" w="med" len="med"/>
+                    </a:lnR>
+                    <a:lnT w="12700" cap="flat" cmpd="sng" algn="ctr">
+                      <a:solidFill>
+                        <a:schemeClr val="tx1"/>
+                      </a:solidFill>
+                      <a:prstDash val="solid"/>
+                      <a:round/>
+                      <a:headEnd type="none" w="med" len="med"/>
+                      <a:tailEnd type="none" w="med" len="med"/>
+                    </a:lnT>
+                    <a:lnB w="12700" cap="flat" cmpd="sng" algn="ctr">
+                      <a:solidFill>
+                        <a:schemeClr val="tx1"/>
+                      </a:solidFill>
+                      <a:prstDash val="solid"/>
+                      <a:round/>
+                      <a:headEnd type="none" w="med" len="med"/>
+                      <a:tailEnd type="none" w="med" len="med"/>
+                    </a:lnB>
+                  </a:tcPr>
+                </a:tc>
+                <a:tc>
+                  <a:txBody>
+                    <a:bodyPr/>
+                    <a:lstStyle/>
+                    <a:p>
+                      <a:pPr algn="l"/>
+                      <a:r>
+                        <a:rPr lang="en-US" dirty="0"/>
+                        <a:t>The system will include a post-release maintenance plan following MVP delivery.</a:t>
+                      </a:r>
+                    </a:p>
+                  </a:txBody>
+                  <a:tcPr>
+                    <a:lnL w="12700" cap="flat" cmpd="sng" algn="ctr">
+                      <a:solidFill>
+                        <a:schemeClr val="tx1"/>
+                      </a:solidFill>
+                      <a:prstDash val="solid"/>
+                      <a:round/>
+                      <a:headEnd type="none" w="med" len="med"/>
+                      <a:tailEnd type="none" w="med" len="med"/>
+                    </a:lnL>
+                    <a:lnR w="12700" cap="flat" cmpd="sng" algn="ctr">
+                      <a:solidFill>
+                        <a:schemeClr val="tx1"/>
+                      </a:solidFill>
+                      <a:prstDash val="solid"/>
+                      <a:round/>
+                      <a:headEnd type="none" w="med" len="med"/>
+                      <a:tailEnd type="none" w="med" len="med"/>
+                    </a:lnR>
+                    <a:lnT w="12700" cap="flat" cmpd="sng" algn="ctr">
+                      <a:solidFill>
+                        <a:schemeClr val="tx1"/>
+                      </a:solidFill>
+                      <a:prstDash val="solid"/>
+                      <a:round/>
+                      <a:headEnd type="none" w="med" len="med"/>
+                      <a:tailEnd type="none" w="med" len="med"/>
+                    </a:lnT>
+                    <a:lnB w="12700" cap="flat" cmpd="sng" algn="ctr">
+                      <a:solidFill>
+                        <a:schemeClr val="tx1"/>
+                      </a:solidFill>
+                      <a:prstDash val="solid"/>
+                      <a:round/>
+                      <a:headEnd type="none" w="med" len="med"/>
+                      <a:tailEnd type="none" w="med" len="med"/>
+                    </a:lnB>
+                  </a:tcPr>
+                </a:tc>
+                <a:tc>
+                  <a:txBody>
+                    <a:bodyPr/>
+                    <a:lstStyle/>
+                    <a:p>
+                      <a:pPr algn="ctr"/>
+                      <a:r>
+                        <a:rPr lang="en-US" dirty="0"/>
+                        <a:t>Low</a:t>
+                      </a:r>
+                    </a:p>
+                  </a:txBody>
+                  <a:tcPr>
+                    <a:lnL w="12700" cap="flat" cmpd="sng" algn="ctr">
+                      <a:solidFill>
+                        <a:schemeClr val="tx1"/>
+                      </a:solidFill>
+                      <a:prstDash val="solid"/>
+                      <a:round/>
+                      <a:headEnd type="none" w="med" len="med"/>
+                      <a:tailEnd type="none" w="med" len="med"/>
+                    </a:lnL>
+                    <a:lnR w="12700" cap="flat" cmpd="sng" algn="ctr">
+                      <a:solidFill>
+                        <a:schemeClr val="tx1"/>
+                      </a:solidFill>
+                      <a:prstDash val="solid"/>
+                      <a:round/>
+                      <a:headEnd type="none" w="med" len="med"/>
+                      <a:tailEnd type="none" w="med" len="med"/>
+                    </a:lnR>
+                    <a:lnT w="12700" cap="flat" cmpd="sng" algn="ctr">
+                      <a:solidFill>
+                        <a:schemeClr val="tx1"/>
+                      </a:solidFill>
+                      <a:prstDash val="solid"/>
+                      <a:round/>
+                      <a:headEnd type="none" w="med" len="med"/>
+                      <a:tailEnd type="none" w="med" len="med"/>
+                    </a:lnT>
+                    <a:lnB w="12700" cap="flat" cmpd="sng" algn="ctr">
+                      <a:solidFill>
+                        <a:schemeClr val="tx1"/>
+                      </a:solidFill>
+                      <a:prstDash val="solid"/>
+                      <a:round/>
+                      <a:headEnd type="none" w="med" len="med"/>
+                      <a:tailEnd type="none" w="med" len="med"/>
+                    </a:lnB>
+                  </a:tcPr>
+                </a:tc>
+                <a:extLst>
+                  <a:ext uri="{0D108BD9-81ED-4DB2-BD59-A6C34878D82A}">
+                    <a16:rowId xmlns:a16="http://schemas.microsoft.com/office/drawing/2014/main" val="456398490"/>
+                  </a:ext>
+                </a:extLst>
+              </a:tr>
+            </a:tbl>
+          </a:graphicData>
+        </a:graphic>
+      </p:graphicFrame>
     </p:spTree>
     <p:extLst>
       <p:ext uri="{BB962C8B-B14F-4D97-AF65-F5344CB8AC3E}">
-        <p14:creationId xmlns:p14="http://schemas.microsoft.com/office/powerpoint/2010/main" val="2018098577"/>
-      </p:ext>
-    </p:extLst>
-  </p:cSld>
-  <p:clrMapOvr>
-    <a:masterClrMapping/>
-  </p:clrMapOvr>
-</p:sld>
-</file>
-
-<file path=ppt/slides/slide13.xml><?xml version="1.0" encoding="utf-8"?>
-<p:sld xmlns:a="http://schemas.openxmlformats.org/drawingml/2006/main" xmlns:r="http://schemas.openxmlformats.org/officeDocument/2006/relationships" xmlns:p="http://schemas.openxmlformats.org/presentationml/2006/main">
-  <p:cSld>
-    <p:spTree>
-      <p:nvGrpSpPr>
-        <p:cNvPr id="1" name="">
-          <a:extLst>
-            <a:ext uri="{FF2B5EF4-FFF2-40B4-BE49-F238E27FC236}">
-              <a16:creationId xmlns:a16="http://schemas.microsoft.com/office/drawing/2014/main" id="{C2D24A11-D06A-C1CA-15C1-CF4950357AE2}"/>
-            </a:ext>
-          </a:extLst>
-        </p:cNvPr>
-        <p:cNvGrpSpPr/>
-        <p:nvPr/>
-      </p:nvGrpSpPr>
-      <p:grpSpPr>
-        <a:xfrm>
-          <a:off x="0" y="0"/>
-          <a:ext cx="0" cy="0"/>
-          <a:chOff x="0" y="0"/>
-          <a:chExt cx="0" cy="0"/>
-        </a:xfrm>
-      </p:grpSpPr>
-      <p:sp>
-        <p:nvSpPr>
-          <p:cNvPr id="2" name="Title 1">
-            <a:extLst>
-              <a:ext uri="{FF2B5EF4-FFF2-40B4-BE49-F238E27FC236}">
-                <a16:creationId xmlns:a16="http://schemas.microsoft.com/office/drawing/2014/main" id="{B7DE63B3-AF50-6302-048B-9AE131B90500}"/>
-              </a:ext>
-            </a:extLst>
-          </p:cNvPr>
-          <p:cNvSpPr>
-            <a:spLocks noGrp="1"/>
-          </p:cNvSpPr>
-          <p:nvPr>
-            <p:ph type="title"/>
-          </p:nvPr>
-        </p:nvSpPr>
-        <p:spPr/>
-        <p:txBody>
-          <a:bodyPr/>
-          <a:lstStyle/>
-          <a:p>
-            <a:r>
-              <a:rPr lang="en-US" dirty="0"/>
-              <a:t>User stories</a:t>
-            </a:r>
-          </a:p>
-        </p:txBody>
-      </p:sp>
-      <p:pic>
-        <p:nvPicPr>
-          <p:cNvPr id="3" name="Picture 2" descr="A logo with a light bulb and text&#10;&#10;AI-generated content may be incorrect.">
-            <a:extLst>
-              <a:ext uri="{FF2B5EF4-FFF2-40B4-BE49-F238E27FC236}">
-                <a16:creationId xmlns:a16="http://schemas.microsoft.com/office/drawing/2014/main" id="{9AF740B4-CFF1-4ACB-0272-82E2BC257637}"/>
-              </a:ext>
-            </a:extLst>
-          </p:cNvPr>
-          <p:cNvPicPr>
-            <a:picLocks noChangeAspect="1"/>
-          </p:cNvPicPr>
-          <p:nvPr/>
-        </p:nvPicPr>
-        <p:blipFill>
-          <a:blip r:embed="rId3">
-            <a:extLst>
-              <a:ext uri="{28A0092B-C50C-407E-A947-70E740481C1C}">
-                <a14:useLocalDpi xmlns:a14="http://schemas.microsoft.com/office/drawing/2010/main" val="0"/>
-              </a:ext>
-            </a:extLst>
-          </a:blip>
-          <a:stretch>
-            <a:fillRect/>
-          </a:stretch>
-        </p:blipFill>
-        <p:spPr>
-          <a:xfrm>
-            <a:off x="11354417" y="0"/>
-            <a:ext cx="837583" cy="837583"/>
-          </a:xfrm>
-          <a:prstGeom prst="rect">
-            <a:avLst/>
-          </a:prstGeom>
-        </p:spPr>
-      </p:pic>
-    </p:spTree>
-    <p:extLst>
-      <p:ext uri="{BB962C8B-B14F-4D97-AF65-F5344CB8AC3E}">
-        <p14:creationId xmlns:p14="http://schemas.microsoft.com/office/powerpoint/2010/main" val="2082572573"/>
+        <p14:creationId xmlns:p14="http://schemas.microsoft.com/office/powerpoint/2010/main" val="2177611131"/>
       </p:ext>
     </p:extLst>
   </p:cSld>
@@ -8670,6 +11032,2039 @@
         <p:cNvPr id="1" name="">
           <a:extLst>
             <a:ext uri="{FF2B5EF4-FFF2-40B4-BE49-F238E27FC236}">
+              <a16:creationId xmlns:a16="http://schemas.microsoft.com/office/drawing/2014/main" id="{C2D24A11-D06A-C1CA-15C1-CF4950357AE2}"/>
+            </a:ext>
+          </a:extLst>
+        </p:cNvPr>
+        <p:cNvGrpSpPr/>
+        <p:nvPr/>
+      </p:nvGrpSpPr>
+      <p:grpSpPr>
+        <a:xfrm>
+          <a:off x="0" y="0"/>
+          <a:ext cx="0" cy="0"/>
+          <a:chOff x="0" y="0"/>
+          <a:chExt cx="0" cy="0"/>
+        </a:xfrm>
+      </p:grpSpPr>
+      <p:sp>
+        <p:nvSpPr>
+          <p:cNvPr id="2" name="Title 1">
+            <a:extLst>
+              <a:ext uri="{FF2B5EF4-FFF2-40B4-BE49-F238E27FC236}">
+                <a16:creationId xmlns:a16="http://schemas.microsoft.com/office/drawing/2014/main" id="{B7DE63B3-AF50-6302-048B-9AE131B90500}"/>
+              </a:ext>
+            </a:extLst>
+          </p:cNvPr>
+          <p:cNvSpPr>
+            <a:spLocks noGrp="1"/>
+          </p:cNvSpPr>
+          <p:nvPr>
+            <p:ph type="title"/>
+          </p:nvPr>
+        </p:nvSpPr>
+        <p:spPr/>
+        <p:txBody>
+          <a:bodyPr/>
+          <a:lstStyle/>
+          <a:p>
+            <a:r>
+              <a:rPr lang="en-US" dirty="0"/>
+              <a:t>User stories</a:t>
+            </a:r>
+          </a:p>
+        </p:txBody>
+      </p:sp>
+      <p:pic>
+        <p:nvPicPr>
+          <p:cNvPr id="3" name="Picture 2" descr="A logo with a light bulb and text&#10;&#10;AI-generated content may be incorrect.">
+            <a:extLst>
+              <a:ext uri="{FF2B5EF4-FFF2-40B4-BE49-F238E27FC236}">
+                <a16:creationId xmlns:a16="http://schemas.microsoft.com/office/drawing/2014/main" id="{9AF740B4-CFF1-4ACB-0272-82E2BC257637}"/>
+              </a:ext>
+            </a:extLst>
+          </p:cNvPr>
+          <p:cNvPicPr>
+            <a:picLocks noChangeAspect="1"/>
+          </p:cNvPicPr>
+          <p:nvPr/>
+        </p:nvPicPr>
+        <p:blipFill>
+          <a:blip r:embed="rId3">
+            <a:extLst>
+              <a:ext uri="{28A0092B-C50C-407E-A947-70E740481C1C}">
+                <a14:useLocalDpi xmlns:a14="http://schemas.microsoft.com/office/drawing/2010/main" val="0"/>
+              </a:ext>
+            </a:extLst>
+          </a:blip>
+          <a:stretch>
+            <a:fillRect/>
+          </a:stretch>
+        </p:blipFill>
+        <p:spPr>
+          <a:xfrm>
+            <a:off x="11354417" y="0"/>
+            <a:ext cx="837583" cy="837583"/>
+          </a:xfrm>
+          <a:prstGeom prst="rect">
+            <a:avLst/>
+          </a:prstGeom>
+        </p:spPr>
+      </p:pic>
+      <p:graphicFrame>
+        <p:nvGraphicFramePr>
+          <p:cNvPr id="5" name="Table 4">
+            <a:extLst>
+              <a:ext uri="{FF2B5EF4-FFF2-40B4-BE49-F238E27FC236}">
+                <a16:creationId xmlns:a16="http://schemas.microsoft.com/office/drawing/2014/main" id="{541D3C45-1621-9D71-4A6A-0EE50550F122}"/>
+              </a:ext>
+            </a:extLst>
+          </p:cNvPr>
+          <p:cNvGraphicFramePr>
+            <a:graphicFrameLocks noGrp="1"/>
+          </p:cNvGraphicFramePr>
+          <p:nvPr>
+            <p:extLst>
+              <p:ext uri="{D42A27DB-BD31-4B8C-83A1-F6EECF244321}">
+                <p14:modId xmlns:p14="http://schemas.microsoft.com/office/powerpoint/2010/main" val="1579880755"/>
+              </p:ext>
+            </p:extLst>
+          </p:nvPr>
+        </p:nvGraphicFramePr>
+        <p:xfrm>
+          <a:off x="1058530" y="2104127"/>
+          <a:ext cx="10135899" cy="3608776"/>
+        </p:xfrm>
+        <a:graphic>
+          <a:graphicData uri="http://schemas.openxmlformats.org/drawingml/2006/table">
+            <a:tbl>
+              <a:tblPr firstRow="1" firstCol="1" bandRow="1">
+                <a:tableStyleId>{5C22544A-7EE6-4342-B048-85BDC9FD1C3A}</a:tableStyleId>
+              </a:tblPr>
+              <a:tblGrid>
+                <a:gridCol w="710921">
+                  <a:extLst>
+                    <a:ext uri="{9D8B030D-6E8A-4147-A177-3AD203B41FA5}">
+                      <a16:colId xmlns:a16="http://schemas.microsoft.com/office/drawing/2014/main" val="1057534138"/>
+                    </a:ext>
+                  </a:extLst>
+                </a:gridCol>
+                <a:gridCol w="556066">
+                  <a:extLst>
+                    <a:ext uri="{9D8B030D-6E8A-4147-A177-3AD203B41FA5}">
+                      <a16:colId xmlns:a16="http://schemas.microsoft.com/office/drawing/2014/main" val="3881658530"/>
+                    </a:ext>
+                  </a:extLst>
+                </a:gridCol>
+                <a:gridCol w="904990">
+                  <a:extLst>
+                    <a:ext uri="{9D8B030D-6E8A-4147-A177-3AD203B41FA5}">
+                      <a16:colId xmlns:a16="http://schemas.microsoft.com/office/drawing/2014/main" val="1483644850"/>
+                    </a:ext>
+                  </a:extLst>
+                </a:gridCol>
+                <a:gridCol w="1085989">
+                  <a:extLst>
+                    <a:ext uri="{9D8B030D-6E8A-4147-A177-3AD203B41FA5}">
+                      <a16:colId xmlns:a16="http://schemas.microsoft.com/office/drawing/2014/main" val="4216286490"/>
+                    </a:ext>
+                  </a:extLst>
+                </a:gridCol>
+                <a:gridCol w="2986470">
+                  <a:extLst>
+                    <a:ext uri="{9D8B030D-6E8A-4147-A177-3AD203B41FA5}">
+                      <a16:colId xmlns:a16="http://schemas.microsoft.com/office/drawing/2014/main" val="2309101086"/>
+                    </a:ext>
+                  </a:extLst>
+                </a:gridCol>
+                <a:gridCol w="1204644">
+                  <a:extLst>
+                    <a:ext uri="{9D8B030D-6E8A-4147-A177-3AD203B41FA5}">
+                      <a16:colId xmlns:a16="http://schemas.microsoft.com/office/drawing/2014/main" val="2735014902"/>
+                    </a:ext>
+                  </a:extLst>
+                </a:gridCol>
+                <a:gridCol w="2686819">
+                  <a:extLst>
+                    <a:ext uri="{9D8B030D-6E8A-4147-A177-3AD203B41FA5}">
+                      <a16:colId xmlns:a16="http://schemas.microsoft.com/office/drawing/2014/main" val="2037717768"/>
+                    </a:ext>
+                  </a:extLst>
+                </a:gridCol>
+              </a:tblGrid>
+              <a:tr h="565310">
+                <a:tc>
+                  <a:txBody>
+                    <a:bodyPr/>
+                    <a:lstStyle/>
+                    <a:p>
+                      <a:pPr marL="0" marR="0" indent="0" algn="ctr">
+                        <a:lnSpc>
+                          <a:spcPct val="115000"/>
+                        </a:lnSpc>
+                        <a:buFont typeface="Arial" panose="020B0604020202020204" pitchFamily="34" charset="0"/>
+                        <a:buNone/>
+                      </a:pPr>
+                      <a:r>
+                        <a:rPr lang="en-US" sz="1400" dirty="0">
+                          <a:effectLst/>
+                        </a:rPr>
+                        <a:t>ID</a:t>
+                      </a:r>
+                      <a:endParaRPr lang="en-US" sz="1400" dirty="0">
+                        <a:effectLst/>
+                        <a:latin typeface="Times" panose="02020603050405020304" pitchFamily="18" charset="0"/>
+                        <a:ea typeface="Times New Roman" panose="02020603050405020304" pitchFamily="18" charset="0"/>
+                        <a:cs typeface="Times New Roman" panose="02020603050405020304" pitchFamily="18" charset="0"/>
+                      </a:endParaRPr>
+                    </a:p>
+                  </a:txBody>
+                  <a:tcPr marL="68580" marR="68580" marT="0" marB="0" anchor="ctr">
+                    <a:lnL w="12700" cap="flat" cmpd="sng" algn="ctr">
+                      <a:solidFill>
+                        <a:schemeClr val="tx1"/>
+                      </a:solidFill>
+                      <a:prstDash val="solid"/>
+                      <a:round/>
+                      <a:headEnd type="none" w="med" len="med"/>
+                      <a:tailEnd type="none" w="med" len="med"/>
+                    </a:lnL>
+                    <a:lnR w="12700" cap="flat" cmpd="sng" algn="ctr">
+                      <a:solidFill>
+                        <a:schemeClr val="tx1"/>
+                      </a:solidFill>
+                      <a:prstDash val="solid"/>
+                      <a:round/>
+                      <a:headEnd type="none" w="med" len="med"/>
+                      <a:tailEnd type="none" w="med" len="med"/>
+                    </a:lnR>
+                    <a:lnT w="12700" cap="flat" cmpd="sng" algn="ctr">
+                      <a:solidFill>
+                        <a:schemeClr val="tx1"/>
+                      </a:solidFill>
+                      <a:prstDash val="solid"/>
+                      <a:round/>
+                      <a:headEnd type="none" w="med" len="med"/>
+                      <a:tailEnd type="none" w="med" len="med"/>
+                    </a:lnT>
+                    <a:lnB w="12700" cap="flat" cmpd="sng" algn="ctr">
+                      <a:solidFill>
+                        <a:schemeClr val="tx1"/>
+                      </a:solidFill>
+                      <a:prstDash val="solid"/>
+                      <a:round/>
+                      <a:headEnd type="none" w="med" len="med"/>
+                      <a:tailEnd type="none" w="med" len="med"/>
+                    </a:lnB>
+                  </a:tcPr>
+                </a:tc>
+                <a:tc>
+                  <a:txBody>
+                    <a:bodyPr/>
+                    <a:lstStyle/>
+                    <a:p>
+                      <a:pPr marL="0" marR="0" indent="0" algn="ctr">
+                        <a:lnSpc>
+                          <a:spcPct val="115000"/>
+                        </a:lnSpc>
+                        <a:buFont typeface="Arial" panose="020B0604020202020204" pitchFamily="34" charset="0"/>
+                        <a:buNone/>
+                      </a:pPr>
+                      <a:r>
+                        <a:rPr lang="en-US" sz="1400">
+                          <a:effectLst/>
+                        </a:rPr>
+                        <a:t> </a:t>
+                      </a:r>
+                      <a:endParaRPr lang="en-US" sz="1400">
+                        <a:effectLst/>
+                        <a:latin typeface="Times" panose="02020603050405020304" pitchFamily="18" charset="0"/>
+                        <a:ea typeface="Times New Roman" panose="02020603050405020304" pitchFamily="18" charset="0"/>
+                        <a:cs typeface="Times New Roman" panose="02020603050405020304" pitchFamily="18" charset="0"/>
+                      </a:endParaRPr>
+                    </a:p>
+                  </a:txBody>
+                  <a:tcPr marL="68580" marR="68580" marT="0" marB="0" anchor="ctr">
+                    <a:lnL w="12700" cap="flat" cmpd="sng" algn="ctr">
+                      <a:solidFill>
+                        <a:schemeClr val="tx1"/>
+                      </a:solidFill>
+                      <a:prstDash val="solid"/>
+                      <a:round/>
+                      <a:headEnd type="none" w="med" len="med"/>
+                      <a:tailEnd type="none" w="med" len="med"/>
+                    </a:lnL>
+                    <a:lnR w="12700" cap="flat" cmpd="sng" algn="ctr">
+                      <a:solidFill>
+                        <a:schemeClr val="tx1"/>
+                      </a:solidFill>
+                      <a:prstDash val="solid"/>
+                      <a:round/>
+                      <a:headEnd type="none" w="med" len="med"/>
+                      <a:tailEnd type="none" w="med" len="med"/>
+                    </a:lnR>
+                    <a:lnT w="12700" cap="flat" cmpd="sng" algn="ctr">
+                      <a:solidFill>
+                        <a:schemeClr val="tx1"/>
+                      </a:solidFill>
+                      <a:prstDash val="solid"/>
+                      <a:round/>
+                      <a:headEnd type="none" w="med" len="med"/>
+                      <a:tailEnd type="none" w="med" len="med"/>
+                    </a:lnT>
+                    <a:lnB w="12700" cap="flat" cmpd="sng" algn="ctr">
+                      <a:solidFill>
+                        <a:schemeClr val="tx1"/>
+                      </a:solidFill>
+                      <a:prstDash val="solid"/>
+                      <a:round/>
+                      <a:headEnd type="none" w="med" len="med"/>
+                      <a:tailEnd type="none" w="med" len="med"/>
+                    </a:lnB>
+                  </a:tcPr>
+                </a:tc>
+                <a:tc>
+                  <a:txBody>
+                    <a:bodyPr/>
+                    <a:lstStyle/>
+                    <a:p>
+                      <a:pPr marL="0" marR="0" indent="0" algn="ctr">
+                        <a:lnSpc>
+                          <a:spcPct val="115000"/>
+                        </a:lnSpc>
+                        <a:buFont typeface="Arial" panose="020B0604020202020204" pitchFamily="34" charset="0"/>
+                        <a:buNone/>
+                      </a:pPr>
+                      <a:r>
+                        <a:rPr lang="en-US" sz="1400">
+                          <a:effectLst/>
+                        </a:rPr>
+                        <a:t>ROLE</a:t>
+                      </a:r>
+                      <a:endParaRPr lang="en-US" sz="1400">
+                        <a:effectLst/>
+                        <a:latin typeface="Times" panose="02020603050405020304" pitchFamily="18" charset="0"/>
+                        <a:ea typeface="Times New Roman" panose="02020603050405020304" pitchFamily="18" charset="0"/>
+                        <a:cs typeface="Times New Roman" panose="02020603050405020304" pitchFamily="18" charset="0"/>
+                      </a:endParaRPr>
+                    </a:p>
+                  </a:txBody>
+                  <a:tcPr marL="68580" marR="68580" marT="0" marB="0" anchor="ctr">
+                    <a:lnL w="12700" cap="flat" cmpd="sng" algn="ctr">
+                      <a:solidFill>
+                        <a:schemeClr val="tx1"/>
+                      </a:solidFill>
+                      <a:prstDash val="solid"/>
+                      <a:round/>
+                      <a:headEnd type="none" w="med" len="med"/>
+                      <a:tailEnd type="none" w="med" len="med"/>
+                    </a:lnL>
+                    <a:lnR w="12700" cap="flat" cmpd="sng" algn="ctr">
+                      <a:solidFill>
+                        <a:schemeClr val="tx1"/>
+                      </a:solidFill>
+                      <a:prstDash val="solid"/>
+                      <a:round/>
+                      <a:headEnd type="none" w="med" len="med"/>
+                      <a:tailEnd type="none" w="med" len="med"/>
+                    </a:lnR>
+                    <a:lnT w="12700" cap="flat" cmpd="sng" algn="ctr">
+                      <a:solidFill>
+                        <a:schemeClr val="tx1"/>
+                      </a:solidFill>
+                      <a:prstDash val="solid"/>
+                      <a:round/>
+                      <a:headEnd type="none" w="med" len="med"/>
+                      <a:tailEnd type="none" w="med" len="med"/>
+                    </a:lnT>
+                    <a:lnB w="12700" cap="flat" cmpd="sng" algn="ctr">
+                      <a:solidFill>
+                        <a:schemeClr val="tx1"/>
+                      </a:solidFill>
+                      <a:prstDash val="solid"/>
+                      <a:round/>
+                      <a:headEnd type="none" w="med" len="med"/>
+                      <a:tailEnd type="none" w="med" len="med"/>
+                    </a:lnB>
+                  </a:tcPr>
+                </a:tc>
+                <a:tc>
+                  <a:txBody>
+                    <a:bodyPr/>
+                    <a:lstStyle/>
+                    <a:p>
+                      <a:pPr marL="0" marR="0" indent="0" algn="ctr">
+                        <a:lnSpc>
+                          <a:spcPct val="115000"/>
+                        </a:lnSpc>
+                        <a:buFont typeface="Arial" panose="020B0604020202020204" pitchFamily="34" charset="0"/>
+                        <a:buNone/>
+                      </a:pPr>
+                      <a:r>
+                        <a:rPr lang="en-US" sz="1400">
+                          <a:effectLst/>
+                        </a:rPr>
+                        <a:t> </a:t>
+                      </a:r>
+                      <a:endParaRPr lang="en-US" sz="1400">
+                        <a:effectLst/>
+                        <a:latin typeface="Times" panose="02020603050405020304" pitchFamily="18" charset="0"/>
+                        <a:ea typeface="Times New Roman" panose="02020603050405020304" pitchFamily="18" charset="0"/>
+                        <a:cs typeface="Times New Roman" panose="02020603050405020304" pitchFamily="18" charset="0"/>
+                      </a:endParaRPr>
+                    </a:p>
+                  </a:txBody>
+                  <a:tcPr marL="68580" marR="68580" marT="0" marB="0" anchor="ctr">
+                    <a:lnL w="12700" cap="flat" cmpd="sng" algn="ctr">
+                      <a:solidFill>
+                        <a:schemeClr val="tx1"/>
+                      </a:solidFill>
+                      <a:prstDash val="solid"/>
+                      <a:round/>
+                      <a:headEnd type="none" w="med" len="med"/>
+                      <a:tailEnd type="none" w="med" len="med"/>
+                    </a:lnL>
+                    <a:lnR w="12700" cap="flat" cmpd="sng" algn="ctr">
+                      <a:solidFill>
+                        <a:schemeClr val="tx1"/>
+                      </a:solidFill>
+                      <a:prstDash val="solid"/>
+                      <a:round/>
+                      <a:headEnd type="none" w="med" len="med"/>
+                      <a:tailEnd type="none" w="med" len="med"/>
+                    </a:lnR>
+                    <a:lnT w="12700" cap="flat" cmpd="sng" algn="ctr">
+                      <a:solidFill>
+                        <a:schemeClr val="tx1"/>
+                      </a:solidFill>
+                      <a:prstDash val="solid"/>
+                      <a:round/>
+                      <a:headEnd type="none" w="med" len="med"/>
+                      <a:tailEnd type="none" w="med" len="med"/>
+                    </a:lnT>
+                    <a:lnB w="12700" cap="flat" cmpd="sng" algn="ctr">
+                      <a:solidFill>
+                        <a:schemeClr val="tx1"/>
+                      </a:solidFill>
+                      <a:prstDash val="solid"/>
+                      <a:round/>
+                      <a:headEnd type="none" w="med" len="med"/>
+                      <a:tailEnd type="none" w="med" len="med"/>
+                    </a:lnB>
+                  </a:tcPr>
+                </a:tc>
+                <a:tc>
+                  <a:txBody>
+                    <a:bodyPr/>
+                    <a:lstStyle/>
+                    <a:p>
+                      <a:pPr marL="0" marR="0" indent="0" algn="ctr">
+                        <a:lnSpc>
+                          <a:spcPct val="115000"/>
+                        </a:lnSpc>
+                        <a:buFont typeface="Arial" panose="020B0604020202020204" pitchFamily="34" charset="0"/>
+                        <a:buNone/>
+                      </a:pPr>
+                      <a:r>
+                        <a:rPr lang="en-US" sz="1400">
+                          <a:effectLst/>
+                        </a:rPr>
+                        <a:t>FUNCTION PERFORMED</a:t>
+                      </a:r>
+                      <a:endParaRPr lang="en-US" sz="1400">
+                        <a:effectLst/>
+                        <a:latin typeface="Times" panose="02020603050405020304" pitchFamily="18" charset="0"/>
+                        <a:ea typeface="Times New Roman" panose="02020603050405020304" pitchFamily="18" charset="0"/>
+                        <a:cs typeface="Times New Roman" panose="02020603050405020304" pitchFamily="18" charset="0"/>
+                      </a:endParaRPr>
+                    </a:p>
+                  </a:txBody>
+                  <a:tcPr marL="68580" marR="68580" marT="0" marB="0" anchor="ctr">
+                    <a:lnL w="12700" cap="flat" cmpd="sng" algn="ctr">
+                      <a:solidFill>
+                        <a:schemeClr val="tx1"/>
+                      </a:solidFill>
+                      <a:prstDash val="solid"/>
+                      <a:round/>
+                      <a:headEnd type="none" w="med" len="med"/>
+                      <a:tailEnd type="none" w="med" len="med"/>
+                    </a:lnL>
+                    <a:lnR w="12700" cap="flat" cmpd="sng" algn="ctr">
+                      <a:solidFill>
+                        <a:schemeClr val="tx1"/>
+                      </a:solidFill>
+                      <a:prstDash val="solid"/>
+                      <a:round/>
+                      <a:headEnd type="none" w="med" len="med"/>
+                      <a:tailEnd type="none" w="med" len="med"/>
+                    </a:lnR>
+                    <a:lnT w="12700" cap="flat" cmpd="sng" algn="ctr">
+                      <a:solidFill>
+                        <a:schemeClr val="tx1"/>
+                      </a:solidFill>
+                      <a:prstDash val="solid"/>
+                      <a:round/>
+                      <a:headEnd type="none" w="med" len="med"/>
+                      <a:tailEnd type="none" w="med" len="med"/>
+                    </a:lnT>
+                    <a:lnB w="12700" cap="flat" cmpd="sng" algn="ctr">
+                      <a:solidFill>
+                        <a:schemeClr val="tx1"/>
+                      </a:solidFill>
+                      <a:prstDash val="solid"/>
+                      <a:round/>
+                      <a:headEnd type="none" w="med" len="med"/>
+                      <a:tailEnd type="none" w="med" len="med"/>
+                    </a:lnB>
+                  </a:tcPr>
+                </a:tc>
+                <a:tc>
+                  <a:txBody>
+                    <a:bodyPr/>
+                    <a:lstStyle/>
+                    <a:p>
+                      <a:pPr marL="0" marR="0" indent="0" algn="ctr">
+                        <a:lnSpc>
+                          <a:spcPct val="115000"/>
+                        </a:lnSpc>
+                        <a:buFont typeface="Arial" panose="020B0604020202020204" pitchFamily="34" charset="0"/>
+                        <a:buNone/>
+                      </a:pPr>
+                      <a:r>
+                        <a:rPr lang="en-US" sz="1400" dirty="0">
+                          <a:effectLst/>
+                        </a:rPr>
+                        <a:t> </a:t>
+                      </a:r>
+                      <a:endParaRPr lang="en-US" sz="1400" dirty="0">
+                        <a:effectLst/>
+                        <a:latin typeface="Times" panose="02020603050405020304" pitchFamily="18" charset="0"/>
+                        <a:ea typeface="Times New Roman" panose="02020603050405020304" pitchFamily="18" charset="0"/>
+                        <a:cs typeface="Times New Roman" panose="02020603050405020304" pitchFamily="18" charset="0"/>
+                      </a:endParaRPr>
+                    </a:p>
+                  </a:txBody>
+                  <a:tcPr marL="68580" marR="68580" marT="0" marB="0" anchor="ctr">
+                    <a:lnL w="12700" cap="flat" cmpd="sng" algn="ctr">
+                      <a:solidFill>
+                        <a:schemeClr val="tx1"/>
+                      </a:solidFill>
+                      <a:prstDash val="solid"/>
+                      <a:round/>
+                      <a:headEnd type="none" w="med" len="med"/>
+                      <a:tailEnd type="none" w="med" len="med"/>
+                    </a:lnL>
+                    <a:lnR w="12700" cap="flat" cmpd="sng" algn="ctr">
+                      <a:solidFill>
+                        <a:schemeClr val="tx1"/>
+                      </a:solidFill>
+                      <a:prstDash val="solid"/>
+                      <a:round/>
+                      <a:headEnd type="none" w="med" len="med"/>
+                      <a:tailEnd type="none" w="med" len="med"/>
+                    </a:lnR>
+                    <a:lnT w="12700" cap="flat" cmpd="sng" algn="ctr">
+                      <a:solidFill>
+                        <a:schemeClr val="tx1"/>
+                      </a:solidFill>
+                      <a:prstDash val="solid"/>
+                      <a:round/>
+                      <a:headEnd type="none" w="med" len="med"/>
+                      <a:tailEnd type="none" w="med" len="med"/>
+                    </a:lnT>
+                    <a:lnB w="12700" cap="flat" cmpd="sng" algn="ctr">
+                      <a:solidFill>
+                        <a:schemeClr val="tx1"/>
+                      </a:solidFill>
+                      <a:prstDash val="solid"/>
+                      <a:round/>
+                      <a:headEnd type="none" w="med" len="med"/>
+                      <a:tailEnd type="none" w="med" len="med"/>
+                    </a:lnB>
+                  </a:tcPr>
+                </a:tc>
+                <a:tc>
+                  <a:txBody>
+                    <a:bodyPr/>
+                    <a:lstStyle/>
+                    <a:p>
+                      <a:pPr marL="0" marR="0" indent="0" algn="ctr">
+                        <a:lnSpc>
+                          <a:spcPct val="115000"/>
+                        </a:lnSpc>
+                        <a:buFont typeface="Arial" panose="020B0604020202020204" pitchFamily="34" charset="0"/>
+                        <a:buNone/>
+                      </a:pPr>
+                      <a:r>
+                        <a:rPr lang="en-US" sz="1400">
+                          <a:effectLst/>
+                        </a:rPr>
+                        <a:t>BUSINESS REASON</a:t>
+                      </a:r>
+                      <a:endParaRPr lang="en-US" sz="1400">
+                        <a:effectLst/>
+                        <a:latin typeface="Times" panose="02020603050405020304" pitchFamily="18" charset="0"/>
+                        <a:ea typeface="Times New Roman" panose="02020603050405020304" pitchFamily="18" charset="0"/>
+                        <a:cs typeface="Times New Roman" panose="02020603050405020304" pitchFamily="18" charset="0"/>
+                      </a:endParaRPr>
+                    </a:p>
+                  </a:txBody>
+                  <a:tcPr marL="68580" marR="68580" marT="0" marB="0" anchor="ctr">
+                    <a:lnL w="12700" cap="flat" cmpd="sng" algn="ctr">
+                      <a:solidFill>
+                        <a:schemeClr val="tx1"/>
+                      </a:solidFill>
+                      <a:prstDash val="solid"/>
+                      <a:round/>
+                      <a:headEnd type="none" w="med" len="med"/>
+                      <a:tailEnd type="none" w="med" len="med"/>
+                    </a:lnL>
+                    <a:lnR w="12700" cap="flat" cmpd="sng" algn="ctr">
+                      <a:solidFill>
+                        <a:schemeClr val="tx1"/>
+                      </a:solidFill>
+                      <a:prstDash val="solid"/>
+                      <a:round/>
+                      <a:headEnd type="none" w="med" len="med"/>
+                      <a:tailEnd type="none" w="med" len="med"/>
+                    </a:lnR>
+                    <a:lnT w="12700" cap="flat" cmpd="sng" algn="ctr">
+                      <a:solidFill>
+                        <a:schemeClr val="tx1"/>
+                      </a:solidFill>
+                      <a:prstDash val="solid"/>
+                      <a:round/>
+                      <a:headEnd type="none" w="med" len="med"/>
+                      <a:tailEnd type="none" w="med" len="med"/>
+                    </a:lnT>
+                    <a:lnB w="12700" cap="flat" cmpd="sng" algn="ctr">
+                      <a:solidFill>
+                        <a:schemeClr val="tx1"/>
+                      </a:solidFill>
+                      <a:prstDash val="solid"/>
+                      <a:round/>
+                      <a:headEnd type="none" w="med" len="med"/>
+                      <a:tailEnd type="none" w="med" len="med"/>
+                    </a:lnB>
+                  </a:tcPr>
+                </a:tc>
+                <a:extLst>
+                  <a:ext uri="{0D108BD9-81ED-4DB2-BD59-A6C34878D82A}">
+                    <a16:rowId xmlns:a16="http://schemas.microsoft.com/office/drawing/2014/main" val="2586622030"/>
+                  </a:ext>
+                </a:extLst>
+              </a:tr>
+              <a:tr h="1335331">
+                <a:tc>
+                  <a:txBody>
+                    <a:bodyPr/>
+                    <a:lstStyle/>
+                    <a:p>
+                      <a:pPr marL="0" marR="0" indent="0">
+                        <a:lnSpc>
+                          <a:spcPct val="115000"/>
+                        </a:lnSpc>
+                        <a:buFont typeface="Arial" panose="020B0604020202020204" pitchFamily="34" charset="0"/>
+                        <a:buNone/>
+                      </a:pPr>
+                      <a:r>
+                        <a:rPr lang="en-US" sz="1400">
+                          <a:effectLst/>
+                        </a:rPr>
+                        <a:t>US#1</a:t>
+                      </a:r>
+                      <a:endParaRPr lang="en-US" sz="1400">
+                        <a:effectLst/>
+                        <a:latin typeface="Times" panose="02020603050405020304" pitchFamily="18" charset="0"/>
+                        <a:ea typeface="Times New Roman" panose="02020603050405020304" pitchFamily="18" charset="0"/>
+                        <a:cs typeface="Times New Roman" panose="02020603050405020304" pitchFamily="18" charset="0"/>
+                      </a:endParaRPr>
+                    </a:p>
+                  </a:txBody>
+                  <a:tcPr marL="68580" marR="68580" marT="0" marB="0" anchor="ctr">
+                    <a:lnL w="12700" cap="flat" cmpd="sng" algn="ctr">
+                      <a:solidFill>
+                        <a:schemeClr val="tx1"/>
+                      </a:solidFill>
+                      <a:prstDash val="solid"/>
+                      <a:round/>
+                      <a:headEnd type="none" w="med" len="med"/>
+                      <a:tailEnd type="none" w="med" len="med"/>
+                    </a:lnL>
+                    <a:lnR w="12700" cap="flat" cmpd="sng" algn="ctr">
+                      <a:solidFill>
+                        <a:schemeClr val="tx1"/>
+                      </a:solidFill>
+                      <a:prstDash val="solid"/>
+                      <a:round/>
+                      <a:headEnd type="none" w="med" len="med"/>
+                      <a:tailEnd type="none" w="med" len="med"/>
+                    </a:lnR>
+                    <a:lnT w="12700" cap="flat" cmpd="sng" algn="ctr">
+                      <a:solidFill>
+                        <a:schemeClr val="tx1"/>
+                      </a:solidFill>
+                      <a:prstDash val="solid"/>
+                      <a:round/>
+                      <a:headEnd type="none" w="med" len="med"/>
+                      <a:tailEnd type="none" w="med" len="med"/>
+                    </a:lnT>
+                    <a:lnB w="12700" cap="flat" cmpd="sng" algn="ctr">
+                      <a:solidFill>
+                        <a:schemeClr val="tx1"/>
+                      </a:solidFill>
+                      <a:prstDash val="solid"/>
+                      <a:round/>
+                      <a:headEnd type="none" w="med" len="med"/>
+                      <a:tailEnd type="none" w="med" len="med"/>
+                    </a:lnB>
+                  </a:tcPr>
+                </a:tc>
+                <a:tc>
+                  <a:txBody>
+                    <a:bodyPr/>
+                    <a:lstStyle/>
+                    <a:p>
+                      <a:pPr marL="0" marR="0" indent="0" algn="ctr">
+                        <a:lnSpc>
+                          <a:spcPct val="115000"/>
+                        </a:lnSpc>
+                        <a:buFont typeface="Arial" panose="020B0604020202020204" pitchFamily="34" charset="0"/>
+                        <a:buNone/>
+                      </a:pPr>
+                      <a:r>
+                        <a:rPr lang="en-US" sz="1400">
+                          <a:effectLst/>
+                        </a:rPr>
+                        <a:t>As a</a:t>
+                      </a:r>
+                      <a:endParaRPr lang="en-US" sz="1400">
+                        <a:effectLst/>
+                        <a:latin typeface="Times" panose="02020603050405020304" pitchFamily="18" charset="0"/>
+                        <a:ea typeface="Times New Roman" panose="02020603050405020304" pitchFamily="18" charset="0"/>
+                        <a:cs typeface="Times New Roman" panose="02020603050405020304" pitchFamily="18" charset="0"/>
+                      </a:endParaRPr>
+                    </a:p>
+                  </a:txBody>
+                  <a:tcPr marL="68580" marR="68580" marT="0" marB="0" anchor="ctr">
+                    <a:lnL w="12700" cap="flat" cmpd="sng" algn="ctr">
+                      <a:solidFill>
+                        <a:schemeClr val="tx1"/>
+                      </a:solidFill>
+                      <a:prstDash val="solid"/>
+                      <a:round/>
+                      <a:headEnd type="none" w="med" len="med"/>
+                      <a:tailEnd type="none" w="med" len="med"/>
+                    </a:lnL>
+                    <a:lnR w="12700" cap="flat" cmpd="sng" algn="ctr">
+                      <a:solidFill>
+                        <a:schemeClr val="tx1"/>
+                      </a:solidFill>
+                      <a:prstDash val="solid"/>
+                      <a:round/>
+                      <a:headEnd type="none" w="med" len="med"/>
+                      <a:tailEnd type="none" w="med" len="med"/>
+                    </a:lnR>
+                    <a:lnT w="12700" cap="flat" cmpd="sng" algn="ctr">
+                      <a:solidFill>
+                        <a:schemeClr val="tx1"/>
+                      </a:solidFill>
+                      <a:prstDash val="solid"/>
+                      <a:round/>
+                      <a:headEnd type="none" w="med" len="med"/>
+                      <a:tailEnd type="none" w="med" len="med"/>
+                    </a:lnT>
+                    <a:lnB w="12700" cap="flat" cmpd="sng" algn="ctr">
+                      <a:solidFill>
+                        <a:schemeClr val="tx1"/>
+                      </a:solidFill>
+                      <a:prstDash val="solid"/>
+                      <a:round/>
+                      <a:headEnd type="none" w="med" len="med"/>
+                      <a:tailEnd type="none" w="med" len="med"/>
+                    </a:lnB>
+                  </a:tcPr>
+                </a:tc>
+                <a:tc>
+                  <a:txBody>
+                    <a:bodyPr/>
+                    <a:lstStyle/>
+                    <a:p>
+                      <a:pPr marL="0" marR="0" indent="0" algn="ctr">
+                        <a:lnSpc>
+                          <a:spcPct val="115000"/>
+                        </a:lnSpc>
+                        <a:buFont typeface="Arial" panose="020B0604020202020204" pitchFamily="34" charset="0"/>
+                        <a:buNone/>
+                      </a:pPr>
+                      <a:r>
+                        <a:rPr lang="en-US" sz="1400">
+                          <a:effectLst/>
+                        </a:rPr>
+                        <a:t>Student</a:t>
+                      </a:r>
+                      <a:endParaRPr lang="en-US" sz="1400">
+                        <a:effectLst/>
+                        <a:latin typeface="Times" panose="02020603050405020304" pitchFamily="18" charset="0"/>
+                        <a:ea typeface="Times New Roman" panose="02020603050405020304" pitchFamily="18" charset="0"/>
+                        <a:cs typeface="Times New Roman" panose="02020603050405020304" pitchFamily="18" charset="0"/>
+                      </a:endParaRPr>
+                    </a:p>
+                  </a:txBody>
+                  <a:tcPr marL="68580" marR="68580" marT="0" marB="0" anchor="ctr">
+                    <a:lnL w="12700" cap="flat" cmpd="sng" algn="ctr">
+                      <a:solidFill>
+                        <a:schemeClr val="tx1"/>
+                      </a:solidFill>
+                      <a:prstDash val="solid"/>
+                      <a:round/>
+                      <a:headEnd type="none" w="med" len="med"/>
+                      <a:tailEnd type="none" w="med" len="med"/>
+                    </a:lnL>
+                    <a:lnR w="12700" cap="flat" cmpd="sng" algn="ctr">
+                      <a:solidFill>
+                        <a:schemeClr val="tx1"/>
+                      </a:solidFill>
+                      <a:prstDash val="solid"/>
+                      <a:round/>
+                      <a:headEnd type="none" w="med" len="med"/>
+                      <a:tailEnd type="none" w="med" len="med"/>
+                    </a:lnR>
+                    <a:lnT w="12700" cap="flat" cmpd="sng" algn="ctr">
+                      <a:solidFill>
+                        <a:schemeClr val="tx1"/>
+                      </a:solidFill>
+                      <a:prstDash val="solid"/>
+                      <a:round/>
+                      <a:headEnd type="none" w="med" len="med"/>
+                      <a:tailEnd type="none" w="med" len="med"/>
+                    </a:lnT>
+                    <a:lnB w="12700" cap="flat" cmpd="sng" algn="ctr">
+                      <a:solidFill>
+                        <a:schemeClr val="tx1"/>
+                      </a:solidFill>
+                      <a:prstDash val="solid"/>
+                      <a:round/>
+                      <a:headEnd type="none" w="med" len="med"/>
+                      <a:tailEnd type="none" w="med" len="med"/>
+                    </a:lnB>
+                  </a:tcPr>
+                </a:tc>
+                <a:tc>
+                  <a:txBody>
+                    <a:bodyPr/>
+                    <a:lstStyle/>
+                    <a:p>
+                      <a:pPr marL="0" marR="0" indent="0" algn="ctr">
+                        <a:lnSpc>
+                          <a:spcPct val="115000"/>
+                        </a:lnSpc>
+                        <a:buFont typeface="Arial" panose="020B0604020202020204" pitchFamily="34" charset="0"/>
+                        <a:buNone/>
+                      </a:pPr>
+                      <a:r>
+                        <a:rPr lang="en-US" sz="1400" dirty="0">
+                          <a:effectLst/>
+                        </a:rPr>
+                        <a:t>I need the system to</a:t>
+                      </a:r>
+                      <a:endParaRPr lang="en-US" sz="1400" dirty="0">
+                        <a:effectLst/>
+                        <a:latin typeface="Times" panose="02020603050405020304" pitchFamily="18" charset="0"/>
+                        <a:ea typeface="Times New Roman" panose="02020603050405020304" pitchFamily="18" charset="0"/>
+                        <a:cs typeface="Times New Roman" panose="02020603050405020304" pitchFamily="18" charset="0"/>
+                      </a:endParaRPr>
+                    </a:p>
+                  </a:txBody>
+                  <a:tcPr marL="68580" marR="68580" marT="0" marB="0" anchor="ctr">
+                    <a:lnL w="12700" cap="flat" cmpd="sng" algn="ctr">
+                      <a:solidFill>
+                        <a:schemeClr val="tx1"/>
+                      </a:solidFill>
+                      <a:prstDash val="solid"/>
+                      <a:round/>
+                      <a:headEnd type="none" w="med" len="med"/>
+                      <a:tailEnd type="none" w="med" len="med"/>
+                    </a:lnL>
+                    <a:lnR w="12700" cap="flat" cmpd="sng" algn="ctr">
+                      <a:solidFill>
+                        <a:schemeClr val="tx1"/>
+                      </a:solidFill>
+                      <a:prstDash val="solid"/>
+                      <a:round/>
+                      <a:headEnd type="none" w="med" len="med"/>
+                      <a:tailEnd type="none" w="med" len="med"/>
+                    </a:lnR>
+                    <a:lnT w="12700" cap="flat" cmpd="sng" algn="ctr">
+                      <a:solidFill>
+                        <a:schemeClr val="tx1"/>
+                      </a:solidFill>
+                      <a:prstDash val="solid"/>
+                      <a:round/>
+                      <a:headEnd type="none" w="med" len="med"/>
+                      <a:tailEnd type="none" w="med" len="med"/>
+                    </a:lnT>
+                    <a:lnB w="12700" cap="flat" cmpd="sng" algn="ctr">
+                      <a:solidFill>
+                        <a:schemeClr val="tx1"/>
+                      </a:solidFill>
+                      <a:prstDash val="solid"/>
+                      <a:round/>
+                      <a:headEnd type="none" w="med" len="med"/>
+                      <a:tailEnd type="none" w="med" len="med"/>
+                    </a:lnB>
+                  </a:tcPr>
+                </a:tc>
+                <a:tc>
+                  <a:txBody>
+                    <a:bodyPr/>
+                    <a:lstStyle/>
+                    <a:p>
+                      <a:pPr marL="0" marR="0" indent="0">
+                        <a:lnSpc>
+                          <a:spcPct val="115000"/>
+                        </a:lnSpc>
+                        <a:buFont typeface="Arial" panose="020B0604020202020204" pitchFamily="34" charset="0"/>
+                        <a:buNone/>
+                      </a:pPr>
+                      <a:r>
+                        <a:rPr lang="en-US" sz="1400" dirty="0">
+                          <a:effectLst/>
+                        </a:rPr>
+                        <a:t>Provide a way for users to upload information about their current coursework, grade level, and attending school</a:t>
+                      </a:r>
+                      <a:endParaRPr lang="en-US" sz="1400" dirty="0">
+                        <a:effectLst/>
+                        <a:latin typeface="Times" panose="02020603050405020304" pitchFamily="18" charset="0"/>
+                        <a:ea typeface="Times New Roman" panose="02020603050405020304" pitchFamily="18" charset="0"/>
+                        <a:cs typeface="Times New Roman" panose="02020603050405020304" pitchFamily="18" charset="0"/>
+                      </a:endParaRPr>
+                    </a:p>
+                  </a:txBody>
+                  <a:tcPr marL="68580" marR="68580" marT="0" marB="0" anchor="ctr">
+                    <a:lnL w="12700" cap="flat" cmpd="sng" algn="ctr">
+                      <a:solidFill>
+                        <a:schemeClr val="tx1"/>
+                      </a:solidFill>
+                      <a:prstDash val="solid"/>
+                      <a:round/>
+                      <a:headEnd type="none" w="med" len="med"/>
+                      <a:tailEnd type="none" w="med" len="med"/>
+                    </a:lnL>
+                    <a:lnR w="12700" cap="flat" cmpd="sng" algn="ctr">
+                      <a:solidFill>
+                        <a:schemeClr val="tx1"/>
+                      </a:solidFill>
+                      <a:prstDash val="solid"/>
+                      <a:round/>
+                      <a:headEnd type="none" w="med" len="med"/>
+                      <a:tailEnd type="none" w="med" len="med"/>
+                    </a:lnR>
+                    <a:lnT w="12700" cap="flat" cmpd="sng" algn="ctr">
+                      <a:solidFill>
+                        <a:schemeClr val="tx1"/>
+                      </a:solidFill>
+                      <a:prstDash val="solid"/>
+                      <a:round/>
+                      <a:headEnd type="none" w="med" len="med"/>
+                      <a:tailEnd type="none" w="med" len="med"/>
+                    </a:lnT>
+                    <a:lnB w="12700" cap="flat" cmpd="sng" algn="ctr">
+                      <a:solidFill>
+                        <a:schemeClr val="tx1"/>
+                      </a:solidFill>
+                      <a:prstDash val="solid"/>
+                      <a:round/>
+                      <a:headEnd type="none" w="med" len="med"/>
+                      <a:tailEnd type="none" w="med" len="med"/>
+                    </a:lnB>
+                  </a:tcPr>
+                </a:tc>
+                <a:tc>
+                  <a:txBody>
+                    <a:bodyPr/>
+                    <a:lstStyle/>
+                    <a:p>
+                      <a:pPr marL="0" marR="0" indent="0" algn="ctr">
+                        <a:lnSpc>
+                          <a:spcPct val="115000"/>
+                        </a:lnSpc>
+                        <a:buFont typeface="Arial" panose="020B0604020202020204" pitchFamily="34" charset="0"/>
+                        <a:buNone/>
+                      </a:pPr>
+                      <a:r>
+                        <a:rPr lang="en-US" sz="1400">
+                          <a:effectLst/>
+                        </a:rPr>
+                        <a:t>so that I may</a:t>
+                      </a:r>
+                      <a:endParaRPr lang="en-US" sz="1400">
+                        <a:effectLst/>
+                        <a:latin typeface="Times" panose="02020603050405020304" pitchFamily="18" charset="0"/>
+                        <a:ea typeface="Times New Roman" panose="02020603050405020304" pitchFamily="18" charset="0"/>
+                        <a:cs typeface="Times New Roman" panose="02020603050405020304" pitchFamily="18" charset="0"/>
+                      </a:endParaRPr>
+                    </a:p>
+                  </a:txBody>
+                  <a:tcPr marL="68580" marR="68580" marT="0" marB="0" anchor="ctr">
+                    <a:lnL w="12700" cap="flat" cmpd="sng" algn="ctr">
+                      <a:solidFill>
+                        <a:schemeClr val="tx1"/>
+                      </a:solidFill>
+                      <a:prstDash val="solid"/>
+                      <a:round/>
+                      <a:headEnd type="none" w="med" len="med"/>
+                      <a:tailEnd type="none" w="med" len="med"/>
+                    </a:lnL>
+                    <a:lnR w="12700" cap="flat" cmpd="sng" algn="ctr">
+                      <a:solidFill>
+                        <a:schemeClr val="tx1"/>
+                      </a:solidFill>
+                      <a:prstDash val="solid"/>
+                      <a:round/>
+                      <a:headEnd type="none" w="med" len="med"/>
+                      <a:tailEnd type="none" w="med" len="med"/>
+                    </a:lnR>
+                    <a:lnT w="12700" cap="flat" cmpd="sng" algn="ctr">
+                      <a:solidFill>
+                        <a:schemeClr val="tx1"/>
+                      </a:solidFill>
+                      <a:prstDash val="solid"/>
+                      <a:round/>
+                      <a:headEnd type="none" w="med" len="med"/>
+                      <a:tailEnd type="none" w="med" len="med"/>
+                    </a:lnT>
+                    <a:lnB w="12700" cap="flat" cmpd="sng" algn="ctr">
+                      <a:solidFill>
+                        <a:schemeClr val="tx1"/>
+                      </a:solidFill>
+                      <a:prstDash val="solid"/>
+                      <a:round/>
+                      <a:headEnd type="none" w="med" len="med"/>
+                      <a:tailEnd type="none" w="med" len="med"/>
+                    </a:lnB>
+                  </a:tcPr>
+                </a:tc>
+                <a:tc>
+                  <a:txBody>
+                    <a:bodyPr/>
+                    <a:lstStyle/>
+                    <a:p>
+                      <a:pPr marL="0" marR="0" indent="0">
+                        <a:lnSpc>
+                          <a:spcPct val="115000"/>
+                        </a:lnSpc>
+                        <a:buFont typeface="Arial" panose="020B0604020202020204" pitchFamily="34" charset="0"/>
+                        <a:buNone/>
+                      </a:pPr>
+                      <a:r>
+                        <a:rPr lang="en-US" sz="1400">
+                          <a:effectLst/>
+                        </a:rPr>
+                        <a:t>Connect with my peers that are taking similar courses, in the same grade, or in the same school as collaborating with these peers would be the most beneficial.</a:t>
+                      </a:r>
+                      <a:endParaRPr lang="en-US" sz="1400">
+                        <a:effectLst/>
+                        <a:latin typeface="Times" panose="02020603050405020304" pitchFamily="18" charset="0"/>
+                        <a:ea typeface="Times New Roman" panose="02020603050405020304" pitchFamily="18" charset="0"/>
+                        <a:cs typeface="Times New Roman" panose="02020603050405020304" pitchFamily="18" charset="0"/>
+                      </a:endParaRPr>
+                    </a:p>
+                  </a:txBody>
+                  <a:tcPr marL="68580" marR="68580" marT="0" marB="0" anchor="ctr">
+                    <a:lnL w="12700" cap="flat" cmpd="sng" algn="ctr">
+                      <a:solidFill>
+                        <a:schemeClr val="tx1"/>
+                      </a:solidFill>
+                      <a:prstDash val="solid"/>
+                      <a:round/>
+                      <a:headEnd type="none" w="med" len="med"/>
+                      <a:tailEnd type="none" w="med" len="med"/>
+                    </a:lnL>
+                    <a:lnR w="12700" cap="flat" cmpd="sng" algn="ctr">
+                      <a:solidFill>
+                        <a:schemeClr val="tx1"/>
+                      </a:solidFill>
+                      <a:prstDash val="solid"/>
+                      <a:round/>
+                      <a:headEnd type="none" w="med" len="med"/>
+                      <a:tailEnd type="none" w="med" len="med"/>
+                    </a:lnR>
+                    <a:lnT w="12700" cap="flat" cmpd="sng" algn="ctr">
+                      <a:solidFill>
+                        <a:schemeClr val="tx1"/>
+                      </a:solidFill>
+                      <a:prstDash val="solid"/>
+                      <a:round/>
+                      <a:headEnd type="none" w="med" len="med"/>
+                      <a:tailEnd type="none" w="med" len="med"/>
+                    </a:lnT>
+                    <a:lnB w="12700" cap="flat" cmpd="sng" algn="ctr">
+                      <a:solidFill>
+                        <a:schemeClr val="tx1"/>
+                      </a:solidFill>
+                      <a:prstDash val="solid"/>
+                      <a:round/>
+                      <a:headEnd type="none" w="med" len="med"/>
+                      <a:tailEnd type="none" w="med" len="med"/>
+                    </a:lnB>
+                  </a:tcPr>
+                </a:tc>
+                <a:extLst>
+                  <a:ext uri="{0D108BD9-81ED-4DB2-BD59-A6C34878D82A}">
+                    <a16:rowId xmlns:a16="http://schemas.microsoft.com/office/drawing/2014/main" val="474875616"/>
+                  </a:ext>
+                </a:extLst>
+              </a:tr>
+              <a:tr h="757815">
+                <a:tc>
+                  <a:txBody>
+                    <a:bodyPr/>
+                    <a:lstStyle/>
+                    <a:p>
+                      <a:pPr marL="0" marR="0" indent="0">
+                        <a:lnSpc>
+                          <a:spcPct val="115000"/>
+                        </a:lnSpc>
+                        <a:buFont typeface="Arial" panose="020B0604020202020204" pitchFamily="34" charset="0"/>
+                        <a:buNone/>
+                      </a:pPr>
+                      <a:r>
+                        <a:rPr lang="en-US" sz="1400">
+                          <a:effectLst/>
+                        </a:rPr>
+                        <a:t>US#2</a:t>
+                      </a:r>
+                      <a:endParaRPr lang="en-US" sz="1400">
+                        <a:effectLst/>
+                        <a:latin typeface="Times" panose="02020603050405020304" pitchFamily="18" charset="0"/>
+                        <a:ea typeface="Times New Roman" panose="02020603050405020304" pitchFamily="18" charset="0"/>
+                        <a:cs typeface="Times New Roman" panose="02020603050405020304" pitchFamily="18" charset="0"/>
+                      </a:endParaRPr>
+                    </a:p>
+                  </a:txBody>
+                  <a:tcPr marL="68580" marR="68580" marT="0" marB="0" anchor="ctr">
+                    <a:lnL w="12700" cap="flat" cmpd="sng" algn="ctr">
+                      <a:solidFill>
+                        <a:schemeClr val="tx1"/>
+                      </a:solidFill>
+                      <a:prstDash val="solid"/>
+                      <a:round/>
+                      <a:headEnd type="none" w="med" len="med"/>
+                      <a:tailEnd type="none" w="med" len="med"/>
+                    </a:lnL>
+                    <a:lnR w="12700" cap="flat" cmpd="sng" algn="ctr">
+                      <a:solidFill>
+                        <a:schemeClr val="tx1"/>
+                      </a:solidFill>
+                      <a:prstDash val="solid"/>
+                      <a:round/>
+                      <a:headEnd type="none" w="med" len="med"/>
+                      <a:tailEnd type="none" w="med" len="med"/>
+                    </a:lnR>
+                    <a:lnT w="12700" cap="flat" cmpd="sng" algn="ctr">
+                      <a:solidFill>
+                        <a:schemeClr val="tx1"/>
+                      </a:solidFill>
+                      <a:prstDash val="solid"/>
+                      <a:round/>
+                      <a:headEnd type="none" w="med" len="med"/>
+                      <a:tailEnd type="none" w="med" len="med"/>
+                    </a:lnT>
+                    <a:lnB w="12700" cap="flat" cmpd="sng" algn="ctr">
+                      <a:solidFill>
+                        <a:schemeClr val="tx1"/>
+                      </a:solidFill>
+                      <a:prstDash val="solid"/>
+                      <a:round/>
+                      <a:headEnd type="none" w="med" len="med"/>
+                      <a:tailEnd type="none" w="med" len="med"/>
+                    </a:lnB>
+                  </a:tcPr>
+                </a:tc>
+                <a:tc>
+                  <a:txBody>
+                    <a:bodyPr/>
+                    <a:lstStyle/>
+                    <a:p>
+                      <a:pPr marL="0" marR="0" indent="0" algn="ctr">
+                        <a:lnSpc>
+                          <a:spcPct val="115000"/>
+                        </a:lnSpc>
+                        <a:buFont typeface="Arial" panose="020B0604020202020204" pitchFamily="34" charset="0"/>
+                        <a:buNone/>
+                      </a:pPr>
+                      <a:r>
+                        <a:rPr lang="en-US" sz="1400">
+                          <a:effectLst/>
+                        </a:rPr>
+                        <a:t>As a</a:t>
+                      </a:r>
+                      <a:endParaRPr lang="en-US" sz="1400">
+                        <a:effectLst/>
+                        <a:latin typeface="Times" panose="02020603050405020304" pitchFamily="18" charset="0"/>
+                        <a:ea typeface="Times New Roman" panose="02020603050405020304" pitchFamily="18" charset="0"/>
+                        <a:cs typeface="Times New Roman" panose="02020603050405020304" pitchFamily="18" charset="0"/>
+                      </a:endParaRPr>
+                    </a:p>
+                  </a:txBody>
+                  <a:tcPr marL="68580" marR="68580" marT="0" marB="0" anchor="ctr">
+                    <a:lnL w="12700" cap="flat" cmpd="sng" algn="ctr">
+                      <a:solidFill>
+                        <a:schemeClr val="tx1"/>
+                      </a:solidFill>
+                      <a:prstDash val="solid"/>
+                      <a:round/>
+                      <a:headEnd type="none" w="med" len="med"/>
+                      <a:tailEnd type="none" w="med" len="med"/>
+                    </a:lnL>
+                    <a:lnR w="12700" cap="flat" cmpd="sng" algn="ctr">
+                      <a:solidFill>
+                        <a:schemeClr val="tx1"/>
+                      </a:solidFill>
+                      <a:prstDash val="solid"/>
+                      <a:round/>
+                      <a:headEnd type="none" w="med" len="med"/>
+                      <a:tailEnd type="none" w="med" len="med"/>
+                    </a:lnR>
+                    <a:lnT w="12700" cap="flat" cmpd="sng" algn="ctr">
+                      <a:solidFill>
+                        <a:schemeClr val="tx1"/>
+                      </a:solidFill>
+                      <a:prstDash val="solid"/>
+                      <a:round/>
+                      <a:headEnd type="none" w="med" len="med"/>
+                      <a:tailEnd type="none" w="med" len="med"/>
+                    </a:lnT>
+                    <a:lnB w="12700" cap="flat" cmpd="sng" algn="ctr">
+                      <a:solidFill>
+                        <a:schemeClr val="tx1"/>
+                      </a:solidFill>
+                      <a:prstDash val="solid"/>
+                      <a:round/>
+                      <a:headEnd type="none" w="med" len="med"/>
+                      <a:tailEnd type="none" w="med" len="med"/>
+                    </a:lnB>
+                  </a:tcPr>
+                </a:tc>
+                <a:tc>
+                  <a:txBody>
+                    <a:bodyPr/>
+                    <a:lstStyle/>
+                    <a:p>
+                      <a:pPr marL="0" marR="0" indent="0" algn="ctr">
+                        <a:lnSpc>
+                          <a:spcPct val="115000"/>
+                        </a:lnSpc>
+                        <a:buFont typeface="Arial" panose="020B0604020202020204" pitchFamily="34" charset="0"/>
+                        <a:buNone/>
+                      </a:pPr>
+                      <a:r>
+                        <a:rPr lang="en-US" sz="1400">
+                          <a:effectLst/>
+                        </a:rPr>
+                        <a:t>Student</a:t>
+                      </a:r>
+                      <a:endParaRPr lang="en-US" sz="1400">
+                        <a:effectLst/>
+                        <a:latin typeface="Times" panose="02020603050405020304" pitchFamily="18" charset="0"/>
+                        <a:ea typeface="Times New Roman" panose="02020603050405020304" pitchFamily="18" charset="0"/>
+                        <a:cs typeface="Times New Roman" panose="02020603050405020304" pitchFamily="18" charset="0"/>
+                      </a:endParaRPr>
+                    </a:p>
+                  </a:txBody>
+                  <a:tcPr marL="68580" marR="68580" marT="0" marB="0" anchor="ctr">
+                    <a:lnL w="12700" cap="flat" cmpd="sng" algn="ctr">
+                      <a:solidFill>
+                        <a:schemeClr val="tx1"/>
+                      </a:solidFill>
+                      <a:prstDash val="solid"/>
+                      <a:round/>
+                      <a:headEnd type="none" w="med" len="med"/>
+                      <a:tailEnd type="none" w="med" len="med"/>
+                    </a:lnL>
+                    <a:lnR w="12700" cap="flat" cmpd="sng" algn="ctr">
+                      <a:solidFill>
+                        <a:schemeClr val="tx1"/>
+                      </a:solidFill>
+                      <a:prstDash val="solid"/>
+                      <a:round/>
+                      <a:headEnd type="none" w="med" len="med"/>
+                      <a:tailEnd type="none" w="med" len="med"/>
+                    </a:lnR>
+                    <a:lnT w="12700" cap="flat" cmpd="sng" algn="ctr">
+                      <a:solidFill>
+                        <a:schemeClr val="tx1"/>
+                      </a:solidFill>
+                      <a:prstDash val="solid"/>
+                      <a:round/>
+                      <a:headEnd type="none" w="med" len="med"/>
+                      <a:tailEnd type="none" w="med" len="med"/>
+                    </a:lnT>
+                    <a:lnB w="12700" cap="flat" cmpd="sng" algn="ctr">
+                      <a:solidFill>
+                        <a:schemeClr val="tx1"/>
+                      </a:solidFill>
+                      <a:prstDash val="solid"/>
+                      <a:round/>
+                      <a:headEnd type="none" w="med" len="med"/>
+                      <a:tailEnd type="none" w="med" len="med"/>
+                    </a:lnB>
+                  </a:tcPr>
+                </a:tc>
+                <a:tc>
+                  <a:txBody>
+                    <a:bodyPr/>
+                    <a:lstStyle/>
+                    <a:p>
+                      <a:pPr marL="0" marR="0" indent="0" algn="ctr">
+                        <a:lnSpc>
+                          <a:spcPct val="115000"/>
+                        </a:lnSpc>
+                        <a:buFont typeface="Arial" panose="020B0604020202020204" pitchFamily="34" charset="0"/>
+                        <a:buNone/>
+                      </a:pPr>
+                      <a:r>
+                        <a:rPr lang="en-US" sz="1400">
+                          <a:effectLst/>
+                        </a:rPr>
+                        <a:t>I need the system to</a:t>
+                      </a:r>
+                      <a:endParaRPr lang="en-US" sz="1400">
+                        <a:effectLst/>
+                        <a:latin typeface="Times" panose="02020603050405020304" pitchFamily="18" charset="0"/>
+                        <a:ea typeface="Times New Roman" panose="02020603050405020304" pitchFamily="18" charset="0"/>
+                        <a:cs typeface="Times New Roman" panose="02020603050405020304" pitchFamily="18" charset="0"/>
+                      </a:endParaRPr>
+                    </a:p>
+                  </a:txBody>
+                  <a:tcPr marL="68580" marR="68580" marT="0" marB="0" anchor="ctr">
+                    <a:lnL w="12700" cap="flat" cmpd="sng" algn="ctr">
+                      <a:solidFill>
+                        <a:schemeClr val="tx1"/>
+                      </a:solidFill>
+                      <a:prstDash val="solid"/>
+                      <a:round/>
+                      <a:headEnd type="none" w="med" len="med"/>
+                      <a:tailEnd type="none" w="med" len="med"/>
+                    </a:lnL>
+                    <a:lnR w="12700" cap="flat" cmpd="sng" algn="ctr">
+                      <a:solidFill>
+                        <a:schemeClr val="tx1"/>
+                      </a:solidFill>
+                      <a:prstDash val="solid"/>
+                      <a:round/>
+                      <a:headEnd type="none" w="med" len="med"/>
+                      <a:tailEnd type="none" w="med" len="med"/>
+                    </a:lnR>
+                    <a:lnT w="12700" cap="flat" cmpd="sng" algn="ctr">
+                      <a:solidFill>
+                        <a:schemeClr val="tx1"/>
+                      </a:solidFill>
+                      <a:prstDash val="solid"/>
+                      <a:round/>
+                      <a:headEnd type="none" w="med" len="med"/>
+                      <a:tailEnd type="none" w="med" len="med"/>
+                    </a:lnT>
+                    <a:lnB w="12700" cap="flat" cmpd="sng" algn="ctr">
+                      <a:solidFill>
+                        <a:schemeClr val="tx1"/>
+                      </a:solidFill>
+                      <a:prstDash val="solid"/>
+                      <a:round/>
+                      <a:headEnd type="none" w="med" len="med"/>
+                      <a:tailEnd type="none" w="med" len="med"/>
+                    </a:lnB>
+                  </a:tcPr>
+                </a:tc>
+                <a:tc>
+                  <a:txBody>
+                    <a:bodyPr/>
+                    <a:lstStyle/>
+                    <a:p>
+                      <a:pPr marL="0" marR="0" indent="0">
+                        <a:lnSpc>
+                          <a:spcPct val="115000"/>
+                        </a:lnSpc>
+                        <a:buFont typeface="Arial" panose="020B0604020202020204" pitchFamily="34" charset="0"/>
+                        <a:buNone/>
+                      </a:pPr>
+                      <a:r>
+                        <a:rPr lang="en-US" sz="1400">
+                          <a:effectLst/>
+                        </a:rPr>
+                        <a:t>Support sharing text, images, and files within direct messaging and within study circles</a:t>
+                      </a:r>
+                      <a:endParaRPr lang="en-US" sz="1400">
+                        <a:effectLst/>
+                        <a:latin typeface="Times" panose="02020603050405020304" pitchFamily="18" charset="0"/>
+                        <a:ea typeface="Times New Roman" panose="02020603050405020304" pitchFamily="18" charset="0"/>
+                        <a:cs typeface="Times New Roman" panose="02020603050405020304" pitchFamily="18" charset="0"/>
+                      </a:endParaRPr>
+                    </a:p>
+                  </a:txBody>
+                  <a:tcPr marL="68580" marR="68580" marT="0" marB="0" anchor="ctr">
+                    <a:lnL w="12700" cap="flat" cmpd="sng" algn="ctr">
+                      <a:solidFill>
+                        <a:schemeClr val="tx1"/>
+                      </a:solidFill>
+                      <a:prstDash val="solid"/>
+                      <a:round/>
+                      <a:headEnd type="none" w="med" len="med"/>
+                      <a:tailEnd type="none" w="med" len="med"/>
+                    </a:lnL>
+                    <a:lnR w="12700" cap="flat" cmpd="sng" algn="ctr">
+                      <a:solidFill>
+                        <a:schemeClr val="tx1"/>
+                      </a:solidFill>
+                      <a:prstDash val="solid"/>
+                      <a:round/>
+                      <a:headEnd type="none" w="med" len="med"/>
+                      <a:tailEnd type="none" w="med" len="med"/>
+                    </a:lnR>
+                    <a:lnT w="12700" cap="flat" cmpd="sng" algn="ctr">
+                      <a:solidFill>
+                        <a:schemeClr val="tx1"/>
+                      </a:solidFill>
+                      <a:prstDash val="solid"/>
+                      <a:round/>
+                      <a:headEnd type="none" w="med" len="med"/>
+                      <a:tailEnd type="none" w="med" len="med"/>
+                    </a:lnT>
+                    <a:lnB w="12700" cap="flat" cmpd="sng" algn="ctr">
+                      <a:solidFill>
+                        <a:schemeClr val="tx1"/>
+                      </a:solidFill>
+                      <a:prstDash val="solid"/>
+                      <a:round/>
+                      <a:headEnd type="none" w="med" len="med"/>
+                      <a:tailEnd type="none" w="med" len="med"/>
+                    </a:lnB>
+                  </a:tcPr>
+                </a:tc>
+                <a:tc>
+                  <a:txBody>
+                    <a:bodyPr/>
+                    <a:lstStyle/>
+                    <a:p>
+                      <a:pPr marL="0" marR="0" indent="0" algn="ctr">
+                        <a:lnSpc>
+                          <a:spcPct val="115000"/>
+                        </a:lnSpc>
+                        <a:buFont typeface="Arial" panose="020B0604020202020204" pitchFamily="34" charset="0"/>
+                        <a:buNone/>
+                      </a:pPr>
+                      <a:r>
+                        <a:rPr lang="en-US" sz="1400">
+                          <a:effectLst/>
+                        </a:rPr>
+                        <a:t>so that I may</a:t>
+                      </a:r>
+                      <a:endParaRPr lang="en-US" sz="1400">
+                        <a:effectLst/>
+                        <a:latin typeface="Times" panose="02020603050405020304" pitchFamily="18" charset="0"/>
+                        <a:ea typeface="Times New Roman" panose="02020603050405020304" pitchFamily="18" charset="0"/>
+                        <a:cs typeface="Times New Roman" panose="02020603050405020304" pitchFamily="18" charset="0"/>
+                      </a:endParaRPr>
+                    </a:p>
+                  </a:txBody>
+                  <a:tcPr marL="68580" marR="68580" marT="0" marB="0" anchor="ctr">
+                    <a:lnL w="12700" cap="flat" cmpd="sng" algn="ctr">
+                      <a:solidFill>
+                        <a:schemeClr val="tx1"/>
+                      </a:solidFill>
+                      <a:prstDash val="solid"/>
+                      <a:round/>
+                      <a:headEnd type="none" w="med" len="med"/>
+                      <a:tailEnd type="none" w="med" len="med"/>
+                    </a:lnL>
+                    <a:lnR w="12700" cap="flat" cmpd="sng" algn="ctr">
+                      <a:solidFill>
+                        <a:schemeClr val="tx1"/>
+                      </a:solidFill>
+                      <a:prstDash val="solid"/>
+                      <a:round/>
+                      <a:headEnd type="none" w="med" len="med"/>
+                      <a:tailEnd type="none" w="med" len="med"/>
+                    </a:lnR>
+                    <a:lnT w="12700" cap="flat" cmpd="sng" algn="ctr">
+                      <a:solidFill>
+                        <a:schemeClr val="tx1"/>
+                      </a:solidFill>
+                      <a:prstDash val="solid"/>
+                      <a:round/>
+                      <a:headEnd type="none" w="med" len="med"/>
+                      <a:tailEnd type="none" w="med" len="med"/>
+                    </a:lnT>
+                    <a:lnB w="12700" cap="flat" cmpd="sng" algn="ctr">
+                      <a:solidFill>
+                        <a:schemeClr val="tx1"/>
+                      </a:solidFill>
+                      <a:prstDash val="solid"/>
+                      <a:round/>
+                      <a:headEnd type="none" w="med" len="med"/>
+                      <a:tailEnd type="none" w="med" len="med"/>
+                    </a:lnB>
+                  </a:tcPr>
+                </a:tc>
+                <a:tc>
+                  <a:txBody>
+                    <a:bodyPr/>
+                    <a:lstStyle/>
+                    <a:p>
+                      <a:pPr marL="0" marR="0" indent="0">
+                        <a:lnSpc>
+                          <a:spcPct val="115000"/>
+                        </a:lnSpc>
+                        <a:buFont typeface="Arial" panose="020B0604020202020204" pitchFamily="34" charset="0"/>
+                        <a:buNone/>
+                      </a:pPr>
+                      <a:r>
+                        <a:rPr lang="en-US" sz="1400" dirty="0">
+                          <a:effectLst/>
+                        </a:rPr>
+                        <a:t>Share notes, assignments, and collaborate more effectively with my peers</a:t>
+                      </a:r>
+                      <a:endParaRPr lang="en-US" sz="1400" dirty="0">
+                        <a:effectLst/>
+                        <a:latin typeface="Times" panose="02020603050405020304" pitchFamily="18" charset="0"/>
+                        <a:ea typeface="Times New Roman" panose="02020603050405020304" pitchFamily="18" charset="0"/>
+                        <a:cs typeface="Times New Roman" panose="02020603050405020304" pitchFamily="18" charset="0"/>
+                      </a:endParaRPr>
+                    </a:p>
+                  </a:txBody>
+                  <a:tcPr marL="68580" marR="68580" marT="0" marB="0" anchor="ctr">
+                    <a:lnL w="12700" cap="flat" cmpd="sng" algn="ctr">
+                      <a:solidFill>
+                        <a:schemeClr val="tx1"/>
+                      </a:solidFill>
+                      <a:prstDash val="solid"/>
+                      <a:round/>
+                      <a:headEnd type="none" w="med" len="med"/>
+                      <a:tailEnd type="none" w="med" len="med"/>
+                    </a:lnL>
+                    <a:lnR w="12700" cap="flat" cmpd="sng" algn="ctr">
+                      <a:solidFill>
+                        <a:schemeClr val="tx1"/>
+                      </a:solidFill>
+                      <a:prstDash val="solid"/>
+                      <a:round/>
+                      <a:headEnd type="none" w="med" len="med"/>
+                      <a:tailEnd type="none" w="med" len="med"/>
+                    </a:lnR>
+                    <a:lnT w="12700" cap="flat" cmpd="sng" algn="ctr">
+                      <a:solidFill>
+                        <a:schemeClr val="tx1"/>
+                      </a:solidFill>
+                      <a:prstDash val="solid"/>
+                      <a:round/>
+                      <a:headEnd type="none" w="med" len="med"/>
+                      <a:tailEnd type="none" w="med" len="med"/>
+                    </a:lnT>
+                    <a:lnB w="12700" cap="flat" cmpd="sng" algn="ctr">
+                      <a:solidFill>
+                        <a:schemeClr val="tx1"/>
+                      </a:solidFill>
+                      <a:prstDash val="solid"/>
+                      <a:round/>
+                      <a:headEnd type="none" w="med" len="med"/>
+                      <a:tailEnd type="none" w="med" len="med"/>
+                    </a:lnB>
+                  </a:tcPr>
+                </a:tc>
+                <a:extLst>
+                  <a:ext uri="{0D108BD9-81ED-4DB2-BD59-A6C34878D82A}">
+                    <a16:rowId xmlns:a16="http://schemas.microsoft.com/office/drawing/2014/main" val="3320687854"/>
+                  </a:ext>
+                </a:extLst>
+              </a:tr>
+              <a:tr h="950320">
+                <a:tc>
+                  <a:txBody>
+                    <a:bodyPr/>
+                    <a:lstStyle/>
+                    <a:p>
+                      <a:pPr marL="0" marR="0" indent="0">
+                        <a:lnSpc>
+                          <a:spcPct val="115000"/>
+                        </a:lnSpc>
+                        <a:buFont typeface="Arial" panose="020B0604020202020204" pitchFamily="34" charset="0"/>
+                        <a:buNone/>
+                      </a:pPr>
+                      <a:r>
+                        <a:rPr lang="en-US" sz="1400">
+                          <a:effectLst/>
+                        </a:rPr>
+                        <a:t>US#3</a:t>
+                      </a:r>
+                      <a:endParaRPr lang="en-US" sz="1400">
+                        <a:effectLst/>
+                        <a:latin typeface="Times" panose="02020603050405020304" pitchFamily="18" charset="0"/>
+                        <a:ea typeface="Times New Roman" panose="02020603050405020304" pitchFamily="18" charset="0"/>
+                        <a:cs typeface="Times New Roman" panose="02020603050405020304" pitchFamily="18" charset="0"/>
+                      </a:endParaRPr>
+                    </a:p>
+                  </a:txBody>
+                  <a:tcPr marL="68580" marR="68580" marT="0" marB="0" anchor="ctr">
+                    <a:lnL w="12700" cap="flat" cmpd="sng" algn="ctr">
+                      <a:solidFill>
+                        <a:schemeClr val="tx1"/>
+                      </a:solidFill>
+                      <a:prstDash val="solid"/>
+                      <a:round/>
+                      <a:headEnd type="none" w="med" len="med"/>
+                      <a:tailEnd type="none" w="med" len="med"/>
+                    </a:lnL>
+                    <a:lnR w="12700" cap="flat" cmpd="sng" algn="ctr">
+                      <a:solidFill>
+                        <a:schemeClr val="tx1"/>
+                      </a:solidFill>
+                      <a:prstDash val="solid"/>
+                      <a:round/>
+                      <a:headEnd type="none" w="med" len="med"/>
+                      <a:tailEnd type="none" w="med" len="med"/>
+                    </a:lnR>
+                    <a:lnT w="12700" cap="flat" cmpd="sng" algn="ctr">
+                      <a:solidFill>
+                        <a:schemeClr val="tx1"/>
+                      </a:solidFill>
+                      <a:prstDash val="solid"/>
+                      <a:round/>
+                      <a:headEnd type="none" w="med" len="med"/>
+                      <a:tailEnd type="none" w="med" len="med"/>
+                    </a:lnT>
+                    <a:lnB w="12700" cap="flat" cmpd="sng" algn="ctr">
+                      <a:solidFill>
+                        <a:schemeClr val="tx1"/>
+                      </a:solidFill>
+                      <a:prstDash val="solid"/>
+                      <a:round/>
+                      <a:headEnd type="none" w="med" len="med"/>
+                      <a:tailEnd type="none" w="med" len="med"/>
+                    </a:lnB>
+                  </a:tcPr>
+                </a:tc>
+                <a:tc>
+                  <a:txBody>
+                    <a:bodyPr/>
+                    <a:lstStyle/>
+                    <a:p>
+                      <a:pPr marL="0" marR="0" indent="0" algn="ctr">
+                        <a:lnSpc>
+                          <a:spcPct val="115000"/>
+                        </a:lnSpc>
+                        <a:buFont typeface="Arial" panose="020B0604020202020204" pitchFamily="34" charset="0"/>
+                        <a:buNone/>
+                      </a:pPr>
+                      <a:r>
+                        <a:rPr lang="en-US" sz="1400">
+                          <a:effectLst/>
+                        </a:rPr>
+                        <a:t>As a</a:t>
+                      </a:r>
+                      <a:endParaRPr lang="en-US" sz="1400">
+                        <a:effectLst/>
+                        <a:latin typeface="Times" panose="02020603050405020304" pitchFamily="18" charset="0"/>
+                        <a:ea typeface="Times New Roman" panose="02020603050405020304" pitchFamily="18" charset="0"/>
+                        <a:cs typeface="Times New Roman" panose="02020603050405020304" pitchFamily="18" charset="0"/>
+                      </a:endParaRPr>
+                    </a:p>
+                  </a:txBody>
+                  <a:tcPr marL="68580" marR="68580" marT="0" marB="0" anchor="ctr">
+                    <a:lnL w="12700" cap="flat" cmpd="sng" algn="ctr">
+                      <a:solidFill>
+                        <a:schemeClr val="tx1"/>
+                      </a:solidFill>
+                      <a:prstDash val="solid"/>
+                      <a:round/>
+                      <a:headEnd type="none" w="med" len="med"/>
+                      <a:tailEnd type="none" w="med" len="med"/>
+                    </a:lnL>
+                    <a:lnR w="12700" cap="flat" cmpd="sng" algn="ctr">
+                      <a:solidFill>
+                        <a:schemeClr val="tx1"/>
+                      </a:solidFill>
+                      <a:prstDash val="solid"/>
+                      <a:round/>
+                      <a:headEnd type="none" w="med" len="med"/>
+                      <a:tailEnd type="none" w="med" len="med"/>
+                    </a:lnR>
+                    <a:lnT w="12700" cap="flat" cmpd="sng" algn="ctr">
+                      <a:solidFill>
+                        <a:schemeClr val="tx1"/>
+                      </a:solidFill>
+                      <a:prstDash val="solid"/>
+                      <a:round/>
+                      <a:headEnd type="none" w="med" len="med"/>
+                      <a:tailEnd type="none" w="med" len="med"/>
+                    </a:lnT>
+                    <a:lnB w="12700" cap="flat" cmpd="sng" algn="ctr">
+                      <a:solidFill>
+                        <a:schemeClr val="tx1"/>
+                      </a:solidFill>
+                      <a:prstDash val="solid"/>
+                      <a:round/>
+                      <a:headEnd type="none" w="med" len="med"/>
+                      <a:tailEnd type="none" w="med" len="med"/>
+                    </a:lnB>
+                  </a:tcPr>
+                </a:tc>
+                <a:tc>
+                  <a:txBody>
+                    <a:bodyPr/>
+                    <a:lstStyle/>
+                    <a:p>
+                      <a:pPr marL="0" marR="0" indent="0" algn="ctr">
+                        <a:lnSpc>
+                          <a:spcPct val="115000"/>
+                        </a:lnSpc>
+                        <a:buFont typeface="Arial" panose="020B0604020202020204" pitchFamily="34" charset="0"/>
+                        <a:buNone/>
+                      </a:pPr>
+                      <a:r>
+                        <a:rPr lang="en-US" sz="1400">
+                          <a:effectLst/>
+                        </a:rPr>
+                        <a:t>Student</a:t>
+                      </a:r>
+                      <a:endParaRPr lang="en-US" sz="1400">
+                        <a:effectLst/>
+                        <a:latin typeface="Times" panose="02020603050405020304" pitchFamily="18" charset="0"/>
+                        <a:ea typeface="Times New Roman" panose="02020603050405020304" pitchFamily="18" charset="0"/>
+                        <a:cs typeface="Times New Roman" panose="02020603050405020304" pitchFamily="18" charset="0"/>
+                      </a:endParaRPr>
+                    </a:p>
+                  </a:txBody>
+                  <a:tcPr marL="68580" marR="68580" marT="0" marB="0" anchor="ctr">
+                    <a:lnL w="12700" cap="flat" cmpd="sng" algn="ctr">
+                      <a:solidFill>
+                        <a:schemeClr val="tx1"/>
+                      </a:solidFill>
+                      <a:prstDash val="solid"/>
+                      <a:round/>
+                      <a:headEnd type="none" w="med" len="med"/>
+                      <a:tailEnd type="none" w="med" len="med"/>
+                    </a:lnL>
+                    <a:lnR w="12700" cap="flat" cmpd="sng" algn="ctr">
+                      <a:solidFill>
+                        <a:schemeClr val="tx1"/>
+                      </a:solidFill>
+                      <a:prstDash val="solid"/>
+                      <a:round/>
+                      <a:headEnd type="none" w="med" len="med"/>
+                      <a:tailEnd type="none" w="med" len="med"/>
+                    </a:lnR>
+                    <a:lnT w="12700" cap="flat" cmpd="sng" algn="ctr">
+                      <a:solidFill>
+                        <a:schemeClr val="tx1"/>
+                      </a:solidFill>
+                      <a:prstDash val="solid"/>
+                      <a:round/>
+                      <a:headEnd type="none" w="med" len="med"/>
+                      <a:tailEnd type="none" w="med" len="med"/>
+                    </a:lnT>
+                    <a:lnB w="12700" cap="flat" cmpd="sng" algn="ctr">
+                      <a:solidFill>
+                        <a:schemeClr val="tx1"/>
+                      </a:solidFill>
+                      <a:prstDash val="solid"/>
+                      <a:round/>
+                      <a:headEnd type="none" w="med" len="med"/>
+                      <a:tailEnd type="none" w="med" len="med"/>
+                    </a:lnB>
+                  </a:tcPr>
+                </a:tc>
+                <a:tc>
+                  <a:txBody>
+                    <a:bodyPr/>
+                    <a:lstStyle/>
+                    <a:p>
+                      <a:pPr marL="0" marR="0" indent="0" algn="ctr">
+                        <a:lnSpc>
+                          <a:spcPct val="115000"/>
+                        </a:lnSpc>
+                        <a:buFont typeface="Arial" panose="020B0604020202020204" pitchFamily="34" charset="0"/>
+                        <a:buNone/>
+                      </a:pPr>
+                      <a:r>
+                        <a:rPr lang="en-US" sz="1400">
+                          <a:effectLst/>
+                        </a:rPr>
+                        <a:t>I need the system to</a:t>
+                      </a:r>
+                      <a:endParaRPr lang="en-US" sz="1400">
+                        <a:effectLst/>
+                        <a:latin typeface="Times" panose="02020603050405020304" pitchFamily="18" charset="0"/>
+                        <a:ea typeface="Times New Roman" panose="02020603050405020304" pitchFamily="18" charset="0"/>
+                        <a:cs typeface="Times New Roman" panose="02020603050405020304" pitchFamily="18" charset="0"/>
+                      </a:endParaRPr>
+                    </a:p>
+                  </a:txBody>
+                  <a:tcPr marL="68580" marR="68580" marT="0" marB="0" anchor="ctr">
+                    <a:lnL w="12700" cap="flat" cmpd="sng" algn="ctr">
+                      <a:solidFill>
+                        <a:schemeClr val="tx1"/>
+                      </a:solidFill>
+                      <a:prstDash val="solid"/>
+                      <a:round/>
+                      <a:headEnd type="none" w="med" len="med"/>
+                      <a:tailEnd type="none" w="med" len="med"/>
+                    </a:lnL>
+                    <a:lnR w="12700" cap="flat" cmpd="sng" algn="ctr">
+                      <a:solidFill>
+                        <a:schemeClr val="tx1"/>
+                      </a:solidFill>
+                      <a:prstDash val="solid"/>
+                      <a:round/>
+                      <a:headEnd type="none" w="med" len="med"/>
+                      <a:tailEnd type="none" w="med" len="med"/>
+                    </a:lnR>
+                    <a:lnT w="12700" cap="flat" cmpd="sng" algn="ctr">
+                      <a:solidFill>
+                        <a:schemeClr val="tx1"/>
+                      </a:solidFill>
+                      <a:prstDash val="solid"/>
+                      <a:round/>
+                      <a:headEnd type="none" w="med" len="med"/>
+                      <a:tailEnd type="none" w="med" len="med"/>
+                    </a:lnT>
+                    <a:lnB w="12700" cap="flat" cmpd="sng" algn="ctr">
+                      <a:solidFill>
+                        <a:schemeClr val="tx1"/>
+                      </a:solidFill>
+                      <a:prstDash val="solid"/>
+                      <a:round/>
+                      <a:headEnd type="none" w="med" len="med"/>
+                      <a:tailEnd type="none" w="med" len="med"/>
+                    </a:lnB>
+                  </a:tcPr>
+                </a:tc>
+                <a:tc>
+                  <a:txBody>
+                    <a:bodyPr/>
+                    <a:lstStyle/>
+                    <a:p>
+                      <a:pPr marL="0" marR="0" indent="0">
+                        <a:lnSpc>
+                          <a:spcPct val="115000"/>
+                        </a:lnSpc>
+                        <a:buFont typeface="Arial" panose="020B0604020202020204" pitchFamily="34" charset="0"/>
+                        <a:buNone/>
+                      </a:pPr>
+                      <a:r>
+                        <a:rPr lang="en-US" sz="1400">
+                          <a:effectLst/>
+                        </a:rPr>
+                        <a:t>Support messaging through both direct messaging as well as study circles </a:t>
+                      </a:r>
+                      <a:endParaRPr lang="en-US" sz="1400">
+                        <a:effectLst/>
+                        <a:latin typeface="Times" panose="02020603050405020304" pitchFamily="18" charset="0"/>
+                        <a:ea typeface="Times New Roman" panose="02020603050405020304" pitchFamily="18" charset="0"/>
+                        <a:cs typeface="Times New Roman" panose="02020603050405020304" pitchFamily="18" charset="0"/>
+                      </a:endParaRPr>
+                    </a:p>
+                  </a:txBody>
+                  <a:tcPr marL="68580" marR="68580" marT="0" marB="0" anchor="ctr">
+                    <a:lnL w="12700" cap="flat" cmpd="sng" algn="ctr">
+                      <a:solidFill>
+                        <a:schemeClr val="tx1"/>
+                      </a:solidFill>
+                      <a:prstDash val="solid"/>
+                      <a:round/>
+                      <a:headEnd type="none" w="med" len="med"/>
+                      <a:tailEnd type="none" w="med" len="med"/>
+                    </a:lnL>
+                    <a:lnR w="12700" cap="flat" cmpd="sng" algn="ctr">
+                      <a:solidFill>
+                        <a:schemeClr val="tx1"/>
+                      </a:solidFill>
+                      <a:prstDash val="solid"/>
+                      <a:round/>
+                      <a:headEnd type="none" w="med" len="med"/>
+                      <a:tailEnd type="none" w="med" len="med"/>
+                    </a:lnR>
+                    <a:lnT w="12700" cap="flat" cmpd="sng" algn="ctr">
+                      <a:solidFill>
+                        <a:schemeClr val="tx1"/>
+                      </a:solidFill>
+                      <a:prstDash val="solid"/>
+                      <a:round/>
+                      <a:headEnd type="none" w="med" len="med"/>
+                      <a:tailEnd type="none" w="med" len="med"/>
+                    </a:lnT>
+                    <a:lnB w="12700" cap="flat" cmpd="sng" algn="ctr">
+                      <a:solidFill>
+                        <a:schemeClr val="tx1"/>
+                      </a:solidFill>
+                      <a:prstDash val="solid"/>
+                      <a:round/>
+                      <a:headEnd type="none" w="med" len="med"/>
+                      <a:tailEnd type="none" w="med" len="med"/>
+                    </a:lnB>
+                  </a:tcPr>
+                </a:tc>
+                <a:tc>
+                  <a:txBody>
+                    <a:bodyPr/>
+                    <a:lstStyle/>
+                    <a:p>
+                      <a:pPr marL="0" marR="0" indent="0" algn="ctr">
+                        <a:lnSpc>
+                          <a:spcPct val="115000"/>
+                        </a:lnSpc>
+                        <a:buFont typeface="Arial" panose="020B0604020202020204" pitchFamily="34" charset="0"/>
+                        <a:buNone/>
+                      </a:pPr>
+                      <a:r>
+                        <a:rPr lang="en-US" sz="1400" dirty="0">
+                          <a:effectLst/>
+                        </a:rPr>
+                        <a:t>so that I may</a:t>
+                      </a:r>
+                      <a:endParaRPr lang="en-US" sz="1400" dirty="0">
+                        <a:effectLst/>
+                        <a:latin typeface="Times" panose="02020603050405020304" pitchFamily="18" charset="0"/>
+                        <a:ea typeface="Times New Roman" panose="02020603050405020304" pitchFamily="18" charset="0"/>
+                        <a:cs typeface="Times New Roman" panose="02020603050405020304" pitchFamily="18" charset="0"/>
+                      </a:endParaRPr>
+                    </a:p>
+                  </a:txBody>
+                  <a:tcPr marL="68580" marR="68580" marT="0" marB="0" anchor="ctr">
+                    <a:lnL w="12700" cap="flat" cmpd="sng" algn="ctr">
+                      <a:solidFill>
+                        <a:schemeClr val="tx1"/>
+                      </a:solidFill>
+                      <a:prstDash val="solid"/>
+                      <a:round/>
+                      <a:headEnd type="none" w="med" len="med"/>
+                      <a:tailEnd type="none" w="med" len="med"/>
+                    </a:lnL>
+                    <a:lnR w="12700" cap="flat" cmpd="sng" algn="ctr">
+                      <a:solidFill>
+                        <a:schemeClr val="tx1"/>
+                      </a:solidFill>
+                      <a:prstDash val="solid"/>
+                      <a:round/>
+                      <a:headEnd type="none" w="med" len="med"/>
+                      <a:tailEnd type="none" w="med" len="med"/>
+                    </a:lnR>
+                    <a:lnT w="12700" cap="flat" cmpd="sng" algn="ctr">
+                      <a:solidFill>
+                        <a:schemeClr val="tx1"/>
+                      </a:solidFill>
+                      <a:prstDash val="solid"/>
+                      <a:round/>
+                      <a:headEnd type="none" w="med" len="med"/>
+                      <a:tailEnd type="none" w="med" len="med"/>
+                    </a:lnT>
+                    <a:lnB w="12700" cap="flat" cmpd="sng" algn="ctr">
+                      <a:solidFill>
+                        <a:schemeClr val="tx1"/>
+                      </a:solidFill>
+                      <a:prstDash val="solid"/>
+                      <a:round/>
+                      <a:headEnd type="none" w="med" len="med"/>
+                      <a:tailEnd type="none" w="med" len="med"/>
+                    </a:lnB>
+                  </a:tcPr>
+                </a:tc>
+                <a:tc>
+                  <a:txBody>
+                    <a:bodyPr/>
+                    <a:lstStyle/>
+                    <a:p>
+                      <a:pPr marL="0" marR="0" indent="0">
+                        <a:lnSpc>
+                          <a:spcPct val="115000"/>
+                        </a:lnSpc>
+                        <a:buFont typeface="Arial" panose="020B0604020202020204" pitchFamily="34" charset="0"/>
+                        <a:buNone/>
+                      </a:pPr>
+                      <a:r>
+                        <a:rPr lang="en-US" sz="1400" dirty="0">
+                          <a:effectLst/>
+                        </a:rPr>
+                        <a:t>Collaborate with my peers over a service that is specifically designed to support learning and education</a:t>
+                      </a:r>
+                      <a:endParaRPr lang="en-US" sz="1400" dirty="0">
+                        <a:effectLst/>
+                        <a:latin typeface="Times" panose="02020603050405020304" pitchFamily="18" charset="0"/>
+                        <a:ea typeface="Times New Roman" panose="02020603050405020304" pitchFamily="18" charset="0"/>
+                        <a:cs typeface="Times New Roman" panose="02020603050405020304" pitchFamily="18" charset="0"/>
+                      </a:endParaRPr>
+                    </a:p>
+                  </a:txBody>
+                  <a:tcPr marL="68580" marR="68580" marT="0" marB="0" anchor="ctr">
+                    <a:lnL w="12700" cap="flat" cmpd="sng" algn="ctr">
+                      <a:solidFill>
+                        <a:schemeClr val="tx1"/>
+                      </a:solidFill>
+                      <a:prstDash val="solid"/>
+                      <a:round/>
+                      <a:headEnd type="none" w="med" len="med"/>
+                      <a:tailEnd type="none" w="med" len="med"/>
+                    </a:lnL>
+                    <a:lnR w="12700" cap="flat" cmpd="sng" algn="ctr">
+                      <a:solidFill>
+                        <a:schemeClr val="tx1"/>
+                      </a:solidFill>
+                      <a:prstDash val="solid"/>
+                      <a:round/>
+                      <a:headEnd type="none" w="med" len="med"/>
+                      <a:tailEnd type="none" w="med" len="med"/>
+                    </a:lnR>
+                    <a:lnT w="12700" cap="flat" cmpd="sng" algn="ctr">
+                      <a:solidFill>
+                        <a:schemeClr val="tx1"/>
+                      </a:solidFill>
+                      <a:prstDash val="solid"/>
+                      <a:round/>
+                      <a:headEnd type="none" w="med" len="med"/>
+                      <a:tailEnd type="none" w="med" len="med"/>
+                    </a:lnT>
+                    <a:lnB w="12700" cap="flat" cmpd="sng" algn="ctr">
+                      <a:solidFill>
+                        <a:schemeClr val="tx1"/>
+                      </a:solidFill>
+                      <a:prstDash val="solid"/>
+                      <a:round/>
+                      <a:headEnd type="none" w="med" len="med"/>
+                      <a:tailEnd type="none" w="med" len="med"/>
+                    </a:lnB>
+                  </a:tcPr>
+                </a:tc>
+                <a:extLst>
+                  <a:ext uri="{0D108BD9-81ED-4DB2-BD59-A6C34878D82A}">
+                    <a16:rowId xmlns:a16="http://schemas.microsoft.com/office/drawing/2014/main" val="2370923846"/>
+                  </a:ext>
+                </a:extLst>
+              </a:tr>
+            </a:tbl>
+          </a:graphicData>
+        </a:graphic>
+      </p:graphicFrame>
+    </p:spTree>
+    <p:extLst>
+      <p:ext uri="{BB962C8B-B14F-4D97-AF65-F5344CB8AC3E}">
+        <p14:creationId xmlns:p14="http://schemas.microsoft.com/office/powerpoint/2010/main" val="2082572573"/>
+      </p:ext>
+    </p:extLst>
+  </p:cSld>
+  <p:clrMapOvr>
+    <a:masterClrMapping/>
+  </p:clrMapOvr>
+</p:sld>
+</file>
+
+<file path=ppt/slides/slide8.xml><?xml version="1.0" encoding="utf-8"?>
+<p:sld xmlns:a="http://schemas.openxmlformats.org/drawingml/2006/main" xmlns:r="http://schemas.openxmlformats.org/officeDocument/2006/relationships" xmlns:p="http://schemas.openxmlformats.org/presentationml/2006/main">
+  <p:cSld>
+    <p:spTree>
+      <p:nvGrpSpPr>
+        <p:cNvPr id="1" name="">
+          <a:extLst>
+            <a:ext uri="{FF2B5EF4-FFF2-40B4-BE49-F238E27FC236}">
               <a16:creationId xmlns:a16="http://schemas.microsoft.com/office/drawing/2014/main" id="{1A469E13-23B5-9F02-3CD9-1613E4BC7B82}"/>
             </a:ext>
           </a:extLst>
@@ -8728,7 +13123,7 @@
         <p:spPr>
           <a:xfrm>
             <a:off x="1097280" y="1737360"/>
-            <a:ext cx="3220720" cy="3699474"/>
+            <a:ext cx="3220720" cy="4315027"/>
           </a:xfrm>
           <a:prstGeom prst="rect">
             <a:avLst/>
@@ -8750,7 +13145,7 @@
             </a:pPr>
             <a:r>
               <a:rPr lang="en-US" sz="2000" dirty="0"/>
-              <a:t>Profile management</a:t>
+              <a:t>Communication</a:t>
             </a:r>
           </a:p>
           <a:p>
@@ -8763,7 +13158,7 @@
             </a:pPr>
             <a:r>
               <a:rPr lang="en-US" sz="2000" dirty="0"/>
-              <a:t>Communication</a:t>
+              <a:t>Filesharing</a:t>
             </a:r>
           </a:p>
           <a:p>
@@ -8776,7 +13171,7 @@
             </a:pPr>
             <a:r>
               <a:rPr lang="en-US" sz="2000" dirty="0"/>
-              <a:t>Search</a:t>
+              <a:t>Assignment tracking</a:t>
             </a:r>
           </a:p>
           <a:p>
@@ -8789,7 +13184,7 @@
             </a:pPr>
             <a:r>
               <a:rPr lang="en-US" sz="2000" dirty="0"/>
-              <a:t>Social networking</a:t>
+              <a:t>Study tools</a:t>
             </a:r>
           </a:p>
           <a:p>
@@ -8802,7 +13197,7 @@
             </a:pPr>
             <a:r>
               <a:rPr lang="en-US" sz="2000" dirty="0"/>
-              <a:t>Assignment tracking</a:t>
+              <a:t>Profile management</a:t>
             </a:r>
           </a:p>
           <a:p>
@@ -8815,7 +13210,20 @@
             </a:pPr>
             <a:r>
               <a:rPr lang="en-US" sz="2000" dirty="0"/>
-              <a:t>Study tools</a:t>
+              <a:t>Social networking</a:t>
+            </a:r>
+          </a:p>
+          <a:p>
+            <a:pPr marL="285750" indent="-285750">
+              <a:lnSpc>
+                <a:spcPct val="200000"/>
+              </a:lnSpc>
+              <a:buFont typeface="Arial" panose="020B0604020202020204" pitchFamily="34" charset="0"/>
+              <a:buChar char="•"/>
+            </a:pPr>
+            <a:r>
+              <a:rPr lang="en-US" sz="2000" dirty="0"/>
+              <a:t>Search</a:t>
             </a:r>
           </a:p>
         </p:txBody>
@@ -8965,7 +13373,7 @@
 </p:sld>
 </file>
 
-<file path=ppt/slides/slide8.xml><?xml version="1.0" encoding="utf-8"?>
+<file path=ppt/slides/slide9.xml><?xml version="1.0" encoding="utf-8"?>
 <p:sld xmlns:a="http://schemas.openxmlformats.org/drawingml/2006/main" xmlns:r="http://schemas.openxmlformats.org/officeDocument/2006/relationships" xmlns:p="http://schemas.openxmlformats.org/presentationml/2006/main">
   <p:cSld>
     <p:spTree>
@@ -9031,7 +13439,7 @@
         <p:spPr>
           <a:xfrm>
             <a:off x="1097280" y="1737360"/>
-            <a:ext cx="6267450" cy="3083921"/>
+            <a:ext cx="6267450" cy="2468368"/>
           </a:xfrm>
           <a:prstGeom prst="rect">
             <a:avLst/>
@@ -9043,19 +13451,6 @@
             <a:spAutoFit/>
           </a:bodyPr>
           <a:lstStyle/>
-          <a:p>
-            <a:pPr marL="285750" indent="-285750">
-              <a:lnSpc>
-                <a:spcPct val="200000"/>
-              </a:lnSpc>
-              <a:buFont typeface="Arial" panose="020B0604020202020204" pitchFamily="34" charset="0"/>
-              <a:buChar char="•"/>
-            </a:pPr>
-            <a:r>
-              <a:rPr lang="en-US" sz="2000" dirty="0"/>
-              <a:t>File sharing</a:t>
-            </a:r>
-          </a:p>
           <a:p>
             <a:pPr marL="285750" indent="-285750">
               <a:lnSpc>
@@ -9216,250 +13611,6 @@
     <p:extLst>
       <p:ext uri="{BB962C8B-B14F-4D97-AF65-F5344CB8AC3E}">
         <p14:creationId xmlns:p14="http://schemas.microsoft.com/office/powerpoint/2010/main" val="3435960839"/>
-      </p:ext>
-    </p:extLst>
-  </p:cSld>
-  <p:clrMapOvr>
-    <a:masterClrMapping/>
-  </p:clrMapOvr>
-</p:sld>
-</file>
-
-<file path=ppt/slides/slide9.xml><?xml version="1.0" encoding="utf-8"?>
-<p:sld xmlns:a="http://schemas.openxmlformats.org/drawingml/2006/main" xmlns:r="http://schemas.openxmlformats.org/officeDocument/2006/relationships" xmlns:p="http://schemas.openxmlformats.org/presentationml/2006/main">
-  <p:cSld>
-    <p:spTree>
-      <p:nvGrpSpPr>
-        <p:cNvPr id="1" name="">
-          <a:extLst>
-            <a:ext uri="{FF2B5EF4-FFF2-40B4-BE49-F238E27FC236}">
-              <a16:creationId xmlns:a16="http://schemas.microsoft.com/office/drawing/2014/main" id="{1A30B569-EFAB-5D0B-5805-779BF4F6045A}"/>
-            </a:ext>
-          </a:extLst>
-        </p:cNvPr>
-        <p:cNvGrpSpPr/>
-        <p:nvPr/>
-      </p:nvGrpSpPr>
-      <p:grpSpPr>
-        <a:xfrm>
-          <a:off x="0" y="0"/>
-          <a:ext cx="0" cy="0"/>
-          <a:chOff x="0" y="0"/>
-          <a:chExt cx="0" cy="0"/>
-        </a:xfrm>
-      </p:grpSpPr>
-      <p:sp>
-        <p:nvSpPr>
-          <p:cNvPr id="2" name="Title 1">
-            <a:extLst>
-              <a:ext uri="{FF2B5EF4-FFF2-40B4-BE49-F238E27FC236}">
-                <a16:creationId xmlns:a16="http://schemas.microsoft.com/office/drawing/2014/main" id="{0953CBA4-4646-FBD2-58BA-9CAEB90DA639}"/>
-              </a:ext>
-            </a:extLst>
-          </p:cNvPr>
-          <p:cNvSpPr>
-            <a:spLocks noGrp="1"/>
-          </p:cNvSpPr>
-          <p:nvPr>
-            <p:ph type="title"/>
-          </p:nvPr>
-        </p:nvSpPr>
-        <p:spPr/>
-        <p:txBody>
-          <a:bodyPr/>
-          <a:lstStyle/>
-          <a:p>
-            <a:r>
-              <a:rPr lang="en-US" dirty="0"/>
-              <a:t>Nonfunctional Requirements</a:t>
-            </a:r>
-          </a:p>
-        </p:txBody>
-      </p:sp>
-      <p:pic>
-        <p:nvPicPr>
-          <p:cNvPr id="3" name="Picture 2" descr="A logo with a light bulb and text&#10;&#10;AI-generated content may be incorrect.">
-            <a:extLst>
-              <a:ext uri="{FF2B5EF4-FFF2-40B4-BE49-F238E27FC236}">
-                <a16:creationId xmlns:a16="http://schemas.microsoft.com/office/drawing/2014/main" id="{B0EF75C4-38CF-B684-CD2E-9E607FDF86E2}"/>
-              </a:ext>
-            </a:extLst>
-          </p:cNvPr>
-          <p:cNvPicPr>
-            <a:picLocks noChangeAspect="1"/>
-          </p:cNvPicPr>
-          <p:nvPr/>
-        </p:nvPicPr>
-        <p:blipFill>
-          <a:blip r:embed="rId3">
-            <a:extLst>
-              <a:ext uri="{28A0092B-C50C-407E-A947-70E740481C1C}">
-                <a14:useLocalDpi xmlns:a14="http://schemas.microsoft.com/office/drawing/2010/main" val="0"/>
-              </a:ext>
-            </a:extLst>
-          </a:blip>
-          <a:stretch>
-            <a:fillRect/>
-          </a:stretch>
-        </p:blipFill>
-        <p:spPr>
-          <a:xfrm>
-            <a:off x="11354417" y="0"/>
-            <a:ext cx="837583" cy="837583"/>
-          </a:xfrm>
-          <a:prstGeom prst="rect">
-            <a:avLst/>
-          </a:prstGeom>
-        </p:spPr>
-      </p:pic>
-      <p:sp>
-        <p:nvSpPr>
-          <p:cNvPr id="4" name="TextBox 3">
-            <a:extLst>
-              <a:ext uri="{FF2B5EF4-FFF2-40B4-BE49-F238E27FC236}">
-                <a16:creationId xmlns:a16="http://schemas.microsoft.com/office/drawing/2014/main" id="{26533C51-4C05-291F-EC90-687738912887}"/>
-              </a:ext>
-            </a:extLst>
-          </p:cNvPr>
-          <p:cNvSpPr txBox="1"/>
-          <p:nvPr/>
-        </p:nvSpPr>
-        <p:spPr>
-          <a:xfrm>
-            <a:off x="1230923" y="2074985"/>
-            <a:ext cx="10058400" cy="5909310"/>
-          </a:xfrm>
-          <a:prstGeom prst="rect">
-            <a:avLst/>
-          </a:prstGeom>
-          <a:noFill/>
-        </p:spPr>
-        <p:txBody>
-          <a:bodyPr wrap="square" rtlCol="0">
-            <a:spAutoFit/>
-          </a:bodyPr>
-          <a:lstStyle/>
-          <a:p>
-            <a:pPr marL="285750" indent="-285750">
-              <a:lnSpc>
-                <a:spcPct val="200000"/>
-              </a:lnSpc>
-              <a:buFont typeface="Arial" panose="020B0604020202020204" pitchFamily="34" charset="0"/>
-              <a:buChar char="•"/>
-            </a:pPr>
-            <a:r>
-              <a:rPr lang="en-US" sz="2000" dirty="0"/>
-              <a:t>Performance</a:t>
-            </a:r>
-          </a:p>
-          <a:p>
-            <a:pPr marL="285750" indent="-285750">
-              <a:lnSpc>
-                <a:spcPct val="200000"/>
-              </a:lnSpc>
-              <a:buFont typeface="Arial" panose="020B0604020202020204" pitchFamily="34" charset="0"/>
-              <a:buChar char="•"/>
-            </a:pPr>
-            <a:r>
-              <a:rPr lang="en-US" sz="2000" dirty="0"/>
-              <a:t>Security</a:t>
-            </a:r>
-          </a:p>
-          <a:p>
-            <a:pPr marL="285750" indent="-285750">
-              <a:lnSpc>
-                <a:spcPct val="200000"/>
-              </a:lnSpc>
-              <a:buFont typeface="Arial" panose="020B0604020202020204" pitchFamily="34" charset="0"/>
-              <a:buChar char="•"/>
-            </a:pPr>
-            <a:r>
-              <a:rPr lang="en-US" sz="2000" dirty="0"/>
-              <a:t>Usability</a:t>
-            </a:r>
-          </a:p>
-          <a:p>
-            <a:pPr marL="285750" indent="-285750">
-              <a:lnSpc>
-                <a:spcPct val="200000"/>
-              </a:lnSpc>
-              <a:buFont typeface="Arial" panose="020B0604020202020204" pitchFamily="34" charset="0"/>
-              <a:buChar char="•"/>
-            </a:pPr>
-            <a:r>
-              <a:rPr lang="en-US" sz="2000" dirty="0"/>
-              <a:t>Compatibility</a:t>
-            </a:r>
-          </a:p>
-          <a:p>
-            <a:pPr marL="285750" indent="-285750">
-              <a:lnSpc>
-                <a:spcPct val="200000"/>
-              </a:lnSpc>
-              <a:buFont typeface="Arial" panose="020B0604020202020204" pitchFamily="34" charset="0"/>
-              <a:buChar char="•"/>
-            </a:pPr>
-            <a:r>
-              <a:rPr lang="en-US" sz="2000" dirty="0"/>
-              <a:t>Privacy</a:t>
-            </a:r>
-          </a:p>
-          <a:p>
-            <a:pPr marL="285750" indent="-285750">
-              <a:lnSpc>
-                <a:spcPct val="200000"/>
-              </a:lnSpc>
-              <a:buFont typeface="Arial" panose="020B0604020202020204" pitchFamily="34" charset="0"/>
-              <a:buChar char="•"/>
-            </a:pPr>
-            <a:r>
-              <a:rPr lang="en-US" sz="2000" dirty="0"/>
-              <a:t>Scalability</a:t>
-            </a:r>
-          </a:p>
-          <a:p>
-            <a:pPr marL="285750" indent="-285750">
-              <a:lnSpc>
-                <a:spcPct val="200000"/>
-              </a:lnSpc>
-              <a:buFont typeface="Arial" panose="020B0604020202020204" pitchFamily="34" charset="0"/>
-              <a:buChar char="•"/>
-            </a:pPr>
-            <a:endParaRPr lang="en-US" sz="2000" dirty="0"/>
-          </a:p>
-          <a:p>
-            <a:pPr marL="285750" indent="-285750">
-              <a:lnSpc>
-                <a:spcPct val="200000"/>
-              </a:lnSpc>
-              <a:buFont typeface="Arial" panose="020B0604020202020204" pitchFamily="34" charset="0"/>
-              <a:buChar char="•"/>
-            </a:pPr>
-            <a:endParaRPr lang="en-US" sz="2000" dirty="0"/>
-          </a:p>
-          <a:p>
-            <a:pPr marL="285750" indent="-285750">
-              <a:lnSpc>
-                <a:spcPct val="200000"/>
-              </a:lnSpc>
-              <a:buFont typeface="Arial" panose="020B0604020202020204" pitchFamily="34" charset="0"/>
-              <a:buChar char="•"/>
-            </a:pPr>
-            <a:endParaRPr lang="en-US" sz="2000" dirty="0"/>
-          </a:p>
-          <a:p>
-            <a:pPr marL="285750" indent="-285750">
-              <a:buFont typeface="Arial" panose="020B0604020202020204" pitchFamily="34" charset="0"/>
-              <a:buChar char="•"/>
-            </a:pPr>
-            <a:endParaRPr lang="en-US" dirty="0"/>
-          </a:p>
-        </p:txBody>
-      </p:sp>
-    </p:spTree>
-    <p:extLst>
-      <p:ext uri="{BB962C8B-B14F-4D97-AF65-F5344CB8AC3E}">
-        <p14:creationId xmlns:p14="http://schemas.microsoft.com/office/powerpoint/2010/main" val="1802189812"/>
       </p:ext>
     </p:extLst>
   </p:cSld>
